--- a/Literature Review/KW09/09.07.2026.pptx
+++ b/Literature Review/KW09/09.07.2026.pptx
@@ -6,10 +6,10 @@
     <p:sldMasterId id="2147483656" r:id="rId2"/>
   </p:sldMasterIdLst>
   <p:notesMasterIdLst>
-    <p:notesMasterId r:id="rId15"/>
+    <p:notesMasterId r:id="rId20"/>
   </p:notesMasterIdLst>
   <p:handoutMasterIdLst>
-    <p:handoutMasterId r:id="rId16"/>
+    <p:handoutMasterId r:id="rId21"/>
   </p:handoutMasterIdLst>
   <p:sldIdLst>
     <p:sldId id="285" r:id="rId3"/>
@@ -20,15 +20,20 @@
     <p:sldId id="318" r:id="rId8"/>
     <p:sldId id="321" r:id="rId9"/>
     <p:sldId id="316" r:id="rId10"/>
-    <p:sldId id="322" r:id="rId11"/>
-    <p:sldId id="317" r:id="rId12"/>
-    <p:sldId id="323" r:id="rId13"/>
-    <p:sldId id="313" r:id="rId14"/>
+    <p:sldId id="325" r:id="rId11"/>
+    <p:sldId id="329" r:id="rId12"/>
+    <p:sldId id="322" r:id="rId13"/>
+    <p:sldId id="328" r:id="rId14"/>
+    <p:sldId id="324" r:id="rId15"/>
+    <p:sldId id="323" r:id="rId16"/>
+    <p:sldId id="326" r:id="rId17"/>
+    <p:sldId id="327" r:id="rId18"/>
+    <p:sldId id="313" r:id="rId19"/>
   </p:sldIdLst>
   <p:sldSz cx="12190413" cy="6858000"/>
   <p:notesSz cx="6797675" cy="9926638"/>
   <p:custDataLst>
-    <p:tags r:id="rId17"/>
+    <p:tags r:id="rId22"/>
   </p:custDataLst>
   <p:defaultTextStyle>
     <a:defPPr>
@@ -163,12 +168,12 @@
             <a:srgbClr val="A4A3A4"/>
           </p15:clr>
         </p15:guide>
-        <p15:guide id="2" orient="horz" pos="726" userDrawn="1">
+        <p15:guide id="2" orient="horz" pos="725" userDrawn="1">
           <p15:clr>
             <a:srgbClr val="A4A3A4"/>
           </p15:clr>
         </p15:guide>
-        <p15:guide id="3" orient="horz" pos="3694" userDrawn="1">
+        <p15:guide id="3" orient="horz" pos="3706" userDrawn="1">
           <p15:clr>
             <a:srgbClr val="A4A3A4"/>
           </p15:clr>
@@ -203,7 +208,7 @@
             <a:srgbClr val="A4A3A4"/>
           </p15:clr>
         </p15:guide>
-        <p15:guide id="10" pos="3840" userDrawn="1">
+        <p15:guide id="10" pos="3839" userDrawn="1">
           <p15:clr>
             <a:srgbClr val="A4A3A4"/>
           </p15:clr>
@@ -326,7 +331,7 @@
             </a:pPr>
             <a:fld id="{497B89D5-5017-4396-A2CE-F1C12124EE0F}" type="datetimeFigureOut">
               <a:rPr lang="de-DE"/>
-              <a:t>25.06.2026</a:t>
+              <a:t>26.06.2026</a:t>
             </a:fld>
             <a:endParaRPr lang="de-DE" dirty="0"/>
           </a:p>
@@ -536,7 +541,7 @@
             </a:pPr>
             <a:fld id="{4EEC745E-66A0-4F49-903C-36561B63B5F1}" type="datetimeFigureOut">
               <a:rPr lang="de-DE"/>
-              <a:t>25.06.2026</a:t>
+              <a:t>26.06.2026</a:t>
             </a:fld>
             <a:endParaRPr lang="de-DE" dirty="0"/>
           </a:p>
@@ -1373,7 +1378,7 @@
             <a:pPr algn="l"/>
             <a:fld id="{D7F12259-4066-44C3-AC08-F5ADAE7E0447}" type="datetime5">
               <a:rPr lang="zh-CN" altLang="en-US" smtClean="0"/>
-              <a:t>2026/6/25</a:t>
+              <a:t>2026/6/26</a:t>
             </a:fld>
             <a:endParaRPr lang="de-DE" dirty="0"/>
           </a:p>
@@ -2064,7 +2069,7 @@
             <a:pPr algn="l"/>
             <a:fld id="{6D3069C6-0311-4A39-8CC1-DA405FE38D0C}" type="datetime5">
               <a:rPr lang="zh-CN" altLang="en-US" smtClean="0"/>
-              <a:t>2026/6/25</a:t>
+              <a:t>2026/6/26</a:t>
             </a:fld>
             <a:endParaRPr lang="de-DE" dirty="0"/>
           </a:p>
@@ -4122,7 +4127,7 @@
             <a:pPr algn="l"/>
             <a:fld id="{74486B41-BCE2-48B7-876C-2B3490450D97}" type="datetime5">
               <a:rPr lang="zh-CN" altLang="en-US" smtClean="0"/>
-              <a:t>2026/6/25</a:t>
+              <a:t>2026/6/26</a:t>
             </a:fld>
             <a:endParaRPr lang="de-DE" dirty="0"/>
           </a:p>
@@ -4493,7 +4498,7 @@
             <a:pPr algn="l"/>
             <a:fld id="{85D6FCC3-EE37-4749-9624-859AF44EE717}" type="datetime5">
               <a:rPr lang="zh-CN" altLang="en-US" smtClean="0"/>
-              <a:t>2026/6/25</a:t>
+              <a:t>2026/6/26</a:t>
             </a:fld>
             <a:endParaRPr lang="de-DE" dirty="0"/>
           </a:p>
@@ -4632,7 +4637,7 @@
             <a:pPr algn="l"/>
             <a:fld id="{E47FF345-F1B3-44B8-9B74-D6676F7F0EE5}" type="datetime5">
               <a:rPr lang="zh-CN" altLang="en-US" smtClean="0"/>
-              <a:t>2026/6/25</a:t>
+              <a:t>2026/6/26</a:t>
             </a:fld>
             <a:endParaRPr lang="de-DE" dirty="0"/>
           </a:p>
@@ -4974,7 +4979,7 @@
             <a:pPr algn="l"/>
             <a:fld id="{6D3069C6-0311-4A39-8CC1-DA405FE38D0C}" type="datetime5">
               <a:rPr lang="zh-CN" altLang="en-US" smtClean="0"/>
-              <a:t>2026/6/25</a:t>
+              <a:t>2026/6/26</a:t>
             </a:fld>
             <a:endParaRPr lang="de-DE" dirty="0"/>
           </a:p>
@@ -7268,7 +7273,7 @@
             <a:pPr algn="l"/>
             <a:fld id="{F887C18F-21B2-48B8-9586-9343C0AE58EE}" type="datetime5">
               <a:rPr lang="zh-CN" altLang="en-US" smtClean="0"/>
-              <a:t>2026/6/25</a:t>
+              <a:t>2026/6/26</a:t>
             </a:fld>
             <a:endParaRPr lang="de-DE" dirty="0"/>
           </a:p>
@@ -7635,7 +7640,7 @@
             <a:pPr algn="l"/>
             <a:fld id="{E5AF013B-EAD8-4321-9A97-347E14C68B05}" type="datetime5">
               <a:rPr lang="zh-CN" altLang="en-US" smtClean="0"/>
-              <a:t>2026/6/25</a:t>
+              <a:t>2026/6/26</a:t>
             </a:fld>
             <a:endParaRPr lang="de-DE" dirty="0"/>
           </a:p>
@@ -7770,7 +7775,7 @@
             <a:pPr algn="l"/>
             <a:fld id="{D3F884E6-7726-4AAA-A0CE-C180A27151DE}" type="datetime5">
               <a:rPr lang="zh-CN" altLang="en-US" smtClean="0"/>
-              <a:t>2026/6/25</a:t>
+              <a:t>2026/6/26</a:t>
             </a:fld>
             <a:endParaRPr lang="de-DE" dirty="0"/>
           </a:p>
@@ -7865,7 +7870,7 @@
           <a:p>
             <a:fld id="{D35072EC-9367-4D7B-8652-6A082F0A7E89}" type="datetime5">
               <a:rPr lang="zh-CN" altLang="en-US" smtClean="0"/>
-              <a:t>2026/6/25</a:t>
+              <a:t>2026/6/26</a:t>
             </a:fld>
             <a:endParaRPr lang="de-DE" dirty="0"/>
           </a:p>
@@ -8449,7 +8454,7 @@
             <a:pPr algn="l"/>
             <a:fld id="{11769DE8-88E0-424A-87BD-6924D1146258}" type="datetime5">
               <a:rPr lang="zh-CN" altLang="en-US" smtClean="0"/>
-              <a:t>2026/6/25</a:t>
+              <a:t>2026/6/26</a:t>
             </a:fld>
             <a:endParaRPr lang="de-DE" dirty="0"/>
           </a:p>
@@ -9163,7 +9168,7 @@
             <a:pPr algn="l"/>
             <a:fld id="{11769DE8-88E0-424A-87BD-6924D1146258}" type="datetime5">
               <a:rPr lang="zh-CN" altLang="en-US" smtClean="0"/>
-              <a:t>2026/6/25</a:t>
+              <a:t>2026/6/26</a:t>
             </a:fld>
             <a:endParaRPr lang="de-DE" dirty="0"/>
           </a:p>
@@ -9392,7 +9397,7 @@
           <a:p>
             <a:fld id="{D35072EC-9367-4D7B-8652-6A082F0A7E89}" type="datetime5">
               <a:rPr lang="zh-CN" altLang="en-US" smtClean="0"/>
-              <a:t>2026/6/25</a:t>
+              <a:t>2026/6/26</a:t>
             </a:fld>
             <a:endParaRPr lang="de-DE" dirty="0"/>
           </a:p>
@@ -10262,7 +10267,7 @@
           <a:p>
             <a:fld id="{C2CC8288-72D4-44E2-951D-741F8F954282}" type="datetime5">
               <a:rPr lang="zh-CN" altLang="en-US" smtClean="0"/>
-              <a:t>2026/6/25</a:t>
+              <a:t>2026/6/26</a:t>
             </a:fld>
             <a:endParaRPr lang="de-DE" dirty="0"/>
           </a:p>
@@ -11061,7 +11066,7 @@
             <a:pPr algn="l"/>
             <a:fld id="{6D3069C6-0311-4A39-8CC1-DA405FE38D0C}" type="datetime5">
               <a:rPr lang="zh-CN" altLang="en-US" smtClean="0"/>
-              <a:t>2026/6/25</a:t>
+              <a:t>2026/6/26</a:t>
             </a:fld>
             <a:endParaRPr lang="de-DE" dirty="0"/>
           </a:p>
@@ -11091,13 +11096,7 @@
       </p:sp>
       <p:pic>
         <p:nvPicPr>
-          <p:cNvPr id="6" name="图片 5">
-            <a:extLst>
-              <a:ext uri="{FF2B5EF4-FFF2-40B4-BE49-F238E27FC236}">
-                <a16:creationId xmlns:a16="http://schemas.microsoft.com/office/drawing/2014/main" id="{70A28586-7518-0949-E276-3F51C9BE7212}"/>
-              </a:ext>
-            </a:extLst>
-          </p:cNvPr>
+          <p:cNvPr id="6" name="图片 5"/>
           <p:cNvPicPr>
             <a:picLocks noChangeAspect="1"/>
           </p:cNvPicPr>
@@ -11127,16 +11126,8 @@
       </p:pic>
       <p:sp>
         <p:nvSpPr>
-          <p:cNvPr id="13" name="页脚占位符 10">
-            <a:extLst>
-              <a:ext uri="{FF2B5EF4-FFF2-40B4-BE49-F238E27FC236}">
-                <a16:creationId xmlns:a16="http://schemas.microsoft.com/office/drawing/2014/main" id="{A785B1A1-0CC0-E325-6605-6D0FBFCE5B38}"/>
-              </a:ext>
-            </a:extLst>
-          </p:cNvPr>
-          <p:cNvSpPr txBox="1">
-            <a:spLocks/>
-          </p:cNvSpPr>
+          <p:cNvPr id="13" name="页脚占位符 10"/>
+          <p:cNvSpPr txBox="1"/>
           <p:nvPr/>
         </p:nvSpPr>
         <p:spPr>
@@ -11315,7 +11306,13 @@
       </p:grpSpPr>
       <p:sp>
         <p:nvSpPr>
-          <p:cNvPr id="5" name="标题 4"/>
+          <p:cNvPr id="2" name="标题 1">
+            <a:extLst>
+              <a:ext uri="{FF2B5EF4-FFF2-40B4-BE49-F238E27FC236}">
+                <a16:creationId xmlns:a16="http://schemas.microsoft.com/office/drawing/2014/main" id="{6226A2EF-C92D-5728-96B5-AA3CFA3D514F}"/>
+              </a:ext>
+            </a:extLst>
+          </p:cNvPr>
           <p:cNvSpPr>
             <a:spLocks noGrp="1"/>
           </p:cNvSpPr>
@@ -11329,15 +11326,26 @@
           <a:lstStyle/>
           <a:p>
             <a:r>
-              <a:rPr lang="en-US" altLang="zh-CN"/>
-              <a:t>Aktuelle Arbeit</a:t>
-            </a:r>
-          </a:p>
-        </p:txBody>
-      </p:sp>
-      <p:sp>
-        <p:nvSpPr>
-          <p:cNvPr id="6" name="内容占位符 5"/>
+              <a:rPr lang="en-US" altLang="zh-CN" dirty="0"/>
+              <a:t>ML- und Transfer Leraning</a:t>
+            </a:r>
+            <a:r>
+              <a:rPr lang="en-US" altLang="zh-CN" baseline="30000" dirty="0"/>
+              <a:t>3</a:t>
+            </a:r>
+            <a:endParaRPr lang="zh-CN" altLang="en-US" baseline="30000" dirty="0"/>
+          </a:p>
+        </p:txBody>
+      </p:sp>
+      <p:sp>
+        <p:nvSpPr>
+          <p:cNvPr id="3" name="内容占位符 2">
+            <a:extLst>
+              <a:ext uri="{FF2B5EF4-FFF2-40B4-BE49-F238E27FC236}">
+                <a16:creationId xmlns:a16="http://schemas.microsoft.com/office/drawing/2014/main" id="{70C10CCF-50C4-8A18-FDC3-26468128C3F6}"/>
+              </a:ext>
+            </a:extLst>
+          </p:cNvPr>
           <p:cNvSpPr>
             <a:spLocks noGrp="1"/>
           </p:cNvSpPr>
@@ -11350,18 +11358,149 @@
           <a:bodyPr/>
           <a:lstStyle/>
           <a:p>
-            <a:endParaRPr lang="zh-CN" altLang="en-US"/>
-          </a:p>
-        </p:txBody>
-      </p:sp>
-      <p:sp>
-        <p:nvSpPr>
-          <p:cNvPr id="2" name="日期占位符 1"/>
+            <a:r>
+              <a:rPr lang="en-US" altLang="zh-CN" dirty="0"/>
+              <a:t>Machine Learning</a:t>
+            </a:r>
+          </a:p>
+          <a:p>
+            <a:pPr lvl="1"/>
+            <a:r>
+              <a:rPr lang="en-US" altLang="zh-CN" dirty="0"/>
+              <a:t>Input</a:t>
+            </a:r>
+          </a:p>
+          <a:p>
+            <a:pPr lvl="2"/>
+            <a:r>
+              <a:rPr lang="en-US" altLang="zh-CN" dirty="0" err="1"/>
+              <a:t>Spannungsrelaxation</a:t>
+            </a:r>
+            <a:endParaRPr lang="en-US" altLang="zh-CN" dirty="0"/>
+          </a:p>
+          <a:p>
+            <a:pPr lvl="2"/>
+            <a:r>
+              <a:rPr lang="en-US" altLang="zh-CN" dirty="0" err="1"/>
+              <a:t>Entladeabschnitte</a:t>
+            </a:r>
+            <a:endParaRPr lang="en-US" altLang="zh-CN" dirty="0"/>
+          </a:p>
+          <a:p>
+            <a:pPr lvl="2"/>
+            <a:r>
+              <a:rPr lang="en-US" altLang="zh-CN" dirty="0" err="1"/>
+              <a:t>Rekonstruierter</a:t>
+            </a:r>
+            <a:r>
+              <a:rPr lang="en-US" altLang="zh-CN" dirty="0"/>
+              <a:t> SOH</a:t>
+            </a:r>
+          </a:p>
+          <a:p>
+            <a:pPr lvl="1"/>
+            <a:endParaRPr lang="en-US" altLang="zh-CN" dirty="0"/>
+          </a:p>
+          <a:p>
+            <a:pPr lvl="1"/>
+            <a:r>
+              <a:rPr lang="en-US" altLang="zh-CN" dirty="0"/>
+              <a:t>Feature-Gruppen</a:t>
+            </a:r>
+          </a:p>
+          <a:p>
+            <a:pPr lvl="2"/>
+            <a:r>
+              <a:rPr lang="en-US" altLang="zh-CN" dirty="0"/>
+              <a:t>ORIGI: </a:t>
+            </a:r>
+            <a:r>
+              <a:rPr lang="en-US" altLang="zh-CN" dirty="0" err="1"/>
+              <a:t>resamplelte</a:t>
+            </a:r>
+            <a:r>
+              <a:rPr lang="en-US" altLang="zh-CN" dirty="0"/>
+              <a:t> </a:t>
+            </a:r>
+            <a:r>
+              <a:rPr lang="en-US" altLang="zh-CN" dirty="0" err="1"/>
+              <a:t>Spannungswert</a:t>
+            </a:r>
+            <a:endParaRPr lang="en-US" altLang="zh-CN" dirty="0"/>
+          </a:p>
+          <a:p>
+            <a:pPr lvl="2"/>
+            <a:r>
+              <a:rPr lang="en-US" altLang="zh-CN" dirty="0"/>
+              <a:t>STATS: </a:t>
+            </a:r>
+            <a:r>
+              <a:rPr lang="en-US" altLang="zh-CN" dirty="0" err="1"/>
+              <a:t>Max,Mean,Min,Var,Ske,Kur</a:t>
+            </a:r>
+            <a:endParaRPr lang="en-US" altLang="zh-CN" dirty="0"/>
+          </a:p>
+          <a:p>
+            <a:pPr lvl="2"/>
+            <a:r>
+              <a:rPr lang="en-US" altLang="zh-CN" dirty="0">
+                <a:solidFill>
+                  <a:srgbClr val="FF0000"/>
+                </a:solidFill>
+              </a:rPr>
+              <a:t>ECM:OCV,R0,R1,R2,C1,C2</a:t>
+            </a:r>
+          </a:p>
+          <a:p>
+            <a:pPr lvl="1"/>
+            <a:r>
+              <a:rPr lang="en-US" altLang="zh-CN" dirty="0"/>
+              <a:t>Ziel:</a:t>
+            </a:r>
+          </a:p>
+          <a:p>
+            <a:pPr lvl="2"/>
+            <a:r>
+              <a:rPr lang="en-US" altLang="zh-CN" dirty="0"/>
+              <a:t>SOH-</a:t>
+            </a:r>
+            <a:r>
+              <a:rPr lang="de-DE" altLang="zh-CN" dirty="0"/>
+              <a:t>Schätzung</a:t>
+            </a:r>
+          </a:p>
+          <a:p>
+            <a:pPr lvl="2"/>
+            <a:r>
+              <a:rPr lang="de-DE" altLang="zh-CN" dirty="0"/>
+              <a:t>RMSE</a:t>
+            </a:r>
+            <a:r>
+              <a:rPr lang="en-US" altLang="zh-CN" dirty="0"/>
+              <a:t>/MAE/R</a:t>
+            </a:r>
+            <a:r>
+              <a:rPr lang="en-US" altLang="zh-CN" baseline="30000" dirty="0"/>
+              <a:t>2</a:t>
+            </a:r>
+            <a:endParaRPr lang="zh-CN" altLang="en-US" baseline="30000" dirty="0"/>
+          </a:p>
+        </p:txBody>
+      </p:sp>
+      <p:sp>
+        <p:nvSpPr>
+          <p:cNvPr id="7" name="内容占位符 6">
+            <a:extLst>
+              <a:ext uri="{FF2B5EF4-FFF2-40B4-BE49-F238E27FC236}">
+                <a16:creationId xmlns:a16="http://schemas.microsoft.com/office/drawing/2014/main" id="{470E75EA-F2F9-F551-F3F7-93895C99028D}"/>
+              </a:ext>
+            </a:extLst>
+          </p:cNvPr>
           <p:cNvSpPr>
             <a:spLocks noGrp="1"/>
           </p:cNvSpPr>
           <p:nvPr>
-            <p:ph type="dt" sz="half" idx="10"/>
+            <p:ph idx="13"/>
           </p:nvPr>
         </p:nvSpPr>
         <p:spPr/>
@@ -11369,22 +11508,137 @@
           <a:bodyPr/>
           <a:lstStyle/>
           <a:p>
-            <a:fld id="{D35072EC-9367-4D7B-8652-6A082F0A7E89}" type="datetime5">
-              <a:rPr lang="zh-CN" altLang="en-US" smtClean="0"/>
-              <a:t>2026/6/25</a:t>
-            </a:fld>
-            <a:endParaRPr lang="de-DE" dirty="0"/>
-          </a:p>
-        </p:txBody>
-      </p:sp>
-      <p:sp>
-        <p:nvSpPr>
-          <p:cNvPr id="3" name="页脚占位符 2"/>
+            <a:r>
+              <a:rPr lang="en-US" altLang="zh-CN" dirty="0"/>
+              <a:t>Transfer Learning</a:t>
+            </a:r>
+          </a:p>
+          <a:p>
+            <a:pPr lvl="1"/>
+            <a:r>
+              <a:rPr lang="en-US" altLang="zh-CN" dirty="0"/>
+              <a:t>Source Domain: NAC</a:t>
+            </a:r>
+          </a:p>
+          <a:p>
+            <a:pPr lvl="1"/>
+            <a:r>
+              <a:rPr lang="en-US" altLang="zh-CN" dirty="0"/>
+              <a:t>Target Domain: LFP</a:t>
+            </a:r>
+          </a:p>
+          <a:p>
+            <a:pPr lvl="1"/>
+            <a:r>
+              <a:rPr lang="en-US" altLang="zh-CN" dirty="0"/>
+              <a:t>TL1:Datenaugumentation</a:t>
+            </a:r>
+          </a:p>
+          <a:p>
+            <a:pPr lvl="2"/>
+            <a:r>
+              <a:rPr lang="en-US" altLang="zh-CN" dirty="0"/>
+              <a:t>SD + </a:t>
+            </a:r>
+            <a:r>
+              <a:rPr lang="en-US" altLang="zh-CN" dirty="0" err="1"/>
+              <a:t>wenige</a:t>
+            </a:r>
+            <a:r>
+              <a:rPr lang="en-US" altLang="zh-CN" dirty="0"/>
+              <a:t> TD-</a:t>
+            </a:r>
+            <a:r>
+              <a:rPr lang="en-US" altLang="zh-CN" dirty="0" err="1"/>
+              <a:t>Daten</a:t>
+            </a:r>
+            <a:endParaRPr lang="en-US" altLang="zh-CN" dirty="0"/>
+          </a:p>
+          <a:p>
+            <a:r>
+              <a:rPr lang="en-US" altLang="zh-CN" dirty="0"/>
+              <a:t>TL2:Feature Alignment</a:t>
+            </a:r>
+          </a:p>
+          <a:p>
+            <a:pPr lvl="1"/>
+            <a:r>
+              <a:rPr lang="en-US" altLang="zh-CN" dirty="0"/>
+              <a:t>TD-Feature -&gt;SD-Feature Raum</a:t>
+            </a:r>
+          </a:p>
+          <a:p>
+            <a:pPr lvl="1"/>
+            <a:r>
+              <a:rPr lang="en-US" altLang="zh-CN" dirty="0"/>
+              <a:t>X’ = X·diag(w)+b</a:t>
+            </a:r>
+          </a:p>
+          <a:p>
+            <a:r>
+              <a:rPr lang="en-US" altLang="zh-CN" dirty="0"/>
+              <a:t>TL3</a:t>
+            </a:r>
+          </a:p>
+          <a:p>
+            <a:pPr lvl="1"/>
+            <a:r>
+              <a:rPr lang="en-US" altLang="zh-CN" dirty="0"/>
+              <a:t>Source-Modell + </a:t>
+            </a:r>
+            <a:r>
+              <a:rPr lang="en-US" altLang="zh-CN" dirty="0" err="1"/>
+              <a:t>Korrekturmodell</a:t>
+            </a:r>
+            <a:endParaRPr lang="en-US" altLang="zh-CN" dirty="0"/>
+          </a:p>
+          <a:p>
+            <a:pPr lvl="1"/>
+            <a:r>
+              <a:rPr lang="en-US" altLang="zh-CN" dirty="0"/>
+              <a:t>ΔSOH = SOH</a:t>
+            </a:r>
+            <a:r>
+              <a:rPr lang="en-US" altLang="zh-CN" sz="2000" baseline="-25000" dirty="0"/>
+              <a:t>true</a:t>
+            </a:r>
+            <a:r>
+              <a:rPr lang="en-US" altLang="zh-CN" dirty="0"/>
+              <a:t> – SOH</a:t>
+            </a:r>
+            <a:r>
+              <a:rPr lang="en-US" altLang="zh-CN" baseline="-25000" dirty="0"/>
+              <a:t>pred</a:t>
+            </a:r>
+          </a:p>
+          <a:p>
+            <a:pPr lvl="1"/>
+            <a:r>
+              <a:rPr lang="en-US" altLang="zh-CN" dirty="0"/>
+              <a:t>Bias-</a:t>
+            </a:r>
+            <a:r>
+              <a:rPr lang="en-US" altLang="zh-CN" dirty="0" err="1"/>
+              <a:t>Korrektur</a:t>
+            </a:r>
+            <a:endParaRPr lang="en-US" altLang="zh-CN" dirty="0"/>
+          </a:p>
+        </p:txBody>
+      </p:sp>
+      <p:sp>
+        <p:nvSpPr>
+          <p:cNvPr id="4" name="日期占位符 3">
+            <a:extLst>
+              <a:ext uri="{FF2B5EF4-FFF2-40B4-BE49-F238E27FC236}">
+                <a16:creationId xmlns:a16="http://schemas.microsoft.com/office/drawing/2014/main" id="{17C7353B-1599-2F1C-D07A-BA2D6B9B5A30}"/>
+              </a:ext>
+            </a:extLst>
+          </p:cNvPr>
           <p:cNvSpPr>
             <a:spLocks noGrp="1"/>
           </p:cNvSpPr>
           <p:nvPr>
-            <p:ph type="ftr" sz="quarter" idx="11"/>
+            <p:ph type="dt" sz="half" idx="14"/>
           </p:nvPr>
         </p:nvSpPr>
         <p:spPr/>
@@ -11392,22 +11646,58 @@
           <a:bodyPr/>
           <a:lstStyle/>
           <a:p>
-            <a:r>
-              <a:rPr lang="en-US"/>
-              <a:t>Liang Huang</a:t>
-            </a:r>
-            <a:endParaRPr lang="en-US" dirty="0"/>
-          </a:p>
-        </p:txBody>
-      </p:sp>
-      <p:sp>
-        <p:nvSpPr>
-          <p:cNvPr id="4" name="灯片编号占位符 3"/>
+            <a:pPr algn="l"/>
+            <a:fld id="{F887C18F-21B2-48B8-9586-9343C0AE58EE}" type="datetime5">
+              <a:rPr lang="zh-CN" altLang="en-US" smtClean="0"/>
+              <a:t>2026/6/26</a:t>
+            </a:fld>
+            <a:endParaRPr lang="de-DE" dirty="0"/>
+          </a:p>
+        </p:txBody>
+      </p:sp>
+      <p:sp>
+        <p:nvSpPr>
+          <p:cNvPr id="5" name="页脚占位符 4">
+            <a:extLst>
+              <a:ext uri="{FF2B5EF4-FFF2-40B4-BE49-F238E27FC236}">
+                <a16:creationId xmlns:a16="http://schemas.microsoft.com/office/drawing/2014/main" id="{6D1DF1F6-B273-A507-C13D-9CAC443BD195}"/>
+              </a:ext>
+            </a:extLst>
+          </p:cNvPr>
           <p:cNvSpPr>
             <a:spLocks noGrp="1"/>
           </p:cNvSpPr>
           <p:nvPr>
-            <p:ph type="sldNum" sz="quarter" idx="12"/>
+            <p:ph type="ftr" sz="quarter" idx="15"/>
+          </p:nvPr>
+        </p:nvSpPr>
+        <p:spPr/>
+        <p:txBody>
+          <a:bodyPr/>
+          <a:lstStyle/>
+          <a:p>
+            <a:r>
+              <a:rPr lang="en-US"/>
+              <a:t>Liang Huang</a:t>
+            </a:r>
+            <a:endParaRPr lang="en-US" dirty="0"/>
+          </a:p>
+        </p:txBody>
+      </p:sp>
+      <p:sp>
+        <p:nvSpPr>
+          <p:cNvPr id="6" name="灯片编号占位符 5">
+            <a:extLst>
+              <a:ext uri="{FF2B5EF4-FFF2-40B4-BE49-F238E27FC236}">
+                <a16:creationId xmlns:a16="http://schemas.microsoft.com/office/drawing/2014/main" id="{F65085E7-6919-BAEF-1197-91290379580D}"/>
+              </a:ext>
+            </a:extLst>
+          </p:cNvPr>
+          <p:cNvSpPr>
+            <a:spLocks noGrp="1"/>
+          </p:cNvSpPr>
+          <p:nvPr>
+            <p:ph type="sldNum" sz="quarter" idx="16"/>
           </p:nvPr>
         </p:nvSpPr>
         <p:spPr/>
@@ -11424,6 +11714,11 @@
         </p:txBody>
       </p:sp>
     </p:spTree>
+    <p:extLst>
+      <p:ext uri="{BB962C8B-B14F-4D97-AF65-F5344CB8AC3E}">
+        <p14:creationId xmlns:p14="http://schemas.microsoft.com/office/powerpoint/2010/main" val="3754291302"/>
+      </p:ext>
+    </p:extLst>
   </p:cSld>
   <p:clrMapOvr>
     <a:masterClrMapping/>
@@ -11436,10 +11731,301 @@
   <p:cSld>
     <p:spTree>
       <p:nvGrpSpPr>
+        <p:cNvPr id="1" name=""/>
+        <p:cNvGrpSpPr/>
+        <p:nvPr/>
+      </p:nvGrpSpPr>
+      <p:grpSpPr>
+        <a:xfrm>
+          <a:off x="0" y="0"/>
+          <a:ext cx="0" cy="0"/>
+          <a:chOff x="0" y="0"/>
+          <a:chExt cx="0" cy="0"/>
+        </a:xfrm>
+      </p:grpSpPr>
+      <p:sp>
+        <p:nvSpPr>
+          <p:cNvPr id="5" name="标题 4"/>
+          <p:cNvSpPr>
+            <a:spLocks noGrp="1"/>
+          </p:cNvSpPr>
+          <p:nvPr>
+            <p:ph type="title"/>
+          </p:nvPr>
+        </p:nvSpPr>
+        <p:spPr/>
+        <p:txBody>
+          <a:bodyPr/>
+          <a:lstStyle/>
+          <a:p>
+            <a:r>
+              <a:rPr lang="en-US" altLang="zh-CN" dirty="0" err="1"/>
+              <a:t>Gliederung</a:t>
+            </a:r>
+            <a:endParaRPr lang="en-US" altLang="zh-CN" dirty="0"/>
+          </a:p>
+        </p:txBody>
+      </p:sp>
+      <p:sp>
+        <p:nvSpPr>
+          <p:cNvPr id="6" name="内容占位符 5"/>
+          <p:cNvSpPr>
+            <a:spLocks noGrp="1"/>
+          </p:cNvSpPr>
+          <p:nvPr>
+            <p:ph idx="1"/>
+          </p:nvPr>
+        </p:nvSpPr>
+        <p:spPr/>
+        <p:txBody>
+          <a:bodyPr/>
+          <a:lstStyle/>
+          <a:p>
+            <a:r>
+              <a:rPr lang="en-US" altLang="zh-CN" sz="4800" b="1" spc="50" dirty="0">
+                <a:ln w="0"/>
+                <a:solidFill>
+                  <a:srgbClr val="90BBE7"/>
+                </a:solidFill>
+                <a:effectLst>
+                  <a:innerShdw blurRad="63500" dist="50800" dir="13500000">
+                    <a:srgbClr val="000000">
+                      <a:alpha val="50000"/>
+                    </a:srgbClr>
+                  </a:innerShdw>
+                </a:effectLst>
+              </a:rPr>
+              <a:t>Motivation</a:t>
+            </a:r>
+          </a:p>
+          <a:p>
+            <a:r>
+              <a:rPr lang="en-US" altLang="zh-CN" sz="4800" b="1" spc="50" dirty="0" err="1">
+                <a:ln w="0"/>
+                <a:solidFill>
+                  <a:srgbClr val="90BBE7"/>
+                </a:solidFill>
+                <a:effectLst>
+                  <a:innerShdw blurRad="63500" dist="50800" dir="13500000">
+                    <a:srgbClr val="000000">
+                      <a:alpha val="50000"/>
+                    </a:srgbClr>
+                  </a:innerShdw>
+                </a:effectLst>
+              </a:rPr>
+              <a:t>Zeitplan</a:t>
+            </a:r>
+            <a:endParaRPr lang="en-US" altLang="zh-CN" sz="4800" b="1" spc="50" dirty="0">
+              <a:ln w="0"/>
+              <a:solidFill>
+                <a:srgbClr val="90BBE7"/>
+              </a:solidFill>
+              <a:effectLst>
+                <a:innerShdw blurRad="63500" dist="50800" dir="13500000">
+                  <a:srgbClr val="000000">
+                    <a:alpha val="50000"/>
+                  </a:srgbClr>
+                </a:innerShdw>
+              </a:effectLst>
+            </a:endParaRPr>
+          </a:p>
+          <a:p>
+            <a:r>
+              <a:rPr lang="en-US" altLang="zh-CN" sz="4800" b="1" spc="50" dirty="0">
+                <a:ln w="0"/>
+                <a:solidFill>
+                  <a:srgbClr val="90BBE7"/>
+                </a:solidFill>
+                <a:effectLst>
+                  <a:innerShdw blurRad="63500" dist="50800" dir="13500000">
+                    <a:srgbClr val="000000">
+                      <a:alpha val="50000"/>
+                    </a:srgbClr>
+                  </a:innerShdw>
+                </a:effectLst>
+              </a:rPr>
+              <a:t>Methode</a:t>
+            </a:r>
+          </a:p>
+          <a:p>
+            <a:r>
+              <a:rPr lang="en-US" altLang="zh-CN" sz="4800" b="1" spc="50" dirty="0" err="1">
+                <a:ln w="0"/>
+                <a:solidFill>
+                  <a:srgbClr val="275AAD"/>
+                </a:solidFill>
+                <a:effectLst>
+                  <a:innerShdw blurRad="63500" dist="50800" dir="13500000">
+                    <a:srgbClr val="000000">
+                      <a:alpha val="50000"/>
+                    </a:srgbClr>
+                  </a:innerShdw>
+                </a:effectLst>
+              </a:rPr>
+              <a:t>Aktuelle</a:t>
+            </a:r>
+            <a:r>
+              <a:rPr lang="en-US" altLang="zh-CN" sz="4800" b="1" spc="50" dirty="0">
+                <a:ln w="0"/>
+                <a:solidFill>
+                  <a:srgbClr val="275AAD"/>
+                </a:solidFill>
+                <a:effectLst>
+                  <a:innerShdw blurRad="63500" dist="50800" dir="13500000">
+                    <a:srgbClr val="000000">
+                      <a:alpha val="50000"/>
+                    </a:srgbClr>
+                  </a:innerShdw>
+                </a:effectLst>
+              </a:rPr>
+              <a:t> Arbeit</a:t>
+            </a:r>
+          </a:p>
+          <a:p>
+            <a:r>
+              <a:rPr lang="en-US" altLang="zh-CN" sz="4800" b="1" spc="50" dirty="0" err="1">
+                <a:ln w="0"/>
+                <a:solidFill>
+                  <a:srgbClr val="90BBE7"/>
+                </a:solidFill>
+                <a:effectLst>
+                  <a:innerShdw blurRad="63500" dist="50800" dir="13500000">
+                    <a:srgbClr val="000000">
+                      <a:alpha val="50000"/>
+                    </a:srgbClr>
+                  </a:innerShdw>
+                </a:effectLst>
+              </a:rPr>
+              <a:t>Weitere</a:t>
+            </a:r>
+            <a:r>
+              <a:rPr lang="en-US" altLang="zh-CN" sz="4800" b="1" spc="50" dirty="0">
+                <a:ln w="0"/>
+                <a:solidFill>
+                  <a:srgbClr val="90BBE7"/>
+                </a:solidFill>
+                <a:effectLst>
+                  <a:innerShdw blurRad="63500" dist="50800" dir="13500000">
+                    <a:srgbClr val="000000">
+                      <a:alpha val="50000"/>
+                    </a:srgbClr>
+                  </a:innerShdw>
+                </a:effectLst>
+              </a:rPr>
+              <a:t> Arbeit</a:t>
+            </a:r>
+          </a:p>
+        </p:txBody>
+      </p:sp>
+      <p:sp>
+        <p:nvSpPr>
+          <p:cNvPr id="2" name="日期占位符 1"/>
+          <p:cNvSpPr>
+            <a:spLocks noGrp="1"/>
+          </p:cNvSpPr>
+          <p:nvPr>
+            <p:ph type="dt" sz="half" idx="10"/>
+          </p:nvPr>
+        </p:nvSpPr>
+        <p:spPr/>
+        <p:txBody>
+          <a:bodyPr/>
+          <a:lstStyle/>
+          <a:p>
+            <a:fld id="{D35072EC-9367-4D7B-8652-6A082F0A7E89}" type="datetime5">
+              <a:rPr lang="zh-CN" altLang="en-US" smtClean="0"/>
+              <a:t>2026/6/26</a:t>
+            </a:fld>
+            <a:endParaRPr lang="de-DE" dirty="0"/>
+          </a:p>
+        </p:txBody>
+      </p:sp>
+      <p:sp>
+        <p:nvSpPr>
+          <p:cNvPr id="3" name="页脚占位符 2"/>
+          <p:cNvSpPr>
+            <a:spLocks noGrp="1"/>
+          </p:cNvSpPr>
+          <p:nvPr>
+            <p:ph type="ftr" sz="quarter" idx="11"/>
+          </p:nvPr>
+        </p:nvSpPr>
+        <p:spPr/>
+        <p:txBody>
+          <a:bodyPr/>
+          <a:lstStyle/>
+          <a:p>
+            <a:r>
+              <a:rPr lang="en-US"/>
+              <a:t>Liang Huang</a:t>
+            </a:r>
+            <a:endParaRPr lang="en-US" dirty="0"/>
+          </a:p>
+        </p:txBody>
+      </p:sp>
+      <p:sp>
+        <p:nvSpPr>
+          <p:cNvPr id="4" name="灯片编号占位符 3"/>
+          <p:cNvSpPr>
+            <a:spLocks noGrp="1"/>
+          </p:cNvSpPr>
+          <p:nvPr>
+            <p:ph type="sldNum" sz="quarter" idx="12"/>
+          </p:nvPr>
+        </p:nvSpPr>
+        <p:spPr/>
+        <p:txBody>
+          <a:bodyPr/>
+          <a:lstStyle/>
+          <a:p>
+            <a:fld id="{4D01E63C-D794-4429-8564-635E6253AC5C}" type="slidenum">
+              <a:rPr lang="en-US" smtClean="0"/>
+              <a:t>11</a:t>
+            </a:fld>
+            <a:endParaRPr lang="en-US" dirty="0"/>
+          </a:p>
+        </p:txBody>
+      </p:sp>
+      <p:sp>
+        <p:nvSpPr>
+          <p:cNvPr id="8" name="文本框 7"/>
+          <p:cNvSpPr txBox="1"/>
+          <p:nvPr/>
+        </p:nvSpPr>
+        <p:spPr>
+          <a:xfrm>
+            <a:off x="3555047" y="2859088"/>
+            <a:ext cx="5080000" cy="635000"/>
+          </a:xfrm>
+          <a:prstGeom prst="rect">
+            <a:avLst/>
+          </a:prstGeom>
+        </p:spPr>
+        <p:txBody>
+          <a:bodyPr/>
+          <a:lstStyle/>
+          <a:p>
+            <a:endParaRPr sz="1600"/>
+          </a:p>
+        </p:txBody>
+      </p:sp>
+    </p:spTree>
+  </p:cSld>
+  <p:clrMapOvr>
+    <a:masterClrMapping/>
+  </p:clrMapOvr>
+</p:sld>
+</file>
+
+<file path=ppt/slides/slide12.xml><?xml version="1.0" encoding="utf-8"?>
+<p:sld xmlns:a="http://schemas.openxmlformats.org/drawingml/2006/main" xmlns:r="http://schemas.openxmlformats.org/officeDocument/2006/relationships" xmlns:p="http://schemas.openxmlformats.org/presentationml/2006/main">
+  <p:cSld>
+    <p:spTree>
+      <p:nvGrpSpPr>
         <p:cNvPr id="1" name="">
           <a:extLst>
             <a:ext uri="{FF2B5EF4-FFF2-40B4-BE49-F238E27FC236}">
-              <a16:creationId xmlns:a16="http://schemas.microsoft.com/office/drawing/2014/main" id="{89F50CC6-1D9D-0433-30D3-318F925A38BD}"/>
+              <a16:creationId xmlns:a16="http://schemas.microsoft.com/office/drawing/2014/main" id="{DAAE45A0-C9B3-CF51-E01E-489C4B892B97}"/>
             </a:ext>
           </a:extLst>
         </p:cNvPr>
@@ -11459,7 +12045,7 @@
           <p:cNvPr id="5" name="标题 4">
             <a:extLst>
               <a:ext uri="{FF2B5EF4-FFF2-40B4-BE49-F238E27FC236}">
-                <a16:creationId xmlns:a16="http://schemas.microsoft.com/office/drawing/2014/main" id="{E88FEB5C-AE35-3DD1-2CBD-E25154421E50}"/>
+                <a16:creationId xmlns:a16="http://schemas.microsoft.com/office/drawing/2014/main" id="{DECD8C2E-D88F-4121-F8D2-3E8060D07E21}"/>
               </a:ext>
             </a:extLst>
           </p:cNvPr>
@@ -11476,22 +12062,999 @@
           <a:lstStyle/>
           <a:p>
             <a:r>
-              <a:rPr lang="en-US" altLang="zh-CN" dirty="0" err="1"/>
-              <a:t>Gliederung</a:t>
-            </a:r>
-            <a:endParaRPr lang="en-US" altLang="zh-CN" dirty="0"/>
-          </a:p>
-        </p:txBody>
-      </p:sp>
-      <p:sp>
-        <p:nvSpPr>
-          <p:cNvPr id="6" name="内容占位符 5">
+              <a:rPr lang="en-US" altLang="zh-CN" dirty="0"/>
+              <a:t>2RC Modell</a:t>
+            </a:r>
+            <a:endParaRPr lang="en-US" altLang="zh-CN" baseline="30000" dirty="0"/>
+          </a:p>
+        </p:txBody>
+      </p:sp>
+      <mc:AlternateContent xmlns:mc="http://schemas.openxmlformats.org/markup-compatibility/2006">
+        <mc:Choice xmlns:a14="http://schemas.microsoft.com/office/drawing/2010/main" Requires="a14">
+          <p:sp>
+            <p:nvSpPr>
+              <p:cNvPr id="6" name="内容占位符 5">
+                <a:extLst>
+                  <a:ext uri="{FF2B5EF4-FFF2-40B4-BE49-F238E27FC236}">
+                    <a16:creationId xmlns:a16="http://schemas.microsoft.com/office/drawing/2014/main" id="{73721A9C-FB4A-FCF3-A74D-25DAB4BC1A20}"/>
+                  </a:ext>
+                </a:extLst>
+              </p:cNvPr>
+              <p:cNvSpPr>
+                <a:spLocks noGrp="1"/>
+              </p:cNvSpPr>
+              <p:nvPr>
+                <p:ph idx="1"/>
+              </p:nvPr>
+            </p:nvSpPr>
+            <p:spPr/>
+            <p:txBody>
+              <a:bodyPr/>
+              <a:lstStyle/>
+              <a:p>
+                <a:pPr marL="0" indent="0">
+                  <a:buNone/>
+                </a:pPr>
+                <a:endParaRPr lang="en-US" altLang="zh-CN" dirty="0"/>
+              </a:p>
+              <a:p>
+                <a:r>
+                  <a:rPr lang="en-US" altLang="zh-CN" dirty="0"/>
+                  <a:t>Wenn I=</a:t>
+                </a:r>
+                <a:r>
+                  <a:rPr lang="en-US" altLang="zh-CN" i="1" dirty="0" err="1"/>
+                  <a:t>i</a:t>
+                </a:r>
+                <a:r>
+                  <a:rPr lang="en-US" altLang="zh-CN" i="1" dirty="0"/>
+                  <a:t>(0)</a:t>
+                </a:r>
+              </a:p>
+              <a:p>
+                <a:endParaRPr lang="en-US" altLang="zh-CN" i="1" dirty="0"/>
+              </a:p>
+              <a:p>
+                <a:endParaRPr lang="en-US" altLang="zh-CN" i="1" dirty="0"/>
+              </a:p>
+              <a:p>
+                <a:r>
+                  <a:rPr lang="zh-CN" altLang="zh-CN" dirty="0"/>
+                  <a:t>I und </a:t>
+                </a:r>
+                <a14:m>
+                  <m:oMath xmlns:m="http://schemas.openxmlformats.org/officeDocument/2006/math">
+                    <m:r>
+                      <a:rPr lang="zh-CN" altLang="en-US" i="1">
+                        <a:latin typeface="Cambria Math" panose="02040503050406030204" charset="0"/>
+                      </a:rPr>
+                      <m:t>𝑉</m:t>
+                    </m:r>
+                  </m:oMath>
+                </a14:m>
+                <a:r>
+                  <a:rPr lang="zh-CN" altLang="zh-CN" dirty="0"/>
+                  <a:t>entsprechen den Werten des vorherigen Zeitschritts.</a:t>
+                </a:r>
+                <a:endParaRPr lang="zh-CN" altLang="en-US" dirty="0"/>
+              </a:p>
+            </p:txBody>
+          </p:sp>
+        </mc:Choice>
+        <mc:Fallback>
+          <p:sp>
+            <p:nvSpPr>
+              <p:cNvPr id="6" name="内容占位符 5">
+                <a:extLst>
+                  <a:ext uri="{FF2B5EF4-FFF2-40B4-BE49-F238E27FC236}">
+                    <a16:creationId xmlns:a16="http://schemas.microsoft.com/office/drawing/2014/main" id="{73721A9C-FB4A-FCF3-A74D-25DAB4BC1A20}"/>
+                  </a:ext>
+                </a:extLst>
+              </p:cNvPr>
+              <p:cNvSpPr>
+                <a:spLocks noGrp="1" noRot="1" noChangeAspect="1" noMove="1" noResize="1" noEditPoints="1" noAdjustHandles="1" noChangeArrowheads="1" noChangeShapeType="1" noTextEdit="1"/>
+              </p:cNvSpPr>
+              <p:nvPr>
+                <p:ph idx="1"/>
+              </p:nvPr>
+            </p:nvSpPr>
+            <p:spPr>
+              <a:blipFill>
+                <a:blip r:embed="rId2"/>
+                <a:stretch>
+                  <a:fillRect l="-1281"/>
+                </a:stretch>
+              </a:blipFill>
+            </p:spPr>
+            <p:txBody>
+              <a:bodyPr/>
+              <a:lstStyle/>
+              <a:p>
+                <a:r>
+                  <a:rPr lang="zh-CN" altLang="en-US">
+                    <a:noFill/>
+                  </a:rPr>
+                  <a:t> </a:t>
+                </a:r>
+              </a:p>
+            </p:txBody>
+          </p:sp>
+        </mc:Fallback>
+      </mc:AlternateContent>
+      <p:sp>
+        <p:nvSpPr>
+          <p:cNvPr id="2" name="日期占位符 1">
             <a:extLst>
               <a:ext uri="{FF2B5EF4-FFF2-40B4-BE49-F238E27FC236}">
-                <a16:creationId xmlns:a16="http://schemas.microsoft.com/office/drawing/2014/main" id="{9C17ED45-956E-A878-4A89-A022624655C6}"/>
+                <a16:creationId xmlns:a16="http://schemas.microsoft.com/office/drawing/2014/main" id="{9E9F7E24-36B0-F3AD-9BC9-E8C691101AF6}"/>
               </a:ext>
             </a:extLst>
           </p:cNvPr>
+          <p:cNvSpPr>
+            <a:spLocks noGrp="1"/>
+          </p:cNvSpPr>
+          <p:nvPr>
+            <p:ph type="dt" sz="half" idx="10"/>
+          </p:nvPr>
+        </p:nvSpPr>
+        <p:spPr/>
+        <p:txBody>
+          <a:bodyPr/>
+          <a:lstStyle/>
+          <a:p>
+            <a:fld id="{D35072EC-9367-4D7B-8652-6A082F0A7E89}" type="datetime5">
+              <a:rPr lang="zh-CN" altLang="en-US" smtClean="0"/>
+              <a:t>2026/6/26</a:t>
+            </a:fld>
+            <a:endParaRPr lang="de-DE" dirty="0"/>
+          </a:p>
+        </p:txBody>
+      </p:sp>
+      <p:sp>
+        <p:nvSpPr>
+          <p:cNvPr id="3" name="页脚占位符 2">
+            <a:extLst>
+              <a:ext uri="{FF2B5EF4-FFF2-40B4-BE49-F238E27FC236}">
+                <a16:creationId xmlns:a16="http://schemas.microsoft.com/office/drawing/2014/main" id="{E898C072-E44C-B1D4-C27A-E98E0E909C26}"/>
+              </a:ext>
+            </a:extLst>
+          </p:cNvPr>
+          <p:cNvSpPr>
+            <a:spLocks noGrp="1"/>
+          </p:cNvSpPr>
+          <p:nvPr>
+            <p:ph type="ftr" sz="quarter" idx="11"/>
+          </p:nvPr>
+        </p:nvSpPr>
+        <p:spPr/>
+        <p:txBody>
+          <a:bodyPr/>
+          <a:lstStyle/>
+          <a:p>
+            <a:r>
+              <a:rPr lang="en-US"/>
+              <a:t>Liang Huang</a:t>
+            </a:r>
+            <a:endParaRPr lang="en-US" dirty="0"/>
+          </a:p>
+        </p:txBody>
+      </p:sp>
+      <p:sp>
+        <p:nvSpPr>
+          <p:cNvPr id="4" name="灯片编号占位符 3">
+            <a:extLst>
+              <a:ext uri="{FF2B5EF4-FFF2-40B4-BE49-F238E27FC236}">
+                <a16:creationId xmlns:a16="http://schemas.microsoft.com/office/drawing/2014/main" id="{B638FE50-D529-F487-7835-DC1E461AC9A6}"/>
+              </a:ext>
+            </a:extLst>
+          </p:cNvPr>
+          <p:cNvSpPr>
+            <a:spLocks noGrp="1"/>
+          </p:cNvSpPr>
+          <p:nvPr>
+            <p:ph type="sldNum" sz="quarter" idx="12"/>
+          </p:nvPr>
+        </p:nvSpPr>
+        <p:spPr/>
+        <p:txBody>
+          <a:bodyPr/>
+          <a:lstStyle/>
+          <a:p>
+            <a:fld id="{4D01E63C-D794-4429-8564-635E6253AC5C}" type="slidenum">
+              <a:rPr lang="en-US" smtClean="0"/>
+              <a:t>12</a:t>
+            </a:fld>
+            <a:endParaRPr lang="en-US" dirty="0"/>
+          </a:p>
+        </p:txBody>
+      </p:sp>
+      <p:pic>
+        <p:nvPicPr>
+          <p:cNvPr id="7" name="图片 6">
+            <a:extLst>
+              <a:ext uri="{FF2B5EF4-FFF2-40B4-BE49-F238E27FC236}">
+                <a16:creationId xmlns:a16="http://schemas.microsoft.com/office/drawing/2014/main" id="{0B1E82FA-26B2-091C-1ED6-0540C3C2EE82}"/>
+              </a:ext>
+            </a:extLst>
+          </p:cNvPr>
+          <p:cNvPicPr>
+            <a:picLocks noChangeAspect="1"/>
+          </p:cNvPicPr>
+          <p:nvPr/>
+        </p:nvPicPr>
+        <p:blipFill>
+          <a:blip r:embed="rId3"/>
+          <a:stretch>
+            <a:fillRect/>
+          </a:stretch>
+        </p:blipFill>
+        <p:spPr>
+          <a:xfrm>
+            <a:off x="8659567" y="974725"/>
+            <a:ext cx="2831126" cy="2316480"/>
+          </a:xfrm>
+          <a:prstGeom prst="rect">
+            <a:avLst/>
+          </a:prstGeom>
+        </p:spPr>
+      </p:pic>
+      <p:graphicFrame>
+        <p:nvGraphicFramePr>
+          <p:cNvPr id="13" name="对象 12">
+            <a:extLst>
+              <a:ext uri="{FF2B5EF4-FFF2-40B4-BE49-F238E27FC236}">
+                <a16:creationId xmlns:a16="http://schemas.microsoft.com/office/drawing/2014/main" id="{C9627AFA-2830-67BC-BF28-DAD701CC8742}"/>
+              </a:ext>
+            </a:extLst>
+          </p:cNvPr>
+          <p:cNvGraphicFramePr>
+            <a:graphicFrameLocks noChangeAspect="1"/>
+          </p:cNvGraphicFramePr>
+          <p:nvPr>
+            <p:extLst>
+              <p:ext uri="{D42A27DB-BD31-4B8C-83A1-F6EECF244321}">
+                <p14:modId xmlns:p14="http://schemas.microsoft.com/office/powerpoint/2010/main" val="1789556258"/>
+              </p:ext>
+            </p:extLst>
+          </p:nvPr>
+        </p:nvGraphicFramePr>
+        <p:xfrm>
+          <a:off x="383858" y="1856840"/>
+          <a:ext cx="4273534" cy="769767"/>
+        </p:xfrm>
+        <a:graphic>
+          <a:graphicData uri="http://schemas.openxmlformats.org/presentationml/2006/ole">
+            <mc:AlternateContent xmlns:mc="http://schemas.openxmlformats.org/markup-compatibility/2006">
+              <mc:Choice xmlns:v="urn:schemas-microsoft-com:vml" Requires="v">
+                <p:oleObj name="Equation" r:id="rId4" imgW="49072800" imgH="8839200" progId="Equation.DSMT4">
+                  <p:embed/>
+                </p:oleObj>
+              </mc:Choice>
+              <mc:Fallback>
+                <p:oleObj name="Equation" r:id="rId4" imgW="49072800" imgH="8839200" progId="Equation.DSMT4">
+                  <p:embed/>
+                  <p:pic>
+                    <p:nvPicPr>
+                      <p:cNvPr id="13" name="对象 12"/>
+                      <p:cNvPicPr/>
+                      <p:nvPr/>
+                    </p:nvPicPr>
+                    <p:blipFill>
+                      <a:blip r:embed="rId5"/>
+                      <a:stretch>
+                        <a:fillRect/>
+                      </a:stretch>
+                    </p:blipFill>
+                    <p:spPr>
+                      <a:xfrm>
+                        <a:off x="383858" y="1856840"/>
+                        <a:ext cx="4273534" cy="769767"/>
+                      </a:xfrm>
+                      <a:prstGeom prst="rect">
+                        <a:avLst/>
+                      </a:prstGeom>
+                    </p:spPr>
+                  </p:pic>
+                </p:oleObj>
+              </mc:Fallback>
+            </mc:AlternateContent>
+          </a:graphicData>
+        </a:graphic>
+      </p:graphicFrame>
+      <p:graphicFrame>
+        <p:nvGraphicFramePr>
+          <p:cNvPr id="15" name="对象 14">
+            <a:extLst>
+              <a:ext uri="{FF2B5EF4-FFF2-40B4-BE49-F238E27FC236}">
+                <a16:creationId xmlns:a16="http://schemas.microsoft.com/office/drawing/2014/main" id="{1E0CBAB4-BFC2-3E98-C9B9-5598D10C8CDA}"/>
+              </a:ext>
+            </a:extLst>
+          </p:cNvPr>
+          <p:cNvGraphicFramePr>
+            <a:graphicFrameLocks noChangeAspect="1"/>
+          </p:cNvGraphicFramePr>
+          <p:nvPr>
+            <p:extLst>
+              <p:ext uri="{D42A27DB-BD31-4B8C-83A1-F6EECF244321}">
+                <p14:modId xmlns:p14="http://schemas.microsoft.com/office/powerpoint/2010/main" val="2157108592"/>
+              </p:ext>
+            </p:extLst>
+          </p:nvPr>
+        </p:nvGraphicFramePr>
+        <p:xfrm>
+          <a:off x="383858" y="3100290"/>
+          <a:ext cx="3146989" cy="769767"/>
+        </p:xfrm>
+        <a:graphic>
+          <a:graphicData uri="http://schemas.openxmlformats.org/presentationml/2006/ole">
+            <mc:AlternateContent xmlns:mc="http://schemas.openxmlformats.org/markup-compatibility/2006">
+              <mc:Choice xmlns:v="urn:schemas-microsoft-com:vml" Requires="v">
+                <p:oleObj name="Equation" r:id="rId6" imgW="42367200" imgH="10363200" progId="Equation.DSMT4">
+                  <p:embed/>
+                </p:oleObj>
+              </mc:Choice>
+              <mc:Fallback>
+                <p:oleObj name="Equation" r:id="rId6" imgW="42367200" imgH="10363200" progId="Equation.DSMT4">
+                  <p:embed/>
+                  <p:pic>
+                    <p:nvPicPr>
+                      <p:cNvPr id="15" name="对象 14"/>
+                      <p:cNvPicPr/>
+                      <p:nvPr/>
+                    </p:nvPicPr>
+                    <p:blipFill>
+                      <a:blip r:embed="rId7"/>
+                      <a:stretch>
+                        <a:fillRect/>
+                      </a:stretch>
+                    </p:blipFill>
+                    <p:spPr>
+                      <a:xfrm>
+                        <a:off x="383858" y="3100290"/>
+                        <a:ext cx="3146989" cy="769767"/>
+                      </a:xfrm>
+                      <a:prstGeom prst="rect">
+                        <a:avLst/>
+                      </a:prstGeom>
+                    </p:spPr>
+                  </p:pic>
+                </p:oleObj>
+              </mc:Fallback>
+            </mc:AlternateContent>
+          </a:graphicData>
+        </a:graphic>
+      </p:graphicFrame>
+    </p:spTree>
+    <p:extLst>
+      <p:ext uri="{BB962C8B-B14F-4D97-AF65-F5344CB8AC3E}">
+        <p14:creationId xmlns:p14="http://schemas.microsoft.com/office/powerpoint/2010/main" val="2708325900"/>
+      </p:ext>
+    </p:extLst>
+  </p:cSld>
+  <p:clrMapOvr>
+    <a:masterClrMapping/>
+  </p:clrMapOvr>
+</p:sld>
+</file>
+
+<file path=ppt/slides/slide13.xml><?xml version="1.0" encoding="utf-8"?>
+<p:sld xmlns:a="http://schemas.openxmlformats.org/drawingml/2006/main" xmlns:r="http://schemas.openxmlformats.org/officeDocument/2006/relationships" xmlns:p="http://schemas.openxmlformats.org/presentationml/2006/main">
+  <p:cSld>
+    <p:spTree>
+      <p:nvGrpSpPr>
+        <p:cNvPr id="1" name=""/>
+        <p:cNvGrpSpPr/>
+        <p:nvPr/>
+      </p:nvGrpSpPr>
+      <p:grpSpPr>
+        <a:xfrm>
+          <a:off x="0" y="0"/>
+          <a:ext cx="0" cy="0"/>
+          <a:chOff x="0" y="0"/>
+          <a:chExt cx="0" cy="0"/>
+        </a:xfrm>
+      </p:grpSpPr>
+      <p:sp>
+        <p:nvSpPr>
+          <p:cNvPr id="5" name="标题 4"/>
+          <p:cNvSpPr>
+            <a:spLocks noGrp="1"/>
+          </p:cNvSpPr>
+          <p:nvPr>
+            <p:ph type="title"/>
+          </p:nvPr>
+        </p:nvSpPr>
+        <p:spPr/>
+        <p:txBody>
+          <a:bodyPr/>
+          <a:lstStyle/>
+          <a:p>
+            <a:r>
+              <a:rPr lang="en-US" altLang="zh-CN" dirty="0" err="1">
+                <a:latin typeface="+mj-lt"/>
+              </a:rPr>
+              <a:t>Aktuelle</a:t>
+            </a:r>
+            <a:r>
+              <a:rPr lang="en-US" altLang="zh-CN" dirty="0">
+                <a:latin typeface="+mj-lt"/>
+              </a:rPr>
+              <a:t> </a:t>
+            </a:r>
+            <a:r>
+              <a:rPr lang="en-US" altLang="zh-CN" dirty="0" err="1">
+                <a:latin typeface="+mj-lt"/>
+              </a:rPr>
+              <a:t>Kapazi</a:t>
+            </a:r>
+            <a:r>
+              <a:rPr lang="de-DE" altLang="en-US" dirty="0">
+                <a:latin typeface="+mj-lt"/>
+              </a:rPr>
+              <a:t>tät </a:t>
+            </a:r>
+            <a:r>
+              <a:rPr lang="de-DE" altLang="en-US" dirty="0">
+                <a:latin typeface="+mj-lt"/>
+                <a:ea typeface="黑体" panose="02010609060101010101" charset="-122"/>
+              </a:rPr>
+              <a:t>rechnen</a:t>
+            </a:r>
+          </a:p>
+        </p:txBody>
+      </p:sp>
+      <p:sp>
+        <p:nvSpPr>
+          <p:cNvPr id="12" name="内容占位符 11">
+            <a:extLst>
+              <a:ext uri="{FF2B5EF4-FFF2-40B4-BE49-F238E27FC236}">
+                <a16:creationId xmlns:a16="http://schemas.microsoft.com/office/drawing/2014/main" id="{677E5A6A-0543-EA1C-179A-D9222D4957D9}"/>
+              </a:ext>
+            </a:extLst>
+          </p:cNvPr>
+          <p:cNvSpPr>
+            <a:spLocks noGrp="1"/>
+          </p:cNvSpPr>
+          <p:nvPr>
+            <p:ph idx="1"/>
+          </p:nvPr>
+        </p:nvSpPr>
+        <p:spPr/>
+        <p:txBody>
+          <a:bodyPr/>
+          <a:lstStyle/>
+          <a:p>
+            <a:endParaRPr lang="en-US" altLang="zh-CN" dirty="0"/>
+          </a:p>
+          <a:p>
+            <a:endParaRPr lang="en-US" altLang="zh-CN" dirty="0"/>
+          </a:p>
+          <a:p>
+            <a:endParaRPr lang="zh-CN" altLang="en-US" dirty="0"/>
+          </a:p>
+        </p:txBody>
+      </p:sp>
+      <p:sp>
+        <p:nvSpPr>
+          <p:cNvPr id="2" name="日期占位符 1"/>
+          <p:cNvSpPr>
+            <a:spLocks noGrp="1"/>
+          </p:cNvSpPr>
+          <p:nvPr>
+            <p:ph type="dt" sz="half" idx="14"/>
+          </p:nvPr>
+        </p:nvSpPr>
+        <p:spPr/>
+        <p:txBody>
+          <a:bodyPr/>
+          <a:lstStyle/>
+          <a:p>
+            <a:fld id="{D35072EC-9367-4D7B-8652-6A082F0A7E89}" type="datetime5">
+              <a:rPr lang="zh-CN" altLang="en-US" smtClean="0"/>
+              <a:t>2026/6/26</a:t>
+            </a:fld>
+            <a:endParaRPr lang="de-DE" dirty="0"/>
+          </a:p>
+        </p:txBody>
+      </p:sp>
+      <p:sp>
+        <p:nvSpPr>
+          <p:cNvPr id="3" name="页脚占位符 2"/>
+          <p:cNvSpPr>
+            <a:spLocks noGrp="1"/>
+          </p:cNvSpPr>
+          <p:nvPr>
+            <p:ph type="ftr" sz="quarter" idx="15"/>
+          </p:nvPr>
+        </p:nvSpPr>
+        <p:spPr/>
+        <p:txBody>
+          <a:bodyPr/>
+          <a:lstStyle/>
+          <a:p>
+            <a:r>
+              <a:rPr lang="en-US"/>
+              <a:t>Liang Huang</a:t>
+            </a:r>
+            <a:endParaRPr lang="en-US" dirty="0"/>
+          </a:p>
+        </p:txBody>
+      </p:sp>
+      <p:sp>
+        <p:nvSpPr>
+          <p:cNvPr id="4" name="灯片编号占位符 3"/>
+          <p:cNvSpPr>
+            <a:spLocks noGrp="1"/>
+          </p:cNvSpPr>
+          <p:nvPr>
+            <p:ph type="sldNum" sz="quarter" idx="16"/>
+          </p:nvPr>
+        </p:nvSpPr>
+        <p:spPr/>
+        <p:txBody>
+          <a:bodyPr/>
+          <a:lstStyle/>
+          <a:p>
+            <a:fld id="{4D01E63C-D794-4429-8564-635E6253AC5C}" type="slidenum">
+              <a:rPr lang="en-US" smtClean="0"/>
+              <a:t>13</a:t>
+            </a:fld>
+            <a:endParaRPr lang="en-US" dirty="0"/>
+          </a:p>
+        </p:txBody>
+      </p:sp>
+      <p:pic>
+        <p:nvPicPr>
+          <p:cNvPr id="13" name="内容占位符 9">
+            <a:extLst>
+              <a:ext uri="{FF2B5EF4-FFF2-40B4-BE49-F238E27FC236}">
+                <a16:creationId xmlns:a16="http://schemas.microsoft.com/office/drawing/2014/main" id="{8F3791A5-0A9C-2EB7-EC42-07A7308DAC57}"/>
+              </a:ext>
+              <a:ext uri="{C183D7F6-B498-43B3-948B-1728B52AA6E4}">
+                <adec:decorative xmlns:adec="http://schemas.microsoft.com/office/drawing/2017/decorative" val="1"/>
+              </a:ext>
+            </a:extLst>
+          </p:cNvPr>
+          <p:cNvPicPr>
+            <a:picLocks noChangeAspect="1"/>
+          </p:cNvPicPr>
+          <p:nvPr/>
+        </p:nvPicPr>
+        <p:blipFill>
+          <a:blip r:embed="rId2"/>
+          <a:stretch>
+            <a:fillRect/>
+          </a:stretch>
+        </p:blipFill>
+        <p:spPr>
+          <a:xfrm>
+            <a:off x="379151" y="1433963"/>
+            <a:ext cx="3939872" cy="3223532"/>
+          </a:xfrm>
+          <a:prstGeom prst="rect">
+            <a:avLst/>
+          </a:prstGeom>
+        </p:spPr>
+      </p:pic>
+      <p:graphicFrame>
+        <p:nvGraphicFramePr>
+          <p:cNvPr id="15" name="对象 14">
+            <a:extLst>
+              <a:ext uri="{FF2B5EF4-FFF2-40B4-BE49-F238E27FC236}">
+                <a16:creationId xmlns:a16="http://schemas.microsoft.com/office/drawing/2014/main" id="{1E017E61-91EB-86F2-A01E-3282C40C76F9}"/>
+              </a:ext>
+            </a:extLst>
+          </p:cNvPr>
+          <p:cNvGraphicFramePr>
+            <a:graphicFrameLocks noChangeAspect="1"/>
+          </p:cNvGraphicFramePr>
+          <p:nvPr/>
+        </p:nvGraphicFramePr>
+        <p:xfrm>
+          <a:off x="379151" y="745200"/>
+          <a:ext cx="5131479" cy="537016"/>
+        </p:xfrm>
+        <a:graphic>
+          <a:graphicData uri="http://schemas.openxmlformats.org/presentationml/2006/ole">
+            <mc:AlternateContent xmlns:mc="http://schemas.openxmlformats.org/markup-compatibility/2006">
+              <mc:Choice xmlns:v="urn:schemas-microsoft-com:vml" Requires="v">
+                <p:oleObj name="Equation" r:id="rId3" imgW="2184120" imgH="228600" progId="Equation.DSMT4">
+                  <p:embed/>
+                </p:oleObj>
+              </mc:Choice>
+              <mc:Fallback>
+                <p:oleObj name="Equation" r:id="rId3" imgW="2184120" imgH="228600" progId="Equation.DSMT4">
+                  <p:embed/>
+                  <p:pic>
+                    <p:nvPicPr>
+                      <p:cNvPr id="15" name="对象 14">
+                        <a:extLst>
+                          <a:ext uri="{FF2B5EF4-FFF2-40B4-BE49-F238E27FC236}">
+                            <a16:creationId xmlns:a16="http://schemas.microsoft.com/office/drawing/2014/main" id="{1E017E61-91EB-86F2-A01E-3282C40C76F9}"/>
+                          </a:ext>
+                        </a:extLst>
+                      </p:cNvPr>
+                      <p:cNvPicPr/>
+                      <p:nvPr/>
+                    </p:nvPicPr>
+                    <p:blipFill>
+                      <a:blip r:embed="rId4"/>
+                      <a:stretch>
+                        <a:fillRect/>
+                      </a:stretch>
+                    </p:blipFill>
+                    <p:spPr>
+                      <a:xfrm>
+                        <a:off x="379151" y="745200"/>
+                        <a:ext cx="5131479" cy="537016"/>
+                      </a:xfrm>
+                      <a:prstGeom prst="rect">
+                        <a:avLst/>
+                      </a:prstGeom>
+                    </p:spPr>
+                  </p:pic>
+                </p:oleObj>
+              </mc:Fallback>
+            </mc:AlternateContent>
+          </a:graphicData>
+        </a:graphic>
+      </p:graphicFrame>
+      <p:graphicFrame>
+        <p:nvGraphicFramePr>
+          <p:cNvPr id="19" name="对象 18">
+            <a:extLst>
+              <a:ext uri="{FF2B5EF4-FFF2-40B4-BE49-F238E27FC236}">
+                <a16:creationId xmlns:a16="http://schemas.microsoft.com/office/drawing/2014/main" id="{A9540169-DD02-4DA8-76CD-F9E6E16098AF}"/>
+              </a:ext>
+            </a:extLst>
+          </p:cNvPr>
+          <p:cNvGraphicFramePr>
+            <a:graphicFrameLocks noChangeAspect="1"/>
+          </p:cNvGraphicFramePr>
+          <p:nvPr/>
+        </p:nvGraphicFramePr>
+        <p:xfrm>
+          <a:off x="4319023" y="1760292"/>
+          <a:ext cx="7487440" cy="501369"/>
+        </p:xfrm>
+        <a:graphic>
+          <a:graphicData uri="http://schemas.openxmlformats.org/presentationml/2006/ole">
+            <mc:AlternateContent xmlns:mc="http://schemas.openxmlformats.org/markup-compatibility/2006">
+              <mc:Choice xmlns:v="urn:schemas-microsoft-com:vml" Requires="v">
+                <p:oleObj name="Equation" r:id="rId5" imgW="7182896" imgH="481697" progId="Equation.DSMT4">
+                  <p:embed/>
+                </p:oleObj>
+              </mc:Choice>
+              <mc:Fallback>
+                <p:oleObj name="Equation" r:id="rId5" imgW="7182896" imgH="481697" progId="Equation.DSMT4">
+                  <p:embed/>
+                  <p:pic>
+                    <p:nvPicPr>
+                      <p:cNvPr id="19" name="对象 18">
+                        <a:extLst>
+                          <a:ext uri="{FF2B5EF4-FFF2-40B4-BE49-F238E27FC236}">
+                            <a16:creationId xmlns:a16="http://schemas.microsoft.com/office/drawing/2014/main" id="{A9540169-DD02-4DA8-76CD-F9E6E16098AF}"/>
+                          </a:ext>
+                        </a:extLst>
+                      </p:cNvPr>
+                      <p:cNvPicPr/>
+                      <p:nvPr/>
+                    </p:nvPicPr>
+                    <p:blipFill>
+                      <a:blip r:embed="rId6"/>
+                      <a:stretch>
+                        <a:fillRect/>
+                      </a:stretch>
+                    </p:blipFill>
+                    <p:spPr>
+                      <a:xfrm>
+                        <a:off x="4319023" y="1760292"/>
+                        <a:ext cx="7487440" cy="501369"/>
+                      </a:xfrm>
+                      <a:prstGeom prst="rect">
+                        <a:avLst/>
+                      </a:prstGeom>
+                    </p:spPr>
+                  </p:pic>
+                </p:oleObj>
+              </mc:Fallback>
+            </mc:AlternateContent>
+          </a:graphicData>
+        </a:graphic>
+      </p:graphicFrame>
+      <p:pic>
+        <p:nvPicPr>
+          <p:cNvPr id="20" name="图片 19"/>
+          <p:cNvPicPr>
+            <a:picLocks noChangeAspect="1"/>
+          </p:cNvPicPr>
+          <p:nvPr/>
+        </p:nvPicPr>
+        <p:blipFill>
+          <a:blip r:embed="rId7"/>
+          <a:stretch>
+            <a:fillRect/>
+          </a:stretch>
+        </p:blipFill>
+        <p:spPr>
+          <a:xfrm>
+            <a:off x="4787922" y="2297645"/>
+            <a:ext cx="3083469" cy="1850081"/>
+          </a:xfrm>
+          <a:prstGeom prst="rect">
+            <a:avLst/>
+          </a:prstGeom>
+        </p:spPr>
+      </p:pic>
+      <p:pic>
+        <p:nvPicPr>
+          <p:cNvPr id="21" name="图片 20"/>
+          <p:cNvPicPr>
+            <a:picLocks noChangeAspect="1"/>
+          </p:cNvPicPr>
+          <p:nvPr/>
+        </p:nvPicPr>
+        <p:blipFill>
+          <a:blip r:embed="rId8"/>
+          <a:stretch>
+            <a:fillRect/>
+          </a:stretch>
+        </p:blipFill>
+        <p:spPr>
+          <a:xfrm>
+            <a:off x="8461525" y="2297983"/>
+            <a:ext cx="3082229" cy="1849406"/>
+          </a:xfrm>
+          <a:prstGeom prst="rect">
+            <a:avLst/>
+          </a:prstGeom>
+        </p:spPr>
+      </p:pic>
+      <p:graphicFrame>
+        <p:nvGraphicFramePr>
+          <p:cNvPr id="24" name="对象 23">
+            <a:extLst>
+              <a:ext uri="{FF2B5EF4-FFF2-40B4-BE49-F238E27FC236}">
+                <a16:creationId xmlns:a16="http://schemas.microsoft.com/office/drawing/2014/main" id="{199D8987-8FE4-93AB-E636-ACB01556074A}"/>
+              </a:ext>
+            </a:extLst>
+          </p:cNvPr>
+          <p:cNvGraphicFramePr>
+            <a:graphicFrameLocks noChangeAspect="1"/>
+          </p:cNvGraphicFramePr>
+          <p:nvPr/>
+        </p:nvGraphicFramePr>
+        <p:xfrm>
+          <a:off x="377930" y="5205461"/>
+          <a:ext cx="2685600" cy="399511"/>
+        </p:xfrm>
+        <a:graphic>
+          <a:graphicData uri="http://schemas.openxmlformats.org/presentationml/2006/ole">
+            <mc:AlternateContent xmlns:mc="http://schemas.openxmlformats.org/markup-compatibility/2006">
+              <mc:Choice xmlns:v="urn:schemas-microsoft-com:vml" Requires="v">
+                <p:oleObj name="Equation" r:id="rId9" imgW="1536480" imgH="228600" progId="Equation.DSMT4">
+                  <p:embed/>
+                </p:oleObj>
+              </mc:Choice>
+              <mc:Fallback>
+                <p:oleObj name="Equation" r:id="rId9" imgW="1536480" imgH="228600" progId="Equation.DSMT4">
+                  <p:embed/>
+                  <p:pic>
+                    <p:nvPicPr>
+                      <p:cNvPr id="24" name="对象 23">
+                        <a:extLst>
+                          <a:ext uri="{FF2B5EF4-FFF2-40B4-BE49-F238E27FC236}">
+                            <a16:creationId xmlns:a16="http://schemas.microsoft.com/office/drawing/2014/main" id="{199D8987-8FE4-93AB-E636-ACB01556074A}"/>
+                          </a:ext>
+                        </a:extLst>
+                      </p:cNvPr>
+                      <p:cNvPicPr/>
+                      <p:nvPr/>
+                    </p:nvPicPr>
+                    <p:blipFill>
+                      <a:blip r:embed="rId10"/>
+                      <a:stretch>
+                        <a:fillRect/>
+                      </a:stretch>
+                    </p:blipFill>
+                    <p:spPr>
+                      <a:xfrm>
+                        <a:off x="377930" y="5205461"/>
+                        <a:ext cx="2685600" cy="399511"/>
+                      </a:xfrm>
+                      <a:prstGeom prst="rect">
+                        <a:avLst/>
+                      </a:prstGeom>
+                    </p:spPr>
+                  </p:pic>
+                </p:oleObj>
+              </mc:Fallback>
+            </mc:AlternateContent>
+          </a:graphicData>
+        </a:graphic>
+      </p:graphicFrame>
+      <p:graphicFrame>
+        <p:nvGraphicFramePr>
+          <p:cNvPr id="25" name="对象 24">
+            <a:extLst>
+              <a:ext uri="{FF2B5EF4-FFF2-40B4-BE49-F238E27FC236}">
+                <a16:creationId xmlns:a16="http://schemas.microsoft.com/office/drawing/2014/main" id="{8F46324A-4FA4-22E1-37DF-8B5516844AEA}"/>
+              </a:ext>
+            </a:extLst>
+          </p:cNvPr>
+          <p:cNvGraphicFramePr>
+            <a:graphicFrameLocks noChangeAspect="1"/>
+          </p:cNvGraphicFramePr>
+          <p:nvPr/>
+        </p:nvGraphicFramePr>
+        <p:xfrm>
+          <a:off x="5937986" y="4999039"/>
+          <a:ext cx="1497011" cy="672570"/>
+        </p:xfrm>
+        <a:graphic>
+          <a:graphicData uri="http://schemas.openxmlformats.org/presentationml/2006/ole">
+            <mc:AlternateContent xmlns:mc="http://schemas.openxmlformats.org/markup-compatibility/2006">
+              <mc:Choice xmlns:v="urn:schemas-microsoft-com:vml" Requires="v">
+                <p:oleObj name="Equation" r:id="rId11" imgW="876240" imgH="393480" progId="Equation.DSMT4">
+                  <p:embed/>
+                </p:oleObj>
+              </mc:Choice>
+              <mc:Fallback>
+                <p:oleObj name="Equation" r:id="rId11" imgW="876240" imgH="393480" progId="Equation.DSMT4">
+                  <p:embed/>
+                  <p:pic>
+                    <p:nvPicPr>
+                      <p:cNvPr id="25" name="对象 24">
+                        <a:extLst>
+                          <a:ext uri="{FF2B5EF4-FFF2-40B4-BE49-F238E27FC236}">
+                            <a16:creationId xmlns:a16="http://schemas.microsoft.com/office/drawing/2014/main" id="{8F46324A-4FA4-22E1-37DF-8B5516844AEA}"/>
+                          </a:ext>
+                        </a:extLst>
+                      </p:cNvPr>
+                      <p:cNvPicPr/>
+                      <p:nvPr/>
+                    </p:nvPicPr>
+                    <p:blipFill>
+                      <a:blip r:embed="rId12"/>
+                      <a:stretch>
+                        <a:fillRect/>
+                      </a:stretch>
+                    </p:blipFill>
+                    <p:spPr>
+                      <a:xfrm>
+                        <a:off x="5937986" y="4999039"/>
+                        <a:ext cx="1497011" cy="672570"/>
+                      </a:xfrm>
+                      <a:prstGeom prst="rect">
+                        <a:avLst/>
+                      </a:prstGeom>
+                    </p:spPr>
+                  </p:pic>
+                </p:oleObj>
+              </mc:Fallback>
+            </mc:AlternateContent>
+          </a:graphicData>
+        </a:graphic>
+      </p:graphicFrame>
+      <p:graphicFrame>
+        <p:nvGraphicFramePr>
+          <p:cNvPr id="26" name="对象 25">
+            <a:extLst>
+              <a:ext uri="{FF2B5EF4-FFF2-40B4-BE49-F238E27FC236}">
+                <a16:creationId xmlns:a16="http://schemas.microsoft.com/office/drawing/2014/main" id="{BDAD4C6C-4628-2328-CDB2-583487A7A357}"/>
+              </a:ext>
+            </a:extLst>
+          </p:cNvPr>
+          <p:cNvGraphicFramePr>
+            <a:graphicFrameLocks noChangeAspect="1"/>
+          </p:cNvGraphicFramePr>
+          <p:nvPr/>
+        </p:nvGraphicFramePr>
+        <p:xfrm>
+          <a:off x="10309453" y="4999039"/>
+          <a:ext cx="1497010" cy="605933"/>
+        </p:xfrm>
+        <a:graphic>
+          <a:graphicData uri="http://schemas.openxmlformats.org/presentationml/2006/ole">
+            <mc:AlternateContent xmlns:mc="http://schemas.openxmlformats.org/markup-compatibility/2006">
+              <mc:Choice xmlns:v="urn:schemas-microsoft-com:vml" Requires="v">
+                <p:oleObj name="Equation" r:id="rId13" imgW="1066680" imgH="431640" progId="Equation.DSMT4">
+                  <p:embed/>
+                </p:oleObj>
+              </mc:Choice>
+              <mc:Fallback>
+                <p:oleObj name="Equation" r:id="rId13" imgW="1066680" imgH="431640" progId="Equation.DSMT4">
+                  <p:embed/>
+                  <p:pic>
+                    <p:nvPicPr>
+                      <p:cNvPr id="26" name="对象 25">
+                        <a:extLst>
+                          <a:ext uri="{FF2B5EF4-FFF2-40B4-BE49-F238E27FC236}">
+                            <a16:creationId xmlns:a16="http://schemas.microsoft.com/office/drawing/2014/main" id="{BDAD4C6C-4628-2328-CDB2-583487A7A357}"/>
+                          </a:ext>
+                        </a:extLst>
+                      </p:cNvPr>
+                      <p:cNvPicPr/>
+                      <p:nvPr/>
+                    </p:nvPicPr>
+                    <p:blipFill>
+                      <a:blip r:embed="rId14"/>
+                      <a:stretch>
+                        <a:fillRect/>
+                      </a:stretch>
+                    </p:blipFill>
+                    <p:spPr>
+                      <a:xfrm>
+                        <a:off x="10309453" y="4999039"/>
+                        <a:ext cx="1497010" cy="605933"/>
+                      </a:xfrm>
+                      <a:prstGeom prst="rect">
+                        <a:avLst/>
+                      </a:prstGeom>
+                    </p:spPr>
+                  </p:pic>
+                </p:oleObj>
+              </mc:Fallback>
+            </mc:AlternateContent>
+          </a:graphicData>
+        </a:graphic>
+      </p:graphicFrame>
+    </p:spTree>
+    <p:extLst>
+      <p:ext uri="{BB962C8B-B14F-4D97-AF65-F5344CB8AC3E}">
+        <p14:creationId xmlns:p14="http://schemas.microsoft.com/office/powerpoint/2010/main" val="707868096"/>
+      </p:ext>
+    </p:extLst>
+  </p:cSld>
+  <p:clrMapOvr>
+    <a:masterClrMapping/>
+  </p:clrMapOvr>
+</p:sld>
+</file>
+
+<file path=ppt/slides/slide14.xml><?xml version="1.0" encoding="utf-8"?>
+<p:sld xmlns:a="http://schemas.openxmlformats.org/drawingml/2006/main" xmlns:r="http://schemas.openxmlformats.org/officeDocument/2006/relationships" xmlns:p="http://schemas.openxmlformats.org/presentationml/2006/main">
+  <p:cSld>
+    <p:spTree>
+      <p:nvGrpSpPr>
+        <p:cNvPr id="1" name=""/>
+        <p:cNvGrpSpPr/>
+        <p:nvPr/>
+      </p:nvGrpSpPr>
+      <p:grpSpPr>
+        <a:xfrm>
+          <a:off x="0" y="0"/>
+          <a:ext cx="0" cy="0"/>
+          <a:chOff x="0" y="0"/>
+          <a:chExt cx="0" cy="0"/>
+        </a:xfrm>
+      </p:grpSpPr>
+      <p:sp>
+        <p:nvSpPr>
+          <p:cNvPr id="5" name="标题 4"/>
+          <p:cNvSpPr>
+            <a:spLocks noGrp="1"/>
+          </p:cNvSpPr>
+          <p:nvPr>
+            <p:ph type="title"/>
+          </p:nvPr>
+        </p:nvSpPr>
+        <p:spPr/>
+        <p:txBody>
+          <a:bodyPr/>
+          <a:lstStyle/>
+          <a:p>
+            <a:r>
+              <a:rPr lang="en-US" altLang="zh-CN" dirty="0" err="1"/>
+              <a:t>Gliederung</a:t>
+            </a:r>
+            <a:endParaRPr lang="en-US" altLang="zh-CN" dirty="0"/>
+          </a:p>
+        </p:txBody>
+      </p:sp>
+      <p:sp>
+        <p:nvSpPr>
+          <p:cNvPr id="6" name="内容占位符 5"/>
           <p:cNvSpPr>
             <a:spLocks noGrp="1"/>
           </p:cNvSpPr>
@@ -11642,10 +13205,277 @@
       </p:sp>
       <p:sp>
         <p:nvSpPr>
-          <p:cNvPr id="2" name="日期占位符 1">
+          <p:cNvPr id="2" name="日期占位符 1"/>
+          <p:cNvSpPr>
+            <a:spLocks noGrp="1"/>
+          </p:cNvSpPr>
+          <p:nvPr>
+            <p:ph type="dt" sz="half" idx="10"/>
+          </p:nvPr>
+        </p:nvSpPr>
+        <p:spPr/>
+        <p:txBody>
+          <a:bodyPr/>
+          <a:lstStyle/>
+          <a:p>
+            <a:fld id="{D35072EC-9367-4D7B-8652-6A082F0A7E89}" type="datetime5">
+              <a:rPr lang="zh-CN" altLang="en-US" smtClean="0"/>
+              <a:t>2026/6/26</a:t>
+            </a:fld>
+            <a:endParaRPr lang="de-DE" dirty="0"/>
+          </a:p>
+        </p:txBody>
+      </p:sp>
+      <p:sp>
+        <p:nvSpPr>
+          <p:cNvPr id="3" name="页脚占位符 2"/>
+          <p:cNvSpPr>
+            <a:spLocks noGrp="1"/>
+          </p:cNvSpPr>
+          <p:nvPr>
+            <p:ph type="ftr" sz="quarter" idx="11"/>
+          </p:nvPr>
+        </p:nvSpPr>
+        <p:spPr/>
+        <p:txBody>
+          <a:bodyPr/>
+          <a:lstStyle/>
+          <a:p>
+            <a:r>
+              <a:rPr lang="en-US"/>
+              <a:t>Liang Huang</a:t>
+            </a:r>
+            <a:endParaRPr lang="en-US" dirty="0"/>
+          </a:p>
+        </p:txBody>
+      </p:sp>
+      <p:sp>
+        <p:nvSpPr>
+          <p:cNvPr id="4" name="灯片编号占位符 3"/>
+          <p:cNvSpPr>
+            <a:spLocks noGrp="1"/>
+          </p:cNvSpPr>
+          <p:nvPr>
+            <p:ph type="sldNum" sz="quarter" idx="12"/>
+          </p:nvPr>
+        </p:nvSpPr>
+        <p:spPr/>
+        <p:txBody>
+          <a:bodyPr/>
+          <a:lstStyle/>
+          <a:p>
+            <a:fld id="{4D01E63C-D794-4429-8564-635E6253AC5C}" type="slidenum">
+              <a:rPr lang="en-US" smtClean="0"/>
+              <a:t>14</a:t>
+            </a:fld>
+            <a:endParaRPr lang="en-US" dirty="0"/>
+          </a:p>
+        </p:txBody>
+      </p:sp>
+      <p:sp>
+        <p:nvSpPr>
+          <p:cNvPr id="8" name="文本框 7"/>
+          <p:cNvSpPr txBox="1"/>
+          <p:nvPr/>
+        </p:nvSpPr>
+        <p:spPr>
+          <a:xfrm>
+            <a:off x="3555047" y="2859088"/>
+            <a:ext cx="5080000" cy="635000"/>
+          </a:xfrm>
+          <a:prstGeom prst="rect">
+            <a:avLst/>
+          </a:prstGeom>
+        </p:spPr>
+        <p:txBody>
+          <a:bodyPr/>
+          <a:lstStyle/>
+          <a:p>
+            <a:endParaRPr sz="1600"/>
+          </a:p>
+        </p:txBody>
+      </p:sp>
+    </p:spTree>
+  </p:cSld>
+  <p:clrMapOvr>
+    <a:masterClrMapping/>
+  </p:clrMapOvr>
+</p:sld>
+</file>
+
+<file path=ppt/slides/slide15.xml><?xml version="1.0" encoding="utf-8"?>
+<p:sld xmlns:a="http://schemas.openxmlformats.org/drawingml/2006/main" xmlns:r="http://schemas.openxmlformats.org/officeDocument/2006/relationships" xmlns:p="http://schemas.openxmlformats.org/presentationml/2006/main">
+  <p:cSld>
+    <p:spTree>
+      <p:nvGrpSpPr>
+        <p:cNvPr id="1" name="">
+          <a:extLst>
+            <a:ext uri="{FF2B5EF4-FFF2-40B4-BE49-F238E27FC236}">
+              <a16:creationId xmlns:a16="http://schemas.microsoft.com/office/drawing/2014/main" id="{29685676-44F8-EE0B-393B-86C007DC2FE4}"/>
+            </a:ext>
+          </a:extLst>
+        </p:cNvPr>
+        <p:cNvGrpSpPr/>
+        <p:nvPr/>
+      </p:nvGrpSpPr>
+      <p:grpSpPr>
+        <a:xfrm>
+          <a:off x="0" y="0"/>
+          <a:ext cx="0" cy="0"/>
+          <a:chOff x="0" y="0"/>
+          <a:chExt cx="0" cy="0"/>
+        </a:xfrm>
+      </p:grpSpPr>
+      <p:sp>
+        <p:nvSpPr>
+          <p:cNvPr id="3" name="内容占位符 2">
             <a:extLst>
               <a:ext uri="{FF2B5EF4-FFF2-40B4-BE49-F238E27FC236}">
-                <a16:creationId xmlns:a16="http://schemas.microsoft.com/office/drawing/2014/main" id="{5C84498E-A241-D2DB-F5A7-92B6AAB0297F}"/>
+                <a16:creationId xmlns:a16="http://schemas.microsoft.com/office/drawing/2014/main" id="{D58B46B7-51E3-B3E9-D05C-A00CBDFA6446}"/>
+              </a:ext>
+            </a:extLst>
+          </p:cNvPr>
+          <p:cNvSpPr>
+            <a:spLocks noGrp="1"/>
+          </p:cNvSpPr>
+          <p:nvPr>
+            <p:ph idx="1"/>
+          </p:nvPr>
+        </p:nvSpPr>
+        <p:spPr/>
+        <p:txBody>
+          <a:bodyPr/>
+          <a:lstStyle/>
+          <a:p>
+            <a:r>
+              <a:rPr lang="en-US" altLang="zh-CN" dirty="0"/>
+              <a:t>Feature-Label-</a:t>
+            </a:r>
+            <a:r>
+              <a:rPr lang="en-US" altLang="zh-CN" dirty="0" err="1"/>
+              <a:t>Zuordnung</a:t>
+            </a:r>
+            <a:endParaRPr lang="en-US" altLang="zh-CN" dirty="0"/>
+          </a:p>
+          <a:p>
+            <a:pPr lvl="1"/>
+            <a:r>
+              <a:rPr lang="en-US" altLang="zh-CN" dirty="0" err="1"/>
+              <a:t>Entladungsabschnitt</a:t>
+            </a:r>
+            <a:r>
+              <a:rPr lang="en-US" altLang="zh-CN" dirty="0"/>
+              <a:t> i</a:t>
+            </a:r>
+          </a:p>
+          <a:p>
+            <a:pPr lvl="1"/>
+            <a:r>
+              <a:rPr lang="en-US" altLang="zh-CN" dirty="0"/>
+              <a:t>RC-Parameter </a:t>
+            </a:r>
+            <a:r>
+              <a:rPr lang="en-US" altLang="zh-CN" dirty="0" err="1"/>
+              <a:t>i</a:t>
+            </a:r>
+            <a:endParaRPr lang="en-US" altLang="zh-CN" dirty="0"/>
+          </a:p>
+          <a:p>
+            <a:pPr lvl="1"/>
+            <a:r>
+              <a:rPr lang="en-US" altLang="zh-CN" dirty="0"/>
+              <a:t>SOH(</a:t>
+            </a:r>
+            <a:r>
+              <a:rPr lang="en-US" altLang="zh-CN" dirty="0" err="1"/>
+              <a:t>i</a:t>
+            </a:r>
+            <a:r>
+              <a:rPr lang="en-US" altLang="zh-CN" dirty="0"/>
+              <a:t>)</a:t>
+            </a:r>
+          </a:p>
+          <a:p>
+            <a:pPr lvl="1"/>
+            <a:endParaRPr lang="en-US" altLang="zh-CN" dirty="0">
+              <a:sym typeface="Wingdings" panose="05000000000000000000" pitchFamily="2" charset="2"/>
+            </a:endParaRPr>
+          </a:p>
+          <a:p>
+            <a:r>
+              <a:rPr lang="en-US" altLang="zh-CN" dirty="0" err="1"/>
+              <a:t>Trainingspaare</a:t>
+            </a:r>
+            <a:r>
+              <a:rPr lang="en-US" altLang="zh-CN" dirty="0"/>
+              <a:t> </a:t>
+            </a:r>
+            <a:r>
+              <a:rPr lang="en-US" altLang="zh-CN" dirty="0" err="1"/>
+              <a:t>Xi</a:t>
+            </a:r>
+            <a:r>
+              <a:rPr lang="en-US" altLang="zh-CN" dirty="0" err="1">
+                <a:sym typeface="Wingdings" panose="05000000000000000000" pitchFamily="2" charset="2"/>
+              </a:rPr>
+              <a:t>Yi</a:t>
+            </a:r>
+            <a:endParaRPr lang="en-US" altLang="zh-CN" dirty="0">
+              <a:sym typeface="Wingdings" panose="05000000000000000000" pitchFamily="2" charset="2"/>
+            </a:endParaRPr>
+          </a:p>
+          <a:p>
+            <a:pPr lvl="1"/>
+            <a:r>
+              <a:rPr lang="en-US" altLang="zh-CN" dirty="0">
+                <a:sym typeface="Wingdings" panose="05000000000000000000" pitchFamily="2" charset="2"/>
+              </a:rPr>
+              <a:t>Xi=[OCV, R0, R1, R2, C1, C2]</a:t>
+            </a:r>
+          </a:p>
+          <a:p>
+            <a:pPr lvl="1"/>
+            <a:r>
+              <a:rPr lang="en-US" altLang="zh-CN" dirty="0">
+                <a:sym typeface="Wingdings" panose="05000000000000000000" pitchFamily="2" charset="2"/>
+              </a:rPr>
+              <a:t>Yi=SOH(</a:t>
+            </a:r>
+            <a:r>
+              <a:rPr lang="en-US" altLang="zh-CN" dirty="0" err="1">
+                <a:sym typeface="Wingdings" panose="05000000000000000000" pitchFamily="2" charset="2"/>
+              </a:rPr>
+              <a:t>i</a:t>
+            </a:r>
+            <a:r>
+              <a:rPr lang="en-US" altLang="zh-CN" dirty="0">
+                <a:sym typeface="Wingdings" panose="05000000000000000000" pitchFamily="2" charset="2"/>
+              </a:rPr>
+              <a:t>)</a:t>
+            </a:r>
+          </a:p>
+          <a:p>
+            <a:pPr lvl="1"/>
+            <a:endParaRPr lang="en-US" altLang="zh-CN" dirty="0">
+              <a:sym typeface="Wingdings" panose="05000000000000000000" pitchFamily="2" charset="2"/>
+            </a:endParaRPr>
+          </a:p>
+          <a:p>
+            <a:pPr lvl="1"/>
+            <a:endParaRPr lang="en-US" altLang="zh-CN" dirty="0"/>
+          </a:p>
+          <a:p>
+            <a:pPr lvl="1"/>
+            <a:endParaRPr lang="zh-CN" altLang="en-US" dirty="0"/>
+          </a:p>
+        </p:txBody>
+      </p:sp>
+      <p:sp>
+        <p:nvSpPr>
+          <p:cNvPr id="4" name="日期占位符 3">
+            <a:extLst>
+              <a:ext uri="{FF2B5EF4-FFF2-40B4-BE49-F238E27FC236}">
+                <a16:creationId xmlns:a16="http://schemas.microsoft.com/office/drawing/2014/main" id="{BE1B83E5-4E5D-4C5F-729F-6F0DC0676122}"/>
               </a:ext>
             </a:extLst>
           </p:cNvPr>
@@ -11661,9 +13491,10 @@
           <a:bodyPr/>
           <a:lstStyle/>
           <a:p>
-            <a:fld id="{D35072EC-9367-4D7B-8652-6A082F0A7E89}" type="datetime5">
+            <a:pPr algn="l"/>
+            <a:fld id="{F887C18F-21B2-48B8-9586-9343C0AE58EE}" type="datetime5">
               <a:rPr lang="zh-CN" altLang="en-US" smtClean="0"/>
-              <a:t>2026/6/25</a:t>
+              <a:t>2026/6/26</a:t>
             </a:fld>
             <a:endParaRPr lang="de-DE" dirty="0"/>
           </a:p>
@@ -11671,10 +13502,10 @@
       </p:sp>
       <p:sp>
         <p:nvSpPr>
-          <p:cNvPr id="3" name="页脚占位符 2">
+          <p:cNvPr id="5" name="页脚占位符 4">
             <a:extLst>
               <a:ext uri="{FF2B5EF4-FFF2-40B4-BE49-F238E27FC236}">
-                <a16:creationId xmlns:a16="http://schemas.microsoft.com/office/drawing/2014/main" id="{8F7FE632-338F-674B-6B86-E9186D176724}"/>
+                <a16:creationId xmlns:a16="http://schemas.microsoft.com/office/drawing/2014/main" id="{F04DBC2F-F2BD-4A72-3E1B-7D7D3494035E}"/>
               </a:ext>
             </a:extLst>
           </p:cNvPr>
@@ -11700,10 +13531,10 @@
       </p:sp>
       <p:sp>
         <p:nvSpPr>
-          <p:cNvPr id="4" name="灯片编号占位符 3">
+          <p:cNvPr id="6" name="灯片编号占位符 5">
             <a:extLst>
               <a:ext uri="{FF2B5EF4-FFF2-40B4-BE49-F238E27FC236}">
-                <a16:creationId xmlns:a16="http://schemas.microsoft.com/office/drawing/2014/main" id="{11624233-4B58-3481-09D9-39FA0A6B7BE9}"/>
+                <a16:creationId xmlns:a16="http://schemas.microsoft.com/office/drawing/2014/main" id="{9F657E61-3ED7-A15B-0518-9E4EA106A457}"/>
               </a:ext>
             </a:extLst>
           </p:cNvPr>
@@ -11721,45 +13552,81 @@
           <a:p>
             <a:fld id="{4D01E63C-D794-4429-8564-635E6253AC5C}" type="slidenum">
               <a:rPr lang="en-US" smtClean="0"/>
-              <a:t>11</a:t>
+              <a:t>15</a:t>
             </a:fld>
             <a:endParaRPr lang="en-US" dirty="0"/>
           </a:p>
         </p:txBody>
       </p:sp>
-      <p:sp>
-        <p:nvSpPr>
-          <p:cNvPr id="8" name="文本框 7">
+      <p:pic>
+        <p:nvPicPr>
+          <p:cNvPr id="11" name="图片 10">
             <a:extLst>
               <a:ext uri="{FF2B5EF4-FFF2-40B4-BE49-F238E27FC236}">
-                <a16:creationId xmlns:a16="http://schemas.microsoft.com/office/drawing/2014/main" id="{15BD4468-B63F-1A10-BF6B-44DB40C427EB}"/>
+                <a16:creationId xmlns:a16="http://schemas.microsoft.com/office/drawing/2014/main" id="{E7090538-3B9D-1E04-745D-A64BBC7F0B09}"/>
               </a:ext>
             </a:extLst>
           </p:cNvPr>
-          <p:cNvSpPr txBox="1"/>
+          <p:cNvPicPr>
+            <a:picLocks noChangeAspect="1"/>
+          </p:cNvPicPr>
           <p:nvPr/>
-        </p:nvSpPr>
+        </p:nvPicPr>
+        <p:blipFill>
+          <a:blip r:embed="rId2" cstate="print">
+            <a:extLst>
+              <a:ext uri="{28A0092B-C50C-407E-A947-70E740481C1C}">
+                <a14:useLocalDpi xmlns:a14="http://schemas.microsoft.com/office/drawing/2010/main" val="0"/>
+              </a:ext>
+            </a:extLst>
+          </a:blip>
+          <a:stretch>
+            <a:fillRect/>
+          </a:stretch>
+        </p:blipFill>
         <p:spPr>
           <a:xfrm>
-            <a:off x="3555047" y="2859088"/>
-            <a:ext cx="5080000" cy="635000"/>
+            <a:off x="6472463" y="2693313"/>
+            <a:ext cx="5334000" cy="3429000"/>
           </a:xfrm>
           <a:prstGeom prst="rect">
             <a:avLst/>
           </a:prstGeom>
         </p:spPr>
+      </p:pic>
+      <p:sp>
+        <p:nvSpPr>
+          <p:cNvPr id="14" name="标题 13">
+            <a:extLst>
+              <a:ext uri="{FF2B5EF4-FFF2-40B4-BE49-F238E27FC236}">
+                <a16:creationId xmlns:a16="http://schemas.microsoft.com/office/drawing/2014/main" id="{2084B8F4-369B-05AB-1633-4ED77B87A0CC}"/>
+              </a:ext>
+            </a:extLst>
+          </p:cNvPr>
+          <p:cNvSpPr>
+            <a:spLocks noGrp="1"/>
+          </p:cNvSpPr>
+          <p:nvPr>
+            <p:ph type="title"/>
+          </p:nvPr>
+        </p:nvSpPr>
+        <p:spPr/>
         <p:txBody>
           <a:bodyPr/>
           <a:lstStyle/>
           <a:p>
-            <a:endParaRPr sz="1600"/>
+            <a:r>
+              <a:rPr lang="en-US" altLang="zh-CN" dirty="0" err="1"/>
+              <a:t>Trainingsdaten-Generierung</a:t>
+            </a:r>
+            <a:endParaRPr lang="zh-CN" altLang="en-US" dirty="0"/>
           </a:p>
         </p:txBody>
       </p:sp>
     </p:spTree>
     <p:extLst>
       <p:ext uri="{BB962C8B-B14F-4D97-AF65-F5344CB8AC3E}">
-        <p14:creationId xmlns:p14="http://schemas.microsoft.com/office/powerpoint/2010/main" val="2250771524"/>
+        <p14:creationId xmlns:p14="http://schemas.microsoft.com/office/powerpoint/2010/main" val="805769030"/>
       </p:ext>
     </p:extLst>
   </p:cSld>
@@ -11769,7 +13636,202 @@
 </p:sld>
 </file>
 
-<file path=ppt/slides/slide12.xml><?xml version="1.0" encoding="utf-8"?>
+<file path=ppt/slides/slide16.xml><?xml version="1.0" encoding="utf-8"?>
+<p:sld xmlns:a="http://schemas.openxmlformats.org/drawingml/2006/main" xmlns:r="http://schemas.openxmlformats.org/officeDocument/2006/relationships" xmlns:p="http://schemas.openxmlformats.org/presentationml/2006/main">
+  <p:cSld>
+    <p:spTree>
+      <p:nvGrpSpPr>
+        <p:cNvPr id="1" name=""/>
+        <p:cNvGrpSpPr/>
+        <p:nvPr/>
+      </p:nvGrpSpPr>
+      <p:grpSpPr>
+        <a:xfrm>
+          <a:off x="0" y="0"/>
+          <a:ext cx="0" cy="0"/>
+          <a:chOff x="0" y="0"/>
+          <a:chExt cx="0" cy="0"/>
+        </a:xfrm>
+      </p:grpSpPr>
+      <p:sp>
+        <p:nvSpPr>
+          <p:cNvPr id="2" name="标题 1">
+            <a:extLst>
+              <a:ext uri="{FF2B5EF4-FFF2-40B4-BE49-F238E27FC236}">
+                <a16:creationId xmlns:a16="http://schemas.microsoft.com/office/drawing/2014/main" id="{75E9A57C-206D-83C0-B45E-17FED2A88F5E}"/>
+              </a:ext>
+            </a:extLst>
+          </p:cNvPr>
+          <p:cNvSpPr>
+            <a:spLocks noGrp="1"/>
+          </p:cNvSpPr>
+          <p:nvPr>
+            <p:ph type="title"/>
+          </p:nvPr>
+        </p:nvSpPr>
+        <p:spPr/>
+        <p:txBody>
+          <a:bodyPr/>
+          <a:lstStyle/>
+          <a:p>
+            <a:r>
+              <a:rPr lang="en-US" altLang="zh-CN" dirty="0" err="1"/>
+              <a:t>Weitere</a:t>
+            </a:r>
+            <a:r>
+              <a:rPr lang="en-US" altLang="zh-CN" dirty="0"/>
+              <a:t> Arbeit</a:t>
+            </a:r>
+            <a:endParaRPr lang="zh-CN" altLang="en-US" dirty="0"/>
+          </a:p>
+        </p:txBody>
+      </p:sp>
+      <p:sp>
+        <p:nvSpPr>
+          <p:cNvPr id="3" name="内容占位符 2">
+            <a:extLst>
+              <a:ext uri="{FF2B5EF4-FFF2-40B4-BE49-F238E27FC236}">
+                <a16:creationId xmlns:a16="http://schemas.microsoft.com/office/drawing/2014/main" id="{FA68EC69-78AA-5C28-D840-8AB9EA880AF6}"/>
+              </a:ext>
+            </a:extLst>
+          </p:cNvPr>
+          <p:cNvSpPr>
+            <a:spLocks noGrp="1"/>
+          </p:cNvSpPr>
+          <p:nvPr>
+            <p:ph idx="1"/>
+          </p:nvPr>
+        </p:nvSpPr>
+        <p:spPr/>
+        <p:txBody>
+          <a:bodyPr/>
+          <a:lstStyle/>
+          <a:p>
+            <a:endParaRPr lang="en-US" altLang="zh-CN" dirty="0"/>
+          </a:p>
+          <a:p>
+            <a:endParaRPr lang="en-US" altLang="zh-CN" dirty="0"/>
+          </a:p>
+          <a:p>
+            <a:endParaRPr lang="en-US" altLang="zh-CN" dirty="0"/>
+          </a:p>
+          <a:p>
+            <a:r>
+              <a:rPr lang="en-US" altLang="zh-CN" dirty="0"/>
+              <a:t>Machine Learning</a:t>
+            </a:r>
+          </a:p>
+          <a:p>
+            <a:r>
+              <a:rPr lang="en-US" altLang="zh-CN" dirty="0"/>
+              <a:t>Transfer Learning</a:t>
+            </a:r>
+            <a:endParaRPr lang="zh-CN" altLang="en-US" dirty="0"/>
+          </a:p>
+        </p:txBody>
+      </p:sp>
+      <p:sp>
+        <p:nvSpPr>
+          <p:cNvPr id="4" name="日期占位符 3">
+            <a:extLst>
+              <a:ext uri="{FF2B5EF4-FFF2-40B4-BE49-F238E27FC236}">
+                <a16:creationId xmlns:a16="http://schemas.microsoft.com/office/drawing/2014/main" id="{E1AE2317-5EE1-5E98-93DD-CBF7BECFCA6C}"/>
+              </a:ext>
+            </a:extLst>
+          </p:cNvPr>
+          <p:cNvSpPr>
+            <a:spLocks noGrp="1"/>
+          </p:cNvSpPr>
+          <p:nvPr>
+            <p:ph type="dt" sz="half" idx="10"/>
+          </p:nvPr>
+        </p:nvSpPr>
+        <p:spPr/>
+        <p:txBody>
+          <a:bodyPr/>
+          <a:lstStyle/>
+          <a:p>
+            <a:pPr algn="l"/>
+            <a:fld id="{F887C18F-21B2-48B8-9586-9343C0AE58EE}" type="datetime5">
+              <a:rPr lang="zh-CN" altLang="en-US" smtClean="0"/>
+              <a:t>2026/6/26</a:t>
+            </a:fld>
+            <a:endParaRPr lang="de-DE" dirty="0"/>
+          </a:p>
+        </p:txBody>
+      </p:sp>
+      <p:sp>
+        <p:nvSpPr>
+          <p:cNvPr id="5" name="页脚占位符 4">
+            <a:extLst>
+              <a:ext uri="{FF2B5EF4-FFF2-40B4-BE49-F238E27FC236}">
+                <a16:creationId xmlns:a16="http://schemas.microsoft.com/office/drawing/2014/main" id="{8CC10BAD-195D-1F09-ACFB-22AC34538E2A}"/>
+              </a:ext>
+            </a:extLst>
+          </p:cNvPr>
+          <p:cNvSpPr>
+            <a:spLocks noGrp="1"/>
+          </p:cNvSpPr>
+          <p:nvPr>
+            <p:ph type="ftr" sz="quarter" idx="11"/>
+          </p:nvPr>
+        </p:nvSpPr>
+        <p:spPr/>
+        <p:txBody>
+          <a:bodyPr/>
+          <a:lstStyle/>
+          <a:p>
+            <a:r>
+              <a:rPr lang="en-US"/>
+              <a:t>Liang Huang</a:t>
+            </a:r>
+            <a:endParaRPr lang="en-US" dirty="0"/>
+          </a:p>
+        </p:txBody>
+      </p:sp>
+      <p:sp>
+        <p:nvSpPr>
+          <p:cNvPr id="6" name="灯片编号占位符 5">
+            <a:extLst>
+              <a:ext uri="{FF2B5EF4-FFF2-40B4-BE49-F238E27FC236}">
+                <a16:creationId xmlns:a16="http://schemas.microsoft.com/office/drawing/2014/main" id="{9D6BCB71-C048-E186-F8FD-96C0996EF3F5}"/>
+              </a:ext>
+            </a:extLst>
+          </p:cNvPr>
+          <p:cNvSpPr>
+            <a:spLocks noGrp="1"/>
+          </p:cNvSpPr>
+          <p:nvPr>
+            <p:ph type="sldNum" sz="quarter" idx="12"/>
+          </p:nvPr>
+        </p:nvSpPr>
+        <p:spPr/>
+        <p:txBody>
+          <a:bodyPr/>
+          <a:lstStyle/>
+          <a:p>
+            <a:fld id="{4D01E63C-D794-4429-8564-635E6253AC5C}" type="slidenum">
+              <a:rPr lang="en-US" smtClean="0"/>
+              <a:t>16</a:t>
+            </a:fld>
+            <a:endParaRPr lang="en-US" dirty="0"/>
+          </a:p>
+        </p:txBody>
+      </p:sp>
+    </p:spTree>
+    <p:extLst>
+      <p:ext uri="{BB962C8B-B14F-4D97-AF65-F5344CB8AC3E}">
+        <p14:creationId xmlns:p14="http://schemas.microsoft.com/office/powerpoint/2010/main" val="2240135073"/>
+      </p:ext>
+    </p:extLst>
+  </p:cSld>
+  <p:clrMapOvr>
+    <a:masterClrMapping/>
+  </p:clrMapOvr>
+</p:sld>
+</file>
+
+<file path=ppt/slides/slide17.xml><?xml version="1.0" encoding="utf-8"?>
 <p:sld xmlns:a="http://schemas.openxmlformats.org/drawingml/2006/main" xmlns:r="http://schemas.openxmlformats.org/officeDocument/2006/relationships" xmlns:p="http://schemas.openxmlformats.org/presentationml/2006/main">
   <p:cSld>
     <p:spTree>
@@ -11929,7 +13991,7 @@
             <a:pPr algn="l"/>
             <a:fld id="{6D3069C6-0311-4A39-8CC1-DA405FE38D0C}" type="datetime5">
               <a:rPr lang="zh-CN" altLang="en-US" smtClean="0"/>
-              <a:t>2026/6/25</a:t>
+              <a:t>2026/6/26</a:t>
             </a:fld>
             <a:endParaRPr lang="de-DE" dirty="0"/>
           </a:p>
@@ -12216,7 +14278,7 @@
           <a:p>
             <a:fld id="{D35072EC-9367-4D7B-8652-6A082F0A7E89}" type="datetime5">
               <a:rPr lang="zh-CN" altLang="en-US" smtClean="0"/>
-              <a:t>2026/6/25</a:t>
+              <a:t>2026/6/26</a:t>
             </a:fld>
             <a:endParaRPr lang="de-DE" dirty="0"/>
           </a:p>
@@ -12304,13 +14366,7 @@
   <p:cSld>
     <p:spTree>
       <p:nvGrpSpPr>
-        <p:cNvPr id="1" name="">
-          <a:extLst>
-            <a:ext uri="{FF2B5EF4-FFF2-40B4-BE49-F238E27FC236}">
-              <a16:creationId xmlns:a16="http://schemas.microsoft.com/office/drawing/2014/main" id="{4C8DC676-AABF-4609-ED7D-18A11CC80252}"/>
-            </a:ext>
-          </a:extLst>
-        </p:cNvPr>
+        <p:cNvPr id="1" name=""/>
         <p:cNvGrpSpPr/>
         <p:nvPr/>
       </p:nvGrpSpPr>
@@ -12324,13 +14380,7 @@
       </p:grpSpPr>
       <p:sp>
         <p:nvSpPr>
-          <p:cNvPr id="5" name="标题 4">
-            <a:extLst>
-              <a:ext uri="{FF2B5EF4-FFF2-40B4-BE49-F238E27FC236}">
-                <a16:creationId xmlns:a16="http://schemas.microsoft.com/office/drawing/2014/main" id="{F196D1A7-9A96-D7B4-95B6-A966A76399F8}"/>
-              </a:ext>
-            </a:extLst>
-          </p:cNvPr>
+          <p:cNvPr id="5" name="标题 4"/>
           <p:cNvSpPr>
             <a:spLocks noGrp="1"/>
           </p:cNvSpPr>
@@ -12353,13 +14403,7 @@
       </p:sp>
       <p:sp>
         <p:nvSpPr>
-          <p:cNvPr id="6" name="内容占位符 5">
-            <a:extLst>
-              <a:ext uri="{FF2B5EF4-FFF2-40B4-BE49-F238E27FC236}">
-                <a16:creationId xmlns:a16="http://schemas.microsoft.com/office/drawing/2014/main" id="{F3346DA3-E4A8-55EB-43CE-81119D5A1B65}"/>
-              </a:ext>
-            </a:extLst>
-          </p:cNvPr>
+          <p:cNvPr id="6" name="内容占位符 5"/>
           <p:cNvSpPr>
             <a:spLocks noGrp="1"/>
           </p:cNvSpPr>
@@ -12510,13 +14554,7 @@
       </p:sp>
       <p:sp>
         <p:nvSpPr>
-          <p:cNvPr id="2" name="日期占位符 1">
-            <a:extLst>
-              <a:ext uri="{FF2B5EF4-FFF2-40B4-BE49-F238E27FC236}">
-                <a16:creationId xmlns:a16="http://schemas.microsoft.com/office/drawing/2014/main" id="{3C4F417C-F386-262D-4C55-4B27505DA0BB}"/>
-              </a:ext>
-            </a:extLst>
-          </p:cNvPr>
+          <p:cNvPr id="2" name="日期占位符 1"/>
           <p:cNvSpPr>
             <a:spLocks noGrp="1"/>
           </p:cNvSpPr>
@@ -12531,7 +14569,7 @@
           <a:p>
             <a:fld id="{D35072EC-9367-4D7B-8652-6A082F0A7E89}" type="datetime5">
               <a:rPr lang="zh-CN" altLang="en-US" smtClean="0"/>
-              <a:t>2026/6/25</a:t>
+              <a:t>2026/6/26</a:t>
             </a:fld>
             <a:endParaRPr lang="de-DE" dirty="0"/>
           </a:p>
@@ -12539,13 +14577,7 @@
       </p:sp>
       <p:sp>
         <p:nvSpPr>
-          <p:cNvPr id="3" name="页脚占位符 2">
-            <a:extLst>
-              <a:ext uri="{FF2B5EF4-FFF2-40B4-BE49-F238E27FC236}">
-                <a16:creationId xmlns:a16="http://schemas.microsoft.com/office/drawing/2014/main" id="{823D31D9-12AD-DDAC-5126-137D5535860F}"/>
-              </a:ext>
-            </a:extLst>
-          </p:cNvPr>
+          <p:cNvPr id="3" name="页脚占位符 2"/>
           <p:cNvSpPr>
             <a:spLocks noGrp="1"/>
           </p:cNvSpPr>
@@ -12568,13 +14600,7 @@
       </p:sp>
       <p:sp>
         <p:nvSpPr>
-          <p:cNvPr id="4" name="灯片编号占位符 3">
-            <a:extLst>
-              <a:ext uri="{FF2B5EF4-FFF2-40B4-BE49-F238E27FC236}">
-                <a16:creationId xmlns:a16="http://schemas.microsoft.com/office/drawing/2014/main" id="{E97631AC-28CB-7547-BC34-447191434855}"/>
-              </a:ext>
-            </a:extLst>
-          </p:cNvPr>
+          <p:cNvPr id="4" name="灯片编号占位符 3"/>
           <p:cNvSpPr>
             <a:spLocks noGrp="1"/>
           </p:cNvSpPr>
@@ -12597,13 +14623,7 @@
       </p:sp>
       <p:sp>
         <p:nvSpPr>
-          <p:cNvPr id="8" name="文本框 7">
-            <a:extLst>
-              <a:ext uri="{FF2B5EF4-FFF2-40B4-BE49-F238E27FC236}">
-                <a16:creationId xmlns:a16="http://schemas.microsoft.com/office/drawing/2014/main" id="{26940E29-97A4-A7E5-EB3B-29D2AA8311A6}"/>
-              </a:ext>
-            </a:extLst>
-          </p:cNvPr>
+          <p:cNvPr id="8" name="文本框 7"/>
           <p:cNvSpPr txBox="1"/>
           <p:nvPr/>
         </p:nvSpPr>
@@ -12625,11 +14645,6 @@
         </p:txBody>
       </p:sp>
     </p:spTree>
-    <p:extLst>
-      <p:ext uri="{BB962C8B-B14F-4D97-AF65-F5344CB8AC3E}">
-        <p14:creationId xmlns:p14="http://schemas.microsoft.com/office/powerpoint/2010/main" val="2665253291"/>
-      </p:ext>
-    </p:extLst>
   </p:cSld>
   <p:clrMapOvr>
     <a:masterClrMapping/>
@@ -12718,13 +14733,7 @@
       </p:sp>
       <p:sp>
         <p:nvSpPr>
-          <p:cNvPr id="7" name="内容占位符 6">
-            <a:extLst>
-              <a:ext uri="{FF2B5EF4-FFF2-40B4-BE49-F238E27FC236}">
-                <a16:creationId xmlns:a16="http://schemas.microsoft.com/office/drawing/2014/main" id="{F9DA66C8-A138-880A-639D-E4724A59997B}"/>
-              </a:ext>
-            </a:extLst>
-          </p:cNvPr>
+          <p:cNvPr id="7" name="内容占位符 6"/>
           <p:cNvSpPr>
             <a:spLocks noGrp="1"/>
           </p:cNvSpPr>
@@ -12824,7 +14833,7 @@
           <a:p>
             <a:fld id="{D35072EC-9367-4D7B-8652-6A082F0A7E89}" type="datetime5">
               <a:rPr lang="zh-CN" altLang="en-US" smtClean="0"/>
-              <a:t>2026/6/25</a:t>
+              <a:t>2026/6/26</a:t>
             </a:fld>
             <a:endParaRPr lang="de-DE" dirty="0"/>
           </a:p>
@@ -12889,13 +14898,7 @@
   <p:cSld>
     <p:spTree>
       <p:nvGrpSpPr>
-        <p:cNvPr id="1" name="">
-          <a:extLst>
-            <a:ext uri="{FF2B5EF4-FFF2-40B4-BE49-F238E27FC236}">
-              <a16:creationId xmlns:a16="http://schemas.microsoft.com/office/drawing/2014/main" id="{4A7B8DDE-DD66-34F5-A137-03DC662CAD45}"/>
-            </a:ext>
-          </a:extLst>
-        </p:cNvPr>
+        <p:cNvPr id="1" name=""/>
         <p:cNvGrpSpPr/>
         <p:nvPr/>
       </p:nvGrpSpPr>
@@ -12909,13 +14912,7 @@
       </p:grpSpPr>
       <p:sp>
         <p:nvSpPr>
-          <p:cNvPr id="5" name="标题 4">
-            <a:extLst>
-              <a:ext uri="{FF2B5EF4-FFF2-40B4-BE49-F238E27FC236}">
-                <a16:creationId xmlns:a16="http://schemas.microsoft.com/office/drawing/2014/main" id="{511D0696-AEBB-8571-BB06-DD63F7A34737}"/>
-              </a:ext>
-            </a:extLst>
-          </p:cNvPr>
+          <p:cNvPr id="5" name="标题 4"/>
           <p:cNvSpPr>
             <a:spLocks noGrp="1"/>
           </p:cNvSpPr>
@@ -12938,13 +14935,7 @@
       </p:sp>
       <p:sp>
         <p:nvSpPr>
-          <p:cNvPr id="6" name="内容占位符 5">
-            <a:extLst>
-              <a:ext uri="{FF2B5EF4-FFF2-40B4-BE49-F238E27FC236}">
-                <a16:creationId xmlns:a16="http://schemas.microsoft.com/office/drawing/2014/main" id="{D0F5571F-6AE0-216B-3E42-20BD5074313C}"/>
-              </a:ext>
-            </a:extLst>
-          </p:cNvPr>
+          <p:cNvPr id="6" name="内容占位符 5"/>
           <p:cNvSpPr>
             <a:spLocks noGrp="1"/>
           </p:cNvSpPr>
@@ -13095,13 +15086,7 @@
       </p:sp>
       <p:sp>
         <p:nvSpPr>
-          <p:cNvPr id="2" name="日期占位符 1">
-            <a:extLst>
-              <a:ext uri="{FF2B5EF4-FFF2-40B4-BE49-F238E27FC236}">
-                <a16:creationId xmlns:a16="http://schemas.microsoft.com/office/drawing/2014/main" id="{C73E54F4-6571-7C7E-052A-57EBC8A78E95}"/>
-              </a:ext>
-            </a:extLst>
-          </p:cNvPr>
+          <p:cNvPr id="2" name="日期占位符 1"/>
           <p:cNvSpPr>
             <a:spLocks noGrp="1"/>
           </p:cNvSpPr>
@@ -13116,7 +15101,7 @@
           <a:p>
             <a:fld id="{D35072EC-9367-4D7B-8652-6A082F0A7E89}" type="datetime5">
               <a:rPr lang="zh-CN" altLang="en-US" smtClean="0"/>
-              <a:t>2026/6/25</a:t>
+              <a:t>2026/6/26</a:t>
             </a:fld>
             <a:endParaRPr lang="de-DE" dirty="0"/>
           </a:p>
@@ -13124,13 +15109,7 @@
       </p:sp>
       <p:sp>
         <p:nvSpPr>
-          <p:cNvPr id="3" name="页脚占位符 2">
-            <a:extLst>
-              <a:ext uri="{FF2B5EF4-FFF2-40B4-BE49-F238E27FC236}">
-                <a16:creationId xmlns:a16="http://schemas.microsoft.com/office/drawing/2014/main" id="{1C09DE16-FF30-9AE2-90B9-9D689C7EB5C4}"/>
-              </a:ext>
-            </a:extLst>
-          </p:cNvPr>
+          <p:cNvPr id="3" name="页脚占位符 2"/>
           <p:cNvSpPr>
             <a:spLocks noGrp="1"/>
           </p:cNvSpPr>
@@ -13153,13 +15132,7 @@
       </p:sp>
       <p:sp>
         <p:nvSpPr>
-          <p:cNvPr id="4" name="灯片编号占位符 3">
-            <a:extLst>
-              <a:ext uri="{FF2B5EF4-FFF2-40B4-BE49-F238E27FC236}">
-                <a16:creationId xmlns:a16="http://schemas.microsoft.com/office/drawing/2014/main" id="{EF38E1A6-1267-1548-B720-7D161088ECD6}"/>
-              </a:ext>
-            </a:extLst>
-          </p:cNvPr>
+          <p:cNvPr id="4" name="灯片编号占位符 3"/>
           <p:cNvSpPr>
             <a:spLocks noGrp="1"/>
           </p:cNvSpPr>
@@ -13182,13 +15155,7 @@
       </p:sp>
       <p:sp>
         <p:nvSpPr>
-          <p:cNvPr id="8" name="文本框 7">
-            <a:extLst>
-              <a:ext uri="{FF2B5EF4-FFF2-40B4-BE49-F238E27FC236}">
-                <a16:creationId xmlns:a16="http://schemas.microsoft.com/office/drawing/2014/main" id="{7A02F5E7-D4EC-2A64-7EFC-5D73B4E12E73}"/>
-              </a:ext>
-            </a:extLst>
-          </p:cNvPr>
+          <p:cNvPr id="8" name="文本框 7"/>
           <p:cNvSpPr txBox="1"/>
           <p:nvPr/>
         </p:nvSpPr>
@@ -13210,11 +15177,6 @@
         </p:txBody>
       </p:sp>
     </p:spTree>
-    <p:extLst>
-      <p:ext uri="{BB962C8B-B14F-4D97-AF65-F5344CB8AC3E}">
-        <p14:creationId xmlns:p14="http://schemas.microsoft.com/office/powerpoint/2010/main" val="476568194"/>
-      </p:ext>
-    </p:extLst>
   </p:cSld>
   <p:clrMapOvr>
     <a:masterClrMapping/>
@@ -13241,13 +15203,7 @@
       </p:grpSpPr>
       <p:pic>
         <p:nvPicPr>
-          <p:cNvPr id="12" name="内容占位符 11">
-            <a:extLst>
-              <a:ext uri="{FF2B5EF4-FFF2-40B4-BE49-F238E27FC236}">
-                <a16:creationId xmlns:a16="http://schemas.microsoft.com/office/drawing/2014/main" id="{8ED48629-411A-A2E0-628B-76420D919376}"/>
-              </a:ext>
-            </a:extLst>
-          </p:cNvPr>
+          <p:cNvPr id="12" name="内容占位符 11"/>
           <p:cNvPicPr>
             <a:picLocks noGrp="1" noChangeAspect="1"/>
           </p:cNvPicPr>
@@ -13310,7 +15266,7 @@
           <a:p>
             <a:fld id="{D35072EC-9367-4D7B-8652-6A082F0A7E89}" type="datetime5">
               <a:rPr lang="zh-CN" altLang="en-US" smtClean="0"/>
-              <a:t>2026/6/25</a:t>
+              <a:t>2026/6/26</a:t>
             </a:fld>
             <a:endParaRPr lang="de-DE" dirty="0"/>
           </a:p>
@@ -13364,16 +15320,8 @@
       </p:sp>
       <p:cxnSp>
         <p:nvCxnSpPr>
-          <p:cNvPr id="9" name="直接连接符 8">
-            <a:extLst>
-              <a:ext uri="{FF2B5EF4-FFF2-40B4-BE49-F238E27FC236}">
-                <a16:creationId xmlns:a16="http://schemas.microsoft.com/office/drawing/2014/main" id="{52C71634-332D-0F34-AAA1-BFD63B75D1C3}"/>
-              </a:ext>
-            </a:extLst>
-          </p:cNvPr>
-          <p:cNvCxnSpPr>
-            <a:cxnSpLocks/>
-          </p:cNvCxnSpPr>
+          <p:cNvPr id="9" name="直接连接符 8"/>
+          <p:cNvCxnSpPr/>
           <p:nvPr/>
         </p:nvCxnSpPr>
         <p:spPr>
@@ -13408,16 +15356,8 @@
       </p:cxnSp>
       <p:cxnSp>
         <p:nvCxnSpPr>
-          <p:cNvPr id="14" name="直接连接符 13">
-            <a:extLst>
-              <a:ext uri="{FF2B5EF4-FFF2-40B4-BE49-F238E27FC236}">
-                <a16:creationId xmlns:a16="http://schemas.microsoft.com/office/drawing/2014/main" id="{0EB14B48-2C49-4126-2AD7-8BB84D7ADEC9}"/>
-              </a:ext>
-            </a:extLst>
-          </p:cNvPr>
-          <p:cNvCxnSpPr>
-            <a:cxnSpLocks/>
-          </p:cNvCxnSpPr>
+          <p:cNvPr id="14" name="直接连接符 13"/>
+          <p:cNvCxnSpPr/>
           <p:nvPr/>
         </p:nvCxnSpPr>
         <p:spPr>
@@ -13452,13 +15392,7 @@
       </p:cxnSp>
       <p:sp>
         <p:nvSpPr>
-          <p:cNvPr id="15" name="文本框 14">
-            <a:extLst>
-              <a:ext uri="{FF2B5EF4-FFF2-40B4-BE49-F238E27FC236}">
-                <a16:creationId xmlns:a16="http://schemas.microsoft.com/office/drawing/2014/main" id="{37677E4F-3038-31D5-9F1E-223CD5903AA6}"/>
-              </a:ext>
-            </a:extLst>
-          </p:cNvPr>
+          <p:cNvPr id="15" name="文本框 14"/>
           <p:cNvSpPr txBox="1"/>
           <p:nvPr/>
         </p:nvSpPr>
@@ -13487,13 +15421,7 @@
       </p:sp>
       <p:sp>
         <p:nvSpPr>
-          <p:cNvPr id="16" name="文本框 15">
-            <a:extLst>
-              <a:ext uri="{FF2B5EF4-FFF2-40B4-BE49-F238E27FC236}">
-                <a16:creationId xmlns:a16="http://schemas.microsoft.com/office/drawing/2014/main" id="{B9537877-C933-2BFB-CD94-36F880E16765}"/>
-              </a:ext>
-            </a:extLst>
-          </p:cNvPr>
+          <p:cNvPr id="16" name="文本框 15"/>
           <p:cNvSpPr txBox="1"/>
           <p:nvPr/>
         </p:nvSpPr>
@@ -13522,16 +15450,8 @@
       </p:sp>
       <p:cxnSp>
         <p:nvCxnSpPr>
-          <p:cNvPr id="17" name="直接连接符 16">
-            <a:extLst>
-              <a:ext uri="{FF2B5EF4-FFF2-40B4-BE49-F238E27FC236}">
-                <a16:creationId xmlns:a16="http://schemas.microsoft.com/office/drawing/2014/main" id="{92F686D3-5FF2-9890-30EE-5449A3FB12C0}"/>
-              </a:ext>
-            </a:extLst>
-          </p:cNvPr>
-          <p:cNvCxnSpPr>
-            <a:cxnSpLocks/>
-          </p:cNvCxnSpPr>
+          <p:cNvPr id="17" name="直接连接符 16"/>
+          <p:cNvCxnSpPr/>
           <p:nvPr/>
         </p:nvCxnSpPr>
         <p:spPr>
@@ -13566,13 +15486,7 @@
       </p:cxnSp>
       <p:sp>
         <p:nvSpPr>
-          <p:cNvPr id="18" name="文本框 17">
-            <a:extLst>
-              <a:ext uri="{FF2B5EF4-FFF2-40B4-BE49-F238E27FC236}">
-                <a16:creationId xmlns:a16="http://schemas.microsoft.com/office/drawing/2014/main" id="{64C3714D-A94D-7D8A-D691-6CF94D163386}"/>
-              </a:ext>
-            </a:extLst>
-          </p:cNvPr>
+          <p:cNvPr id="18" name="文本框 17"/>
           <p:cNvSpPr txBox="1"/>
           <p:nvPr/>
         </p:nvSpPr>
@@ -13601,13 +15515,7 @@
       </p:sp>
       <p:sp>
         <p:nvSpPr>
-          <p:cNvPr id="19" name="文本框 18">
-            <a:extLst>
-              <a:ext uri="{FF2B5EF4-FFF2-40B4-BE49-F238E27FC236}">
-                <a16:creationId xmlns:a16="http://schemas.microsoft.com/office/drawing/2014/main" id="{86B67050-4911-6321-942C-7E063DC939E3}"/>
-              </a:ext>
-            </a:extLst>
-          </p:cNvPr>
+          <p:cNvPr id="19" name="文本框 18"/>
           <p:cNvSpPr txBox="1"/>
           <p:nvPr/>
         </p:nvSpPr>
@@ -13697,13 +15605,7 @@
   <p:cSld>
     <p:spTree>
       <p:nvGrpSpPr>
-        <p:cNvPr id="1" name="">
-          <a:extLst>
-            <a:ext uri="{FF2B5EF4-FFF2-40B4-BE49-F238E27FC236}">
-              <a16:creationId xmlns:a16="http://schemas.microsoft.com/office/drawing/2014/main" id="{2836BE32-4DC3-3FE8-2F7B-1153AD1C1409}"/>
-            </a:ext>
-          </a:extLst>
-        </p:cNvPr>
+        <p:cNvPr id="1" name=""/>
         <p:cNvGrpSpPr/>
         <p:nvPr/>
       </p:nvGrpSpPr>
@@ -13717,13 +15619,7 @@
       </p:grpSpPr>
       <p:sp>
         <p:nvSpPr>
-          <p:cNvPr id="5" name="标题 4">
-            <a:extLst>
-              <a:ext uri="{FF2B5EF4-FFF2-40B4-BE49-F238E27FC236}">
-                <a16:creationId xmlns:a16="http://schemas.microsoft.com/office/drawing/2014/main" id="{AB68C9B4-5C42-0AAB-796B-03DFDFF51E9D}"/>
-              </a:ext>
-            </a:extLst>
-          </p:cNvPr>
+          <p:cNvPr id="5" name="标题 4"/>
           <p:cNvSpPr>
             <a:spLocks noGrp="1"/>
           </p:cNvSpPr>
@@ -13746,13 +15642,7 @@
       </p:sp>
       <p:sp>
         <p:nvSpPr>
-          <p:cNvPr id="6" name="内容占位符 5">
-            <a:extLst>
-              <a:ext uri="{FF2B5EF4-FFF2-40B4-BE49-F238E27FC236}">
-                <a16:creationId xmlns:a16="http://schemas.microsoft.com/office/drawing/2014/main" id="{017F52FD-EB28-8915-F4B7-1CDD650B3E7B}"/>
-              </a:ext>
-            </a:extLst>
-          </p:cNvPr>
+          <p:cNvPr id="6" name="内容占位符 5"/>
           <p:cNvSpPr>
             <a:spLocks noGrp="1"/>
           </p:cNvSpPr>
@@ -13903,13 +15793,7 @@
       </p:sp>
       <p:sp>
         <p:nvSpPr>
-          <p:cNvPr id="2" name="日期占位符 1">
-            <a:extLst>
-              <a:ext uri="{FF2B5EF4-FFF2-40B4-BE49-F238E27FC236}">
-                <a16:creationId xmlns:a16="http://schemas.microsoft.com/office/drawing/2014/main" id="{88F5C51B-87DA-4826-59B8-BD5BE3349077}"/>
-              </a:ext>
-            </a:extLst>
-          </p:cNvPr>
+          <p:cNvPr id="2" name="日期占位符 1"/>
           <p:cNvSpPr>
             <a:spLocks noGrp="1"/>
           </p:cNvSpPr>
@@ -13924,7 +15808,7 @@
           <a:p>
             <a:fld id="{D35072EC-9367-4D7B-8652-6A082F0A7E89}" type="datetime5">
               <a:rPr lang="zh-CN" altLang="en-US" smtClean="0"/>
-              <a:t>2026/6/25</a:t>
+              <a:t>2026/6/26</a:t>
             </a:fld>
             <a:endParaRPr lang="de-DE" dirty="0"/>
           </a:p>
@@ -13932,13 +15816,7 @@
       </p:sp>
       <p:sp>
         <p:nvSpPr>
-          <p:cNvPr id="3" name="页脚占位符 2">
-            <a:extLst>
-              <a:ext uri="{FF2B5EF4-FFF2-40B4-BE49-F238E27FC236}">
-                <a16:creationId xmlns:a16="http://schemas.microsoft.com/office/drawing/2014/main" id="{81D1B61A-8D21-A788-33C6-F38CA584F8A8}"/>
-              </a:ext>
-            </a:extLst>
-          </p:cNvPr>
+          <p:cNvPr id="3" name="页脚占位符 2"/>
           <p:cNvSpPr>
             <a:spLocks noGrp="1"/>
           </p:cNvSpPr>
@@ -13961,13 +15839,7 @@
       </p:sp>
       <p:sp>
         <p:nvSpPr>
-          <p:cNvPr id="4" name="灯片编号占位符 3">
-            <a:extLst>
-              <a:ext uri="{FF2B5EF4-FFF2-40B4-BE49-F238E27FC236}">
-                <a16:creationId xmlns:a16="http://schemas.microsoft.com/office/drawing/2014/main" id="{49812521-888E-7EDC-B30B-A2C2CEDCAED3}"/>
-              </a:ext>
-            </a:extLst>
-          </p:cNvPr>
+          <p:cNvPr id="4" name="灯片编号占位符 3"/>
           <p:cNvSpPr>
             <a:spLocks noGrp="1"/>
           </p:cNvSpPr>
@@ -13990,13 +15862,7 @@
       </p:sp>
       <p:sp>
         <p:nvSpPr>
-          <p:cNvPr id="8" name="文本框 7">
-            <a:extLst>
-              <a:ext uri="{FF2B5EF4-FFF2-40B4-BE49-F238E27FC236}">
-                <a16:creationId xmlns:a16="http://schemas.microsoft.com/office/drawing/2014/main" id="{B253958C-EDC5-7510-56AD-7A7056EAB60D}"/>
-              </a:ext>
-            </a:extLst>
-          </p:cNvPr>
+          <p:cNvPr id="8" name="文本框 7"/>
           <p:cNvSpPr txBox="1"/>
           <p:nvPr/>
         </p:nvSpPr>
@@ -14018,11 +15884,6 @@
         </p:txBody>
       </p:sp>
     </p:spTree>
-    <p:extLst>
-      <p:ext uri="{BB962C8B-B14F-4D97-AF65-F5344CB8AC3E}">
-        <p14:creationId xmlns:p14="http://schemas.microsoft.com/office/powerpoint/2010/main" val="3124715009"/>
-      </p:ext>
-    </p:extLst>
   </p:cSld>
   <p:clrMapOvr>
     <a:masterClrMapping/>
@@ -14063,119 +15924,151 @@
           <a:lstStyle/>
           <a:p>
             <a:r>
-              <a:rPr lang="en-US" altLang="zh-CN"/>
-              <a:t>Methode</a:t>
-            </a:r>
-          </a:p>
-        </p:txBody>
-      </p:sp>
-      <mc:AlternateContent xmlns:mc="http://schemas.openxmlformats.org/markup-compatibility/2006">
-        <mc:Choice xmlns:a14="http://schemas.microsoft.com/office/drawing/2010/main" Requires="a14">
-          <p:sp>
-            <p:nvSpPr>
-              <p:cNvPr id="6" name="内容占位符 5"/>
-              <p:cNvSpPr>
-                <a:spLocks noGrp="1"/>
-              </p:cNvSpPr>
-              <p:nvPr>
-                <p:ph idx="1"/>
-              </p:nvPr>
-            </p:nvSpPr>
-            <p:spPr/>
-            <p:txBody>
-              <a:bodyPr/>
-              <a:lstStyle/>
-              <a:p>
-                <a:endParaRPr lang="en-US" altLang="zh-CN" dirty="0"/>
-              </a:p>
-              <a:p>
-                <a:endParaRPr lang="en-US" altLang="zh-CN" dirty="0"/>
-              </a:p>
-              <a:p>
-                <a:endParaRPr lang="en-US" altLang="zh-CN" dirty="0"/>
-              </a:p>
-              <a:p>
-                <a:endParaRPr lang="en-US" altLang="zh-CN" dirty="0"/>
-              </a:p>
-              <a:p>
-                <a:endParaRPr lang="en-US" altLang="zh-CN" dirty="0"/>
-              </a:p>
-              <a:p>
-                <a:r>
-                  <a:rPr lang="en-US" altLang="zh-CN" dirty="0"/>
-                  <a:t>Wenn I=</a:t>
-                </a:r>
-                <a:r>
-                  <a:rPr lang="en-US" altLang="zh-CN" i="1" dirty="0" err="1"/>
-                  <a:t>i</a:t>
-                </a:r>
-                <a:r>
-                  <a:rPr lang="en-US" altLang="zh-CN" i="1" dirty="0"/>
-                  <a:t>(0)</a:t>
-                </a:r>
-              </a:p>
-              <a:p>
-                <a:endParaRPr lang="en-US" altLang="zh-CN" i="1" dirty="0"/>
-              </a:p>
-              <a:p>
-                <a:endParaRPr lang="en-US" altLang="zh-CN" i="1" dirty="0"/>
-              </a:p>
-              <a:p>
-                <a:r>
-                  <a:rPr lang="zh-CN" altLang="zh-CN" dirty="0"/>
-                  <a:t>I und </a:t>
-                </a:r>
-                <a14:m>
-                  <m:oMath xmlns:m="http://schemas.openxmlformats.org/officeDocument/2006/math">
-                    <m:r>
-                      <a:rPr lang="zh-CN" altLang="en-US" i="1"/>
-                      <m:t>𝑉</m:t>
-                    </m:r>
-                  </m:oMath>
-                </a14:m>
-                <a:r>
-                  <a:rPr lang="zh-CN" altLang="zh-CN" dirty="0"/>
-                  <a:t>entsprechen den Werten des vorherigen Zeitschritts.</a:t>
-                </a:r>
-                <a:endParaRPr lang="zh-CN" altLang="en-US" dirty="0"/>
-              </a:p>
-            </p:txBody>
-          </p:sp>
-        </mc:Choice>
-        <mc:Fallback>
-          <p:sp>
-            <p:nvSpPr>
-              <p:cNvPr id="6" name="内容占位符 5"/>
-              <p:cNvSpPr>
-                <a:spLocks noGrp="1" noRot="1" noChangeAspect="1" noMove="1" noResize="1" noEditPoints="1" noAdjustHandles="1" noChangeArrowheads="1" noChangeShapeType="1" noTextEdit="1"/>
-              </p:cNvSpPr>
-              <p:nvPr>
-                <p:ph idx="1"/>
-              </p:nvPr>
-            </p:nvSpPr>
-            <p:spPr>
-              <a:blipFill>
-                <a:blip r:embed="rId2"/>
-                <a:stretch>
-                  <a:fillRect l="-1281"/>
-                </a:stretch>
-              </a:blipFill>
-            </p:spPr>
-            <p:txBody>
-              <a:bodyPr/>
-              <a:lstStyle/>
-              <a:p>
-                <a:r>
-                  <a:rPr lang="zh-CN" altLang="en-US">
-                    <a:noFill/>
-                  </a:rPr>
-                  <a:t> </a:t>
-                </a:r>
-              </a:p>
-            </p:txBody>
-          </p:sp>
-        </mc:Fallback>
-      </mc:AlternateContent>
+              <a:rPr lang="en-US" altLang="zh-CN" dirty="0"/>
+              <a:t>2RC Modell</a:t>
+            </a:r>
+            <a:r>
+              <a:rPr lang="en-US" altLang="zh-CN" baseline="30000" dirty="0"/>
+              <a:t>1</a:t>
+            </a:r>
+          </a:p>
+        </p:txBody>
+      </p:sp>
+      <p:sp>
+        <p:nvSpPr>
+          <p:cNvPr id="6" name="内容占位符 5"/>
+          <p:cNvSpPr>
+            <a:spLocks noGrp="1"/>
+          </p:cNvSpPr>
+          <p:nvPr>
+            <p:ph idx="1"/>
+          </p:nvPr>
+        </p:nvSpPr>
+        <p:spPr/>
+        <p:txBody>
+          <a:bodyPr/>
+          <a:lstStyle/>
+          <a:p>
+            <a:endParaRPr lang="en-US" altLang="zh-CN" dirty="0"/>
+          </a:p>
+          <a:p>
+            <a:endParaRPr lang="en-US" altLang="zh-CN" dirty="0"/>
+          </a:p>
+          <a:p>
+            <a:endParaRPr lang="en-US" altLang="zh-CN" dirty="0"/>
+          </a:p>
+          <a:p>
+            <a:endParaRPr lang="en-US" altLang="zh-CN" dirty="0"/>
+          </a:p>
+          <a:p>
+            <a:r>
+              <a:rPr lang="en-US" altLang="zh-CN" dirty="0"/>
+              <a:t>U1:Spannung von </a:t>
+            </a:r>
+            <a:r>
+              <a:rPr lang="en-US" altLang="zh-CN" dirty="0" err="1"/>
+              <a:t>Aktivierungsdepolarisation</a:t>
+            </a:r>
+            <a:endParaRPr lang="en-US" altLang="zh-CN" dirty="0"/>
+          </a:p>
+          <a:p>
+            <a:pPr lvl="1"/>
+            <a:r>
+              <a:rPr lang="en-US" altLang="zh-CN" dirty="0" err="1"/>
+              <a:t>Ladungstransfer</a:t>
+            </a:r>
+            <a:r>
+              <a:rPr lang="en-US" altLang="zh-CN" dirty="0"/>
+              <a:t> an </a:t>
+            </a:r>
+            <a:r>
+              <a:rPr lang="en-US" altLang="zh-CN" dirty="0" err="1"/>
+              <a:t>Elektrodenoberfl</a:t>
+            </a:r>
+            <a:r>
+              <a:rPr lang="de-DE" altLang="zh-CN" dirty="0" err="1"/>
+              <a:t>äche</a:t>
+            </a:r>
+            <a:endParaRPr lang="en-US" altLang="zh-CN" dirty="0"/>
+          </a:p>
+          <a:p>
+            <a:r>
+              <a:rPr lang="en-US" altLang="zh-CN" dirty="0"/>
+              <a:t>U2: </a:t>
+            </a:r>
+            <a:r>
+              <a:rPr lang="en-US" altLang="zh-CN" dirty="0" err="1"/>
+              <a:t>Spannung</a:t>
+            </a:r>
+            <a:r>
+              <a:rPr lang="en-US" altLang="zh-CN" dirty="0"/>
+              <a:t> von </a:t>
+            </a:r>
+            <a:r>
+              <a:rPr lang="en-US" altLang="zh-CN" dirty="0" err="1"/>
+              <a:t>Konzentrationsdepolarisation</a:t>
+            </a:r>
+            <a:endParaRPr lang="en-US" altLang="zh-CN" dirty="0"/>
+          </a:p>
+          <a:p>
+            <a:pPr lvl="1"/>
+            <a:r>
+              <a:rPr lang="en-US" altLang="zh-CN" dirty="0"/>
+              <a:t>Li-</a:t>
+            </a:r>
+            <a:r>
+              <a:rPr lang="en-US" altLang="zh-CN" dirty="0" err="1"/>
+              <a:t>Ionen</a:t>
+            </a:r>
+            <a:r>
+              <a:rPr lang="en-US" altLang="zh-CN" dirty="0"/>
+              <a:t>-Diffusion </a:t>
+            </a:r>
+            <a:r>
+              <a:rPr lang="en-US" altLang="zh-CN" dirty="0" err="1"/>
+              <a:t>im</a:t>
+            </a:r>
+            <a:r>
+              <a:rPr lang="en-US" altLang="zh-CN" dirty="0"/>
+              <a:t> </a:t>
+            </a:r>
+            <a:r>
+              <a:rPr lang="en-US" altLang="zh-CN" dirty="0" err="1"/>
+              <a:t>Aktivmatrial</a:t>
+            </a:r>
+            <a:endParaRPr lang="en-US" altLang="zh-CN" dirty="0"/>
+          </a:p>
+          <a:p>
+            <a:r>
+              <a:rPr lang="en-US" altLang="zh-CN" dirty="0"/>
+              <a:t>Ʈ1(</a:t>
+            </a:r>
+            <a:r>
+              <a:rPr lang="en-US" altLang="zh-CN" dirty="0" err="1"/>
+              <a:t>Aktivierung</a:t>
+            </a:r>
+            <a:r>
+              <a:rPr lang="en-US" altLang="zh-CN" dirty="0"/>
+              <a:t>)&lt;Ʈ2(</a:t>
+            </a:r>
+            <a:r>
+              <a:rPr lang="en-US" altLang="zh-CN" dirty="0" err="1"/>
+              <a:t>Konzentration</a:t>
+            </a:r>
+            <a:r>
+              <a:rPr lang="en-US" altLang="zh-CN" dirty="0"/>
+              <a:t>/ Diffusion)</a:t>
+            </a:r>
+            <a:endParaRPr lang="zh-CN" altLang="en-US" dirty="0"/>
+          </a:p>
+          <a:p>
+            <a:endParaRPr lang="zh-CN" altLang="en-US" dirty="0"/>
+          </a:p>
+          <a:p>
+            <a:endParaRPr lang="en-US" altLang="zh-CN" dirty="0"/>
+          </a:p>
+        </p:txBody>
+      </p:sp>
       <p:sp>
         <p:nvSpPr>
           <p:cNvPr id="2" name="日期占位符 1"/>
@@ -14193,7 +16086,7 @@
           <a:p>
             <a:fld id="{D35072EC-9367-4D7B-8652-6A082F0A7E89}" type="datetime5">
               <a:rPr lang="zh-CN" altLang="en-US" smtClean="0"/>
-              <a:t>2026/6/25</a:t>
+              <a:t>2026/6/26</a:t>
             </a:fld>
             <a:endParaRPr lang="de-DE" dirty="0"/>
           </a:p>
@@ -14245,30 +16138,6 @@
           </a:p>
         </p:txBody>
       </p:sp>
-      <p:pic>
-        <p:nvPicPr>
-          <p:cNvPr id="7" name="图片 6"/>
-          <p:cNvPicPr>
-            <a:picLocks noChangeAspect="1"/>
-          </p:cNvPicPr>
-          <p:nvPr/>
-        </p:nvPicPr>
-        <p:blipFill>
-          <a:blip r:embed="rId3"/>
-          <a:stretch>
-            <a:fillRect/>
-          </a:stretch>
-        </p:blipFill>
-        <p:spPr>
-          <a:xfrm>
-            <a:off x="8728686" y="3322321"/>
-            <a:ext cx="2831126" cy="2316480"/>
-          </a:xfrm>
-          <a:prstGeom prst="rect">
-            <a:avLst/>
-          </a:prstGeom>
-        </p:spPr>
-      </p:pic>
       <p:pic>
         <p:nvPicPr>
           <p:cNvPr id="8" name="图片 7"/>
@@ -14278,14 +16147,14 @@
           <p:nvPr/>
         </p:nvPicPr>
         <p:blipFill>
-          <a:blip r:embed="rId4"/>
+          <a:blip r:embed="rId2"/>
           <a:stretch>
             <a:fillRect/>
           </a:stretch>
         </p:blipFill>
         <p:spPr>
           <a:xfrm>
-            <a:off x="7928589" y="1220053"/>
+            <a:off x="6027218" y="1151999"/>
             <a:ext cx="3631223" cy="1428024"/>
           </a:xfrm>
           <a:prstGeom prst="rect">
@@ -14295,23 +16164,11 @@
       </p:pic>
       <p:graphicFrame>
         <p:nvGraphicFramePr>
-          <p:cNvPr id="9" name="对象 8">
-            <a:extLst>
-              <a:ext uri="{FF2B5EF4-FFF2-40B4-BE49-F238E27FC236}">
-                <a16:creationId xmlns:a16="http://schemas.microsoft.com/office/drawing/2014/main" id="{80B51F5D-9183-9BF6-037C-A20EF1925246}"/>
-              </a:ext>
-            </a:extLst>
-          </p:cNvPr>
+          <p:cNvPr id="9" name="对象 8"/>
           <p:cNvGraphicFramePr>
             <a:graphicFrameLocks noChangeAspect="1"/>
           </p:cNvGraphicFramePr>
-          <p:nvPr>
-            <p:extLst>
-              <p:ext uri="{D42A27DB-BD31-4B8C-83A1-F6EECF244321}">
-                <p14:modId xmlns:p14="http://schemas.microsoft.com/office/powerpoint/2010/main" val="3379017737"/>
-              </p:ext>
-            </p:extLst>
-          </p:nvPr>
+          <p:nvPr/>
         </p:nvGraphicFramePr>
         <p:xfrm>
           <a:off x="383858" y="832448"/>
@@ -14321,21 +16178,21 @@
           <a:graphicData uri="http://schemas.openxmlformats.org/presentationml/2006/ole">
             <mc:AlternateContent xmlns:mc="http://schemas.openxmlformats.org/markup-compatibility/2006">
               <mc:Choice xmlns:v="urn:schemas-microsoft-com:vml" Requires="v">
-                <p:oleObj name="Equation" r:id="rId5" imgW="2171682" imgH="228608" progId="Equation.DSMT4">
+                <p:oleObj name="Equation" r:id="rId3" imgW="2172970" imgH="229870" progId="Equation.DSMT4">
                   <p:embed/>
                 </p:oleObj>
               </mc:Choice>
               <mc:Fallback>
-                <p:oleObj name="Equation" r:id="rId5" imgW="2171682" imgH="228608" progId="Equation.DSMT4">
+                <p:oleObj name="Equation" r:id="rId3" imgW="2172970" imgH="229870" progId="Equation.DSMT4">
                   <p:embed/>
                   <p:pic>
                     <p:nvPicPr>
-                      <p:cNvPr id="0" name=""/>
+                      <p:cNvPr id="0" name="图片 9"/>
                       <p:cNvPicPr/>
                       <p:nvPr/>
                     </p:nvPicPr>
                     <p:blipFill>
-                      <a:blip r:embed="rId6"/>
+                      <a:blip r:embed="rId4"/>
                       <a:stretch>
                         <a:fillRect/>
                       </a:stretch>
@@ -14358,23 +16215,11 @@
       </p:graphicFrame>
       <p:graphicFrame>
         <p:nvGraphicFramePr>
-          <p:cNvPr id="10" name="对象 9">
-            <a:extLst>
-              <a:ext uri="{FF2B5EF4-FFF2-40B4-BE49-F238E27FC236}">
-                <a16:creationId xmlns:a16="http://schemas.microsoft.com/office/drawing/2014/main" id="{96461DB3-C0B9-27AA-B208-2308148D993E}"/>
-              </a:ext>
-            </a:extLst>
-          </p:cNvPr>
+          <p:cNvPr id="11" name="对象 10"/>
           <p:cNvGraphicFramePr>
             <a:graphicFrameLocks noChangeAspect="1"/>
           </p:cNvGraphicFramePr>
-          <p:nvPr>
-            <p:extLst>
-              <p:ext uri="{D42A27DB-BD31-4B8C-83A1-F6EECF244321}">
-                <p14:modId xmlns:p14="http://schemas.microsoft.com/office/powerpoint/2010/main" val="3849335899"/>
-              </p:ext>
-            </p:extLst>
-          </p:nvPr>
+          <p:nvPr/>
         </p:nvGraphicFramePr>
         <p:xfrm>
           <a:off x="414780" y="1384003"/>
@@ -14384,21 +16229,21 @@
           <a:graphicData uri="http://schemas.openxmlformats.org/presentationml/2006/ole">
             <mc:AlternateContent xmlns:mc="http://schemas.openxmlformats.org/markup-compatibility/2006">
               <mc:Choice xmlns:v="urn:schemas-microsoft-com:vml" Requires="v">
-                <p:oleObj name="Equation" r:id="rId7" imgW="1041120" imgH="736560" progId="Equation.DSMT4">
+                <p:oleObj name="Equation" r:id="rId5" imgW="24993600" imgH="17678400" progId="Equation.DSMT4">
                   <p:embed/>
                 </p:oleObj>
               </mc:Choice>
               <mc:Fallback>
-                <p:oleObj name="Equation" r:id="rId7" imgW="1041120" imgH="736560" progId="Equation.DSMT4">
+                <p:oleObj name="Equation" r:id="rId5" imgW="24993600" imgH="17678400" progId="Equation.DSMT4">
                   <p:embed/>
                   <p:pic>
                     <p:nvPicPr>
-                      <p:cNvPr id="0" name=""/>
+                      <p:cNvPr id="0" name="图片 11"/>
                       <p:cNvPicPr/>
                       <p:nvPr/>
                     </p:nvPicPr>
                     <p:blipFill>
-                      <a:blip r:embed="rId8"/>
+                      <a:blip r:embed="rId6"/>
                       <a:stretch>
                         <a:fillRect/>
                       </a:stretch>
@@ -14407,132 +16252,6 @@
                       <a:xfrm>
                         <a:off x="414780" y="1384003"/>
                         <a:ext cx="1657180" cy="1172152"/>
-                      </a:xfrm>
-                      <a:prstGeom prst="rect">
-                        <a:avLst/>
-                      </a:prstGeom>
-                    </p:spPr>
-                  </p:pic>
-                </p:oleObj>
-              </mc:Fallback>
-            </mc:AlternateContent>
-          </a:graphicData>
-        </a:graphic>
-      </p:graphicFrame>
-      <p:graphicFrame>
-        <p:nvGraphicFramePr>
-          <p:cNvPr id="11" name="对象 10">
-            <a:extLst>
-              <a:ext uri="{FF2B5EF4-FFF2-40B4-BE49-F238E27FC236}">
-                <a16:creationId xmlns:a16="http://schemas.microsoft.com/office/drawing/2014/main" id="{97ED2A34-E789-2A6F-051A-29F81D5A7DB1}"/>
-              </a:ext>
-            </a:extLst>
-          </p:cNvPr>
-          <p:cNvGraphicFramePr>
-            <a:graphicFrameLocks noChangeAspect="1"/>
-          </p:cNvGraphicFramePr>
-          <p:nvPr>
-            <p:extLst>
-              <p:ext uri="{D42A27DB-BD31-4B8C-83A1-F6EECF244321}">
-                <p14:modId xmlns:p14="http://schemas.microsoft.com/office/powerpoint/2010/main" val="2141626539"/>
-              </p:ext>
-            </p:extLst>
-          </p:nvPr>
-        </p:nvGraphicFramePr>
-        <p:xfrm>
-          <a:off x="383858" y="3132753"/>
-          <a:ext cx="4273534" cy="769767"/>
-        </p:xfrm>
-        <a:graphic>
-          <a:graphicData uri="http://schemas.openxmlformats.org/presentationml/2006/ole">
-            <mc:AlternateContent xmlns:mc="http://schemas.openxmlformats.org/markup-compatibility/2006">
-              <mc:Choice xmlns:v="urn:schemas-microsoft-com:vml" Requires="v">
-                <p:oleObj name="Equation" r:id="rId9" imgW="2044440" imgH="368280" progId="Equation.DSMT4">
-                  <p:embed/>
-                </p:oleObj>
-              </mc:Choice>
-              <mc:Fallback>
-                <p:oleObj name="Equation" r:id="rId9" imgW="2044440" imgH="368280" progId="Equation.DSMT4">
-                  <p:embed/>
-                  <p:pic>
-                    <p:nvPicPr>
-                      <p:cNvPr id="0" name=""/>
-                      <p:cNvPicPr/>
-                      <p:nvPr/>
-                    </p:nvPicPr>
-                    <p:blipFill>
-                      <a:blip r:embed="rId10"/>
-                      <a:stretch>
-                        <a:fillRect/>
-                      </a:stretch>
-                    </p:blipFill>
-                    <p:spPr>
-                      <a:xfrm>
-                        <a:off x="383858" y="3132753"/>
-                        <a:ext cx="4273534" cy="769767"/>
-                      </a:xfrm>
-                      <a:prstGeom prst="rect">
-                        <a:avLst/>
-                      </a:prstGeom>
-                    </p:spPr>
-                  </p:pic>
-                </p:oleObj>
-              </mc:Fallback>
-            </mc:AlternateContent>
-          </a:graphicData>
-        </a:graphic>
-      </p:graphicFrame>
-      <p:graphicFrame>
-        <p:nvGraphicFramePr>
-          <p:cNvPr id="12" name="对象 11">
-            <a:extLst>
-              <a:ext uri="{FF2B5EF4-FFF2-40B4-BE49-F238E27FC236}">
-                <a16:creationId xmlns:a16="http://schemas.microsoft.com/office/drawing/2014/main" id="{B2B2D3F8-7218-7B6E-F00C-DDF4732CD6B3}"/>
-              </a:ext>
-            </a:extLst>
-          </p:cNvPr>
-          <p:cNvGraphicFramePr>
-            <a:graphicFrameLocks noChangeAspect="1"/>
-          </p:cNvGraphicFramePr>
-          <p:nvPr>
-            <p:extLst>
-              <p:ext uri="{D42A27DB-BD31-4B8C-83A1-F6EECF244321}">
-                <p14:modId xmlns:p14="http://schemas.microsoft.com/office/powerpoint/2010/main" val="2839005289"/>
-              </p:ext>
-            </p:extLst>
-          </p:nvPr>
-        </p:nvGraphicFramePr>
-        <p:xfrm>
-          <a:off x="383858" y="4508014"/>
-          <a:ext cx="3146989" cy="769767"/>
-        </p:xfrm>
-        <a:graphic>
-          <a:graphicData uri="http://schemas.openxmlformats.org/presentationml/2006/ole">
-            <mc:AlternateContent xmlns:mc="http://schemas.openxmlformats.org/markup-compatibility/2006">
-              <mc:Choice xmlns:v="urn:schemas-microsoft-com:vml" Requires="v">
-                <p:oleObj name="Equation" r:id="rId11" imgW="1765080" imgH="431640" progId="Equation.DSMT4">
-                  <p:embed/>
-                </p:oleObj>
-              </mc:Choice>
-              <mc:Fallback>
-                <p:oleObj name="Equation" r:id="rId11" imgW="1765080" imgH="431640" progId="Equation.DSMT4">
-                  <p:embed/>
-                  <p:pic>
-                    <p:nvPicPr>
-                      <p:cNvPr id="0" name=""/>
-                      <p:cNvPicPr/>
-                      <p:nvPr/>
-                    </p:nvPicPr>
-                    <p:blipFill>
-                      <a:blip r:embed="rId12"/>
-                      <a:stretch>
-                        <a:fillRect/>
-                      </a:stretch>
-                    </p:blipFill>
-                    <p:spPr>
-                      <a:xfrm>
-                        <a:off x="383858" y="4508014"/>
-                        <a:ext cx="3146989" cy="769767"/>
                       </a:xfrm>
                       <a:prstGeom prst="rect">
                         <a:avLst/>
@@ -14558,13 +16277,7 @@
   <p:cSld>
     <p:spTree>
       <p:nvGrpSpPr>
-        <p:cNvPr id="1" name="">
-          <a:extLst>
-            <a:ext uri="{FF2B5EF4-FFF2-40B4-BE49-F238E27FC236}">
-              <a16:creationId xmlns:a16="http://schemas.microsoft.com/office/drawing/2014/main" id="{5E4AA122-B0A4-E371-A30D-5835E9A84891}"/>
-            </a:ext>
-          </a:extLst>
-        </p:cNvPr>
+        <p:cNvPr id="1" name=""/>
         <p:cNvGrpSpPr/>
         <p:nvPr/>
       </p:nvGrpSpPr>
@@ -14578,10 +16291,10 @@
       </p:grpSpPr>
       <p:sp>
         <p:nvSpPr>
-          <p:cNvPr id="5" name="标题 4">
+          <p:cNvPr id="2" name="标题 1">
             <a:extLst>
               <a:ext uri="{FF2B5EF4-FFF2-40B4-BE49-F238E27FC236}">
-                <a16:creationId xmlns:a16="http://schemas.microsoft.com/office/drawing/2014/main" id="{8EFE5EAE-B4F4-4D59-B19A-944936507452}"/>
+                <a16:creationId xmlns:a16="http://schemas.microsoft.com/office/drawing/2014/main" id="{113E0EDC-BA02-7F15-EB4B-7CFB27D93A05}"/>
               </a:ext>
             </a:extLst>
           </p:cNvPr>
@@ -14598,19 +16311,23 @@
           <a:lstStyle/>
           <a:p>
             <a:r>
-              <a:rPr lang="en-US" altLang="zh-CN" dirty="0" err="1"/>
-              <a:t>Gliederung</a:t>
-            </a:r>
-            <a:endParaRPr lang="en-US" altLang="zh-CN" dirty="0"/>
-          </a:p>
-        </p:txBody>
-      </p:sp>
-      <p:sp>
-        <p:nvSpPr>
-          <p:cNvPr id="6" name="内容占位符 5">
+              <a:rPr lang="de-DE" altLang="zh-CN" dirty="0"/>
+              <a:t>Kapazitätsrückgewinnung während Ruhephasen</a:t>
+            </a:r>
+            <a:r>
+              <a:rPr lang="de-DE" altLang="zh-CN" baseline="30000" dirty="0"/>
+              <a:t>2</a:t>
+            </a:r>
+            <a:endParaRPr lang="zh-CN" altLang="en-US" baseline="30000" dirty="0"/>
+          </a:p>
+        </p:txBody>
+      </p:sp>
+      <p:sp>
+        <p:nvSpPr>
+          <p:cNvPr id="3" name="内容占位符 2">
             <a:extLst>
               <a:ext uri="{FF2B5EF4-FFF2-40B4-BE49-F238E27FC236}">
-                <a16:creationId xmlns:a16="http://schemas.microsoft.com/office/drawing/2014/main" id="{44FF92E2-7C5D-1821-31FE-6E18768B0633}"/>
+                <a16:creationId xmlns:a16="http://schemas.microsoft.com/office/drawing/2014/main" id="{E1995594-8440-259F-25BC-C5ABFCDBBF29}"/>
               </a:ext>
             </a:extLst>
           </p:cNvPr>
@@ -14627,147 +16344,90 @@
           <a:lstStyle/>
           <a:p>
             <a:r>
-              <a:rPr lang="en-US" altLang="zh-CN" sz="4800" b="1" spc="50" dirty="0">
-                <a:ln w="0"/>
-                <a:solidFill>
-                  <a:srgbClr val="90BBE7"/>
-                </a:solidFill>
-                <a:effectLst>
-                  <a:innerShdw blurRad="63500" dist="50800" dir="13500000">
-                    <a:srgbClr val="000000">
-                      <a:alpha val="50000"/>
-                    </a:srgbClr>
-                  </a:innerShdw>
-                </a:effectLst>
-              </a:rPr>
-              <a:t>Motivation</a:t>
-            </a:r>
-          </a:p>
-          <a:p>
-            <a:r>
-              <a:rPr lang="en-US" altLang="zh-CN" sz="4800" b="1" spc="50" dirty="0" err="1">
-                <a:ln w="0"/>
-                <a:solidFill>
-                  <a:srgbClr val="90BBE7"/>
-                </a:solidFill>
-                <a:effectLst>
-                  <a:innerShdw blurRad="63500" dist="50800" dir="13500000">
-                    <a:srgbClr val="000000">
-                      <a:alpha val="50000"/>
-                    </a:srgbClr>
-                  </a:innerShdw>
-                </a:effectLst>
-              </a:rPr>
-              <a:t>Zeitplan</a:t>
-            </a:r>
-            <a:endParaRPr lang="en-US" altLang="zh-CN" sz="4800" b="1" spc="50" dirty="0">
-              <a:ln w="0"/>
-              <a:solidFill>
-                <a:srgbClr val="90BBE7"/>
-              </a:solidFill>
-              <a:effectLst>
-                <a:innerShdw blurRad="63500" dist="50800" dir="13500000">
-                  <a:srgbClr val="000000">
-                    <a:alpha val="50000"/>
-                  </a:srgbClr>
-                </a:innerShdw>
-              </a:effectLst>
-            </a:endParaRPr>
-          </a:p>
-          <a:p>
-            <a:r>
-              <a:rPr lang="en-US" altLang="zh-CN" sz="4800" b="1" spc="50" dirty="0">
-                <a:ln w="0"/>
-                <a:solidFill>
-                  <a:srgbClr val="90BBE7"/>
-                </a:solidFill>
-                <a:effectLst>
-                  <a:innerShdw blurRad="63500" dist="50800" dir="13500000">
-                    <a:srgbClr val="000000">
-                      <a:alpha val="50000"/>
-                    </a:srgbClr>
-                  </a:innerShdw>
-                </a:effectLst>
-              </a:rPr>
-              <a:t>Methode</a:t>
-            </a:r>
-          </a:p>
-          <a:p>
-            <a:r>
-              <a:rPr lang="en-US" altLang="zh-CN" sz="4800" b="1" spc="50" dirty="0" err="1">
-                <a:ln w="0"/>
-                <a:solidFill>
-                  <a:srgbClr val="275AAD"/>
-                </a:solidFill>
-                <a:effectLst>
-                  <a:innerShdw blurRad="63500" dist="50800" dir="13500000">
-                    <a:srgbClr val="000000">
-                      <a:alpha val="50000"/>
-                    </a:srgbClr>
-                  </a:innerShdw>
-                </a:effectLst>
-              </a:rPr>
-              <a:t>Aktuelle</a:t>
-            </a:r>
-            <a:r>
-              <a:rPr lang="en-US" altLang="zh-CN" sz="4800" b="1" spc="50" dirty="0">
-                <a:ln w="0"/>
-                <a:solidFill>
-                  <a:srgbClr val="275AAD"/>
-                </a:solidFill>
-                <a:effectLst>
-                  <a:innerShdw blurRad="63500" dist="50800" dir="13500000">
-                    <a:srgbClr val="000000">
-                      <a:alpha val="50000"/>
-                    </a:srgbClr>
-                  </a:innerShdw>
-                </a:effectLst>
-              </a:rPr>
-              <a:t> Arbeit</a:t>
-            </a:r>
-          </a:p>
-          <a:p>
-            <a:r>
-              <a:rPr lang="en-US" altLang="zh-CN" sz="4800" b="1" spc="50" dirty="0" err="1">
-                <a:ln w="0"/>
-                <a:solidFill>
-                  <a:srgbClr val="90BBE7"/>
-                </a:solidFill>
-                <a:effectLst>
-                  <a:innerShdw blurRad="63500" dist="50800" dir="13500000">
-                    <a:srgbClr val="000000">
-                      <a:alpha val="50000"/>
-                    </a:srgbClr>
-                  </a:innerShdw>
-                </a:effectLst>
-              </a:rPr>
-              <a:t>Weitere</a:t>
-            </a:r>
-            <a:r>
-              <a:rPr lang="en-US" altLang="zh-CN" sz="4800" b="1" spc="50" dirty="0">
-                <a:ln w="0"/>
-                <a:solidFill>
-                  <a:srgbClr val="90BBE7"/>
-                </a:solidFill>
-                <a:effectLst>
-                  <a:innerShdw blurRad="63500" dist="50800" dir="13500000">
-                    <a:srgbClr val="000000">
-                      <a:alpha val="50000"/>
-                    </a:srgbClr>
-                  </a:innerShdw>
-                </a:effectLst>
-              </a:rPr>
-              <a:t> Arbeit</a:t>
-            </a:r>
-          </a:p>
-        </p:txBody>
-      </p:sp>
-      <p:sp>
-        <p:nvSpPr>
-          <p:cNvPr id="2" name="日期占位符 1">
+              <a:rPr lang="de-DE" altLang="zh-CN" dirty="0"/>
+              <a:t>Lithium </a:t>
+            </a:r>
+            <a:r>
+              <a:rPr lang="de-DE" altLang="zh-CN" dirty="0" err="1"/>
+              <a:t>Plating</a:t>
+            </a:r>
+            <a:r>
+              <a:rPr lang="de-DE" altLang="zh-CN" dirty="0"/>
+              <a:t> als wahrscheinliche Ursache</a:t>
+            </a:r>
+          </a:p>
+          <a:p>
+            <a:r>
+              <a:rPr lang="de-DE" altLang="zh-CN" dirty="0"/>
+              <a:t>Ruhephase</a:t>
+            </a:r>
+            <a:r>
+              <a:rPr lang="en-US" altLang="zh-CN" dirty="0"/>
+              <a:t>: </a:t>
+            </a:r>
+            <a:r>
+              <a:rPr lang="en-US" altLang="zh-CN" dirty="0" err="1"/>
+              <a:t>partielle</a:t>
+            </a:r>
+            <a:r>
+              <a:rPr lang="en-US" altLang="zh-CN" dirty="0"/>
+              <a:t> </a:t>
+            </a:r>
+            <a:r>
+              <a:rPr lang="en-US" altLang="zh-CN" dirty="0" err="1"/>
+              <a:t>Reaktivierung</a:t>
+            </a:r>
+            <a:r>
+              <a:rPr lang="en-US" altLang="zh-CN" dirty="0"/>
+              <a:t> von </a:t>
+            </a:r>
+            <a:r>
+              <a:rPr lang="en-US" altLang="zh-CN" dirty="0" err="1"/>
+              <a:t>immobilisiertem</a:t>
+            </a:r>
+            <a:r>
+              <a:rPr lang="en-US" altLang="zh-CN" dirty="0"/>
+              <a:t> </a:t>
+            </a:r>
+            <a:r>
+              <a:rPr lang="en-US" altLang="zh-CN" dirty="0" err="1"/>
+              <a:t>Lithim</a:t>
+            </a:r>
+            <a:endParaRPr lang="en-US" altLang="zh-CN" dirty="0"/>
+          </a:p>
+          <a:p>
+            <a:r>
+              <a:rPr lang="en-US" altLang="zh-CN" dirty="0"/>
+              <a:t>2 Tage Ruhe: ca. 40%reversible </a:t>
+            </a:r>
+            <a:r>
+              <a:rPr lang="en-US" altLang="zh-CN" dirty="0" err="1"/>
+              <a:t>Verlust</a:t>
+            </a:r>
+            <a:r>
+              <a:rPr lang="en-US" altLang="zh-CN" dirty="0"/>
+              <a:t> </a:t>
+            </a:r>
+            <a:r>
+              <a:rPr lang="en-US" altLang="zh-CN" dirty="0" err="1"/>
+              <a:t>zu</a:t>
+            </a:r>
+            <a:r>
+              <a:rPr lang="de-DE" altLang="zh-CN" dirty="0"/>
+              <a:t>rückgewonnen</a:t>
+            </a:r>
+          </a:p>
+          <a:p>
+            <a:endParaRPr lang="zh-CN" altLang="en-US" dirty="0"/>
+          </a:p>
+        </p:txBody>
+      </p:sp>
+      <p:sp>
+        <p:nvSpPr>
+          <p:cNvPr id="4" name="日期占位符 3">
             <a:extLst>
               <a:ext uri="{FF2B5EF4-FFF2-40B4-BE49-F238E27FC236}">
-                <a16:creationId xmlns:a16="http://schemas.microsoft.com/office/drawing/2014/main" id="{0AB6609D-A694-E021-2D72-289A1D9876E7}"/>
+                <a16:creationId xmlns:a16="http://schemas.microsoft.com/office/drawing/2014/main" id="{BA7E3CD1-8D4E-8DCA-89D2-D1AA476CBD59}"/>
               </a:ext>
             </a:extLst>
           </p:cNvPr>
@@ -14783,9 +16443,10 @@
           <a:bodyPr/>
           <a:lstStyle/>
           <a:p>
-            <a:fld id="{D35072EC-9367-4D7B-8652-6A082F0A7E89}" type="datetime5">
+            <a:pPr algn="l"/>
+            <a:fld id="{F887C18F-21B2-48B8-9586-9343C0AE58EE}" type="datetime5">
               <a:rPr lang="zh-CN" altLang="en-US" smtClean="0"/>
-              <a:t>2026/6/25</a:t>
+              <a:t>2026/6/26</a:t>
             </a:fld>
             <a:endParaRPr lang="de-DE" dirty="0"/>
           </a:p>
@@ -14793,10 +16454,10 @@
       </p:sp>
       <p:sp>
         <p:nvSpPr>
-          <p:cNvPr id="3" name="页脚占位符 2">
+          <p:cNvPr id="5" name="页脚占位符 4">
             <a:extLst>
               <a:ext uri="{FF2B5EF4-FFF2-40B4-BE49-F238E27FC236}">
-                <a16:creationId xmlns:a16="http://schemas.microsoft.com/office/drawing/2014/main" id="{4394E476-F6D2-C530-9D8E-7A1C8A94DF84}"/>
+                <a16:creationId xmlns:a16="http://schemas.microsoft.com/office/drawing/2014/main" id="{E8D55843-3BB7-39C7-91B5-213D9B310252}"/>
               </a:ext>
             </a:extLst>
           </p:cNvPr>
@@ -14822,10 +16483,10 @@
       </p:sp>
       <p:sp>
         <p:nvSpPr>
-          <p:cNvPr id="4" name="灯片编号占位符 3">
+          <p:cNvPr id="6" name="灯片编号占位符 5">
             <a:extLst>
               <a:ext uri="{FF2B5EF4-FFF2-40B4-BE49-F238E27FC236}">
-                <a16:creationId xmlns:a16="http://schemas.microsoft.com/office/drawing/2014/main" id="{E1252040-3DB3-FAB5-BB3F-C6D8FB162D3F}"/>
+                <a16:creationId xmlns:a16="http://schemas.microsoft.com/office/drawing/2014/main" id="{FB27361A-28EF-3455-7405-4288607EB100}"/>
               </a:ext>
             </a:extLst>
           </p:cNvPr>
@@ -14849,39 +16510,46 @@
           </a:p>
         </p:txBody>
       </p:sp>
-      <p:sp>
-        <p:nvSpPr>
-          <p:cNvPr id="8" name="文本框 7">
+      <p:pic>
+        <p:nvPicPr>
+          <p:cNvPr id="11" name="图片 10">
             <a:extLst>
               <a:ext uri="{FF2B5EF4-FFF2-40B4-BE49-F238E27FC236}">
-                <a16:creationId xmlns:a16="http://schemas.microsoft.com/office/drawing/2014/main" id="{B2639F03-FE08-C5B7-C335-D60042EEB530}"/>
+                <a16:creationId xmlns:a16="http://schemas.microsoft.com/office/drawing/2014/main" id="{BEE30925-EE32-5BBC-0468-069C914F3506}"/>
               </a:ext>
             </a:extLst>
           </p:cNvPr>
-          <p:cNvSpPr txBox="1"/>
+          <p:cNvPicPr>
+            <a:picLocks noChangeAspect="1"/>
+          </p:cNvPicPr>
           <p:nvPr/>
-        </p:nvSpPr>
+        </p:nvPicPr>
+        <p:blipFill>
+          <a:blip r:embed="rId2" cstate="print">
+            <a:extLst>
+              <a:ext uri="{28A0092B-C50C-407E-A947-70E740481C1C}">
+                <a14:useLocalDpi xmlns:a14="http://schemas.microsoft.com/office/drawing/2010/main" val="0"/>
+              </a:ext>
+            </a:extLst>
+          </a:blip>
+          <a:stretch>
+            <a:fillRect/>
+          </a:stretch>
+        </p:blipFill>
         <p:spPr>
           <a:xfrm>
-            <a:off x="3555047" y="2859088"/>
-            <a:ext cx="5080000" cy="635000"/>
+            <a:off x="383950" y="2693313"/>
+            <a:ext cx="5334000" cy="3429000"/>
           </a:xfrm>
           <a:prstGeom prst="rect">
             <a:avLst/>
           </a:prstGeom>
         </p:spPr>
-        <p:txBody>
-          <a:bodyPr/>
-          <a:lstStyle/>
-          <a:p>
-            <a:endParaRPr sz="1600"/>
-          </a:p>
-        </p:txBody>
-      </p:sp>
+      </p:pic>
     </p:spTree>
     <p:extLst>
       <p:ext uri="{BB962C8B-B14F-4D97-AF65-F5344CB8AC3E}">
-        <p14:creationId xmlns:p14="http://schemas.microsoft.com/office/powerpoint/2010/main" val="1095174001"/>
+        <p14:creationId xmlns:p14="http://schemas.microsoft.com/office/powerpoint/2010/main" val="510032915"/>
       </p:ext>
     </p:extLst>
   </p:cSld>

--- a/Literature Review/KW09/09.07.2026.pptx
+++ b/Literature Review/KW09/09.07.2026.pptx
@@ -6,10 +6,10 @@
     <p:sldMasterId id="2147483656" r:id="rId2"/>
   </p:sldMasterIdLst>
   <p:notesMasterIdLst>
-    <p:notesMasterId r:id="rId20"/>
+    <p:notesMasterId r:id="rId21"/>
   </p:notesMasterIdLst>
   <p:handoutMasterIdLst>
-    <p:handoutMasterId r:id="rId21"/>
+    <p:handoutMasterId r:id="rId22"/>
   </p:handoutMasterIdLst>
   <p:sldIdLst>
     <p:sldId id="285" r:id="rId3"/>
@@ -18,22 +18,23 @@
     <p:sldId id="315" r:id="rId6"/>
     <p:sldId id="320" r:id="rId7"/>
     <p:sldId id="318" r:id="rId8"/>
-    <p:sldId id="321" r:id="rId9"/>
-    <p:sldId id="316" r:id="rId10"/>
-    <p:sldId id="325" r:id="rId11"/>
-    <p:sldId id="329" r:id="rId12"/>
-    <p:sldId id="322" r:id="rId13"/>
-    <p:sldId id="328" r:id="rId14"/>
-    <p:sldId id="324" r:id="rId15"/>
-    <p:sldId id="323" r:id="rId16"/>
-    <p:sldId id="326" r:id="rId17"/>
-    <p:sldId id="327" r:id="rId18"/>
-    <p:sldId id="313" r:id="rId19"/>
+    <p:sldId id="331" r:id="rId9"/>
+    <p:sldId id="321" r:id="rId10"/>
+    <p:sldId id="316" r:id="rId11"/>
+    <p:sldId id="325" r:id="rId12"/>
+    <p:sldId id="329" r:id="rId13"/>
+    <p:sldId id="322" r:id="rId14"/>
+    <p:sldId id="328" r:id="rId15"/>
+    <p:sldId id="324" r:id="rId16"/>
+    <p:sldId id="323" r:id="rId17"/>
+    <p:sldId id="326" r:id="rId18"/>
+    <p:sldId id="327" r:id="rId19"/>
+    <p:sldId id="330" r:id="rId20"/>
   </p:sldIdLst>
   <p:sldSz cx="12190413" cy="6858000"/>
   <p:notesSz cx="6797675" cy="9926638"/>
   <p:custDataLst>
-    <p:tags r:id="rId22"/>
+    <p:tags r:id="rId23"/>
   </p:custDataLst>
   <p:defaultTextStyle>
     <a:defPPr>
@@ -331,7 +332,7 @@
             </a:pPr>
             <a:fld id="{497B89D5-5017-4396-A2CE-F1C12124EE0F}" type="datetimeFigureOut">
               <a:rPr lang="de-DE"/>
-              <a:t>26.06.2026</a:t>
+              <a:t>29.06.2026</a:t>
             </a:fld>
             <a:endParaRPr lang="de-DE" dirty="0"/>
           </a:p>
@@ -541,7 +542,7 @@
             </a:pPr>
             <a:fld id="{4EEC745E-66A0-4F49-903C-36561B63B5F1}" type="datetimeFigureOut">
               <a:rPr lang="de-DE"/>
-              <a:t>26.06.2026</a:t>
+              <a:t>29.06.2026</a:t>
             </a:fld>
             <a:endParaRPr lang="de-DE" dirty="0"/>
           </a:p>
@@ -1378,7 +1379,7 @@
             <a:pPr algn="l"/>
             <a:fld id="{D7F12259-4066-44C3-AC08-F5ADAE7E0447}" type="datetime5">
               <a:rPr lang="zh-CN" altLang="en-US" smtClean="0"/>
-              <a:t>2026/6/26</a:t>
+              <a:t>2026/6/29</a:t>
             </a:fld>
             <a:endParaRPr lang="de-DE" dirty="0"/>
           </a:p>
@@ -2069,7 +2070,7 @@
             <a:pPr algn="l"/>
             <a:fld id="{6D3069C6-0311-4A39-8CC1-DA405FE38D0C}" type="datetime5">
               <a:rPr lang="zh-CN" altLang="en-US" smtClean="0"/>
-              <a:t>2026/6/26</a:t>
+              <a:t>2026/6/29</a:t>
             </a:fld>
             <a:endParaRPr lang="de-DE" dirty="0"/>
           </a:p>
@@ -4127,7 +4128,7 @@
             <a:pPr algn="l"/>
             <a:fld id="{74486B41-BCE2-48B7-876C-2B3490450D97}" type="datetime5">
               <a:rPr lang="zh-CN" altLang="en-US" smtClean="0"/>
-              <a:t>2026/6/26</a:t>
+              <a:t>2026/6/29</a:t>
             </a:fld>
             <a:endParaRPr lang="de-DE" dirty="0"/>
           </a:p>
@@ -4498,7 +4499,7 @@
             <a:pPr algn="l"/>
             <a:fld id="{85D6FCC3-EE37-4749-9624-859AF44EE717}" type="datetime5">
               <a:rPr lang="zh-CN" altLang="en-US" smtClean="0"/>
-              <a:t>2026/6/26</a:t>
+              <a:t>2026/6/29</a:t>
             </a:fld>
             <a:endParaRPr lang="de-DE" dirty="0"/>
           </a:p>
@@ -4637,7 +4638,7 @@
             <a:pPr algn="l"/>
             <a:fld id="{E47FF345-F1B3-44B8-9B74-D6676F7F0EE5}" type="datetime5">
               <a:rPr lang="zh-CN" altLang="en-US" smtClean="0"/>
-              <a:t>2026/6/26</a:t>
+              <a:t>2026/6/29</a:t>
             </a:fld>
             <a:endParaRPr lang="de-DE" dirty="0"/>
           </a:p>
@@ -4979,7 +4980,7 @@
             <a:pPr algn="l"/>
             <a:fld id="{6D3069C6-0311-4A39-8CC1-DA405FE38D0C}" type="datetime5">
               <a:rPr lang="zh-CN" altLang="en-US" smtClean="0"/>
-              <a:t>2026/6/26</a:t>
+              <a:t>2026/6/29</a:t>
             </a:fld>
             <a:endParaRPr lang="de-DE" dirty="0"/>
           </a:p>
@@ -7273,7 +7274,7 @@
             <a:pPr algn="l"/>
             <a:fld id="{F887C18F-21B2-48B8-9586-9343C0AE58EE}" type="datetime5">
               <a:rPr lang="zh-CN" altLang="en-US" smtClean="0"/>
-              <a:t>2026/6/26</a:t>
+              <a:t>2026/6/29</a:t>
             </a:fld>
             <a:endParaRPr lang="de-DE" dirty="0"/>
           </a:p>
@@ -7640,7 +7641,7 @@
             <a:pPr algn="l"/>
             <a:fld id="{E5AF013B-EAD8-4321-9A97-347E14C68B05}" type="datetime5">
               <a:rPr lang="zh-CN" altLang="en-US" smtClean="0"/>
-              <a:t>2026/6/26</a:t>
+              <a:t>2026/6/29</a:t>
             </a:fld>
             <a:endParaRPr lang="de-DE" dirty="0"/>
           </a:p>
@@ -7775,7 +7776,7 @@
             <a:pPr algn="l"/>
             <a:fld id="{D3F884E6-7726-4AAA-A0CE-C180A27151DE}" type="datetime5">
               <a:rPr lang="zh-CN" altLang="en-US" smtClean="0"/>
-              <a:t>2026/6/26</a:t>
+              <a:t>2026/6/29</a:t>
             </a:fld>
             <a:endParaRPr lang="de-DE" dirty="0"/>
           </a:p>
@@ -7870,7 +7871,7 @@
           <a:p>
             <a:fld id="{D35072EC-9367-4D7B-8652-6A082F0A7E89}" type="datetime5">
               <a:rPr lang="zh-CN" altLang="en-US" smtClean="0"/>
-              <a:t>2026/6/26</a:t>
+              <a:t>2026/6/29</a:t>
             </a:fld>
             <a:endParaRPr lang="de-DE" dirty="0"/>
           </a:p>
@@ -8454,7 +8455,7 @@
             <a:pPr algn="l"/>
             <a:fld id="{11769DE8-88E0-424A-87BD-6924D1146258}" type="datetime5">
               <a:rPr lang="zh-CN" altLang="en-US" smtClean="0"/>
-              <a:t>2026/6/26</a:t>
+              <a:t>2026/6/29</a:t>
             </a:fld>
             <a:endParaRPr lang="de-DE" dirty="0"/>
           </a:p>
@@ -9168,7 +9169,7 @@
             <a:pPr algn="l"/>
             <a:fld id="{11769DE8-88E0-424A-87BD-6924D1146258}" type="datetime5">
               <a:rPr lang="zh-CN" altLang="en-US" smtClean="0"/>
-              <a:t>2026/6/26</a:t>
+              <a:t>2026/6/29</a:t>
             </a:fld>
             <a:endParaRPr lang="de-DE" dirty="0"/>
           </a:p>
@@ -9397,7 +9398,7 @@
           <a:p>
             <a:fld id="{D35072EC-9367-4D7B-8652-6A082F0A7E89}" type="datetime5">
               <a:rPr lang="zh-CN" altLang="en-US" smtClean="0"/>
-              <a:t>2026/6/26</a:t>
+              <a:t>2026/6/29</a:t>
             </a:fld>
             <a:endParaRPr lang="de-DE" dirty="0"/>
           </a:p>
@@ -10267,7 +10268,7 @@
           <a:p>
             <a:fld id="{C2CC8288-72D4-44E2-951D-741F8F954282}" type="datetime5">
               <a:rPr lang="zh-CN" altLang="en-US" smtClean="0"/>
-              <a:t>2026/6/26</a:t>
+              <a:t>2026/6/29</a:t>
             </a:fld>
             <a:endParaRPr lang="de-DE" dirty="0"/>
           </a:p>
@@ -11066,7 +11067,7 @@
             <a:pPr algn="l"/>
             <a:fld id="{6D3069C6-0311-4A39-8CC1-DA405FE38D0C}" type="datetime5">
               <a:rPr lang="zh-CN" altLang="en-US" smtClean="0"/>
-              <a:t>2026/6/26</a:t>
+              <a:t>2026/6/29</a:t>
             </a:fld>
             <a:endParaRPr lang="de-DE" dirty="0"/>
           </a:p>
@@ -11309,7 +11310,7 @@
           <p:cNvPr id="2" name="标题 1">
             <a:extLst>
               <a:ext uri="{FF2B5EF4-FFF2-40B4-BE49-F238E27FC236}">
-                <a16:creationId xmlns:a16="http://schemas.microsoft.com/office/drawing/2014/main" id="{6226A2EF-C92D-5728-96B5-AA3CFA3D514F}"/>
+                <a16:creationId xmlns:a16="http://schemas.microsoft.com/office/drawing/2014/main" id="{113E0EDC-BA02-7F15-EB4B-7CFB27D93A05}"/>
               </a:ext>
             </a:extLst>
           </p:cNvPr>
@@ -11326,12 +11327,12 @@
           <a:lstStyle/>
           <a:p>
             <a:r>
-              <a:rPr lang="en-US" altLang="zh-CN" dirty="0"/>
-              <a:t>ML- und Transfer Leraning</a:t>
-            </a:r>
-            <a:r>
-              <a:rPr lang="en-US" altLang="zh-CN" baseline="30000" dirty="0"/>
-              <a:t>3</a:t>
+              <a:rPr lang="de-DE" altLang="zh-CN" dirty="0"/>
+              <a:t>Kapazitätsrückgewinnung während Ruhephasen</a:t>
+            </a:r>
+            <a:r>
+              <a:rPr lang="de-DE" altLang="zh-CN" baseline="30000" dirty="0"/>
+              <a:t>2</a:t>
             </a:r>
             <a:endParaRPr lang="zh-CN" altLang="en-US" baseline="30000" dirty="0"/>
           </a:p>
@@ -11342,7 +11343,7 @@
           <p:cNvPr id="3" name="内容占位符 2">
             <a:extLst>
               <a:ext uri="{FF2B5EF4-FFF2-40B4-BE49-F238E27FC236}">
-                <a16:creationId xmlns:a16="http://schemas.microsoft.com/office/drawing/2014/main" id="{70C10CCF-50C4-8A18-FDC3-26468128C3F6}"/>
+                <a16:creationId xmlns:a16="http://schemas.microsoft.com/office/drawing/2014/main" id="{E1995594-8440-259F-25BC-C5ABFCDBBF29}"/>
               </a:ext>
             </a:extLst>
           </p:cNvPr>
@@ -11359,64 +11360,30 @@
           <a:lstStyle/>
           <a:p>
             <a:r>
+              <a:rPr lang="de-DE" altLang="zh-CN" dirty="0"/>
+              <a:t>Lithium </a:t>
+            </a:r>
+            <a:r>
+              <a:rPr lang="de-DE" altLang="zh-CN" dirty="0" err="1"/>
+              <a:t>Plating</a:t>
+            </a:r>
+            <a:r>
+              <a:rPr lang="de-DE" altLang="zh-CN" dirty="0"/>
+              <a:t> als wahrscheinliche Ursache</a:t>
+            </a:r>
+          </a:p>
+          <a:p>
+            <a:r>
+              <a:rPr lang="de-DE" altLang="zh-CN" dirty="0"/>
+              <a:t>Ruhephase</a:t>
+            </a:r>
+            <a:r>
               <a:rPr lang="en-US" altLang="zh-CN" dirty="0"/>
-              <a:t>Machine Learning</a:t>
-            </a:r>
-          </a:p>
-          <a:p>
-            <a:pPr lvl="1"/>
-            <a:r>
-              <a:rPr lang="en-US" altLang="zh-CN" dirty="0"/>
-              <a:t>Input</a:t>
-            </a:r>
-          </a:p>
-          <a:p>
-            <a:pPr lvl="2"/>
+              <a:t>: </a:t>
+            </a:r>
             <a:r>
               <a:rPr lang="en-US" altLang="zh-CN" dirty="0" err="1"/>
-              <a:t>Spannungsrelaxation</a:t>
-            </a:r>
-            <a:endParaRPr lang="en-US" altLang="zh-CN" dirty="0"/>
-          </a:p>
-          <a:p>
-            <a:pPr lvl="2"/>
-            <a:r>
-              <a:rPr lang="en-US" altLang="zh-CN" dirty="0" err="1"/>
-              <a:t>Entladeabschnitte</a:t>
-            </a:r>
-            <a:endParaRPr lang="en-US" altLang="zh-CN" dirty="0"/>
-          </a:p>
-          <a:p>
-            <a:pPr lvl="2"/>
-            <a:r>
-              <a:rPr lang="en-US" altLang="zh-CN" dirty="0" err="1"/>
-              <a:t>Rekonstruierter</a:t>
-            </a:r>
-            <a:r>
-              <a:rPr lang="en-US" altLang="zh-CN" dirty="0"/>
-              <a:t> SOH</a:t>
-            </a:r>
-          </a:p>
-          <a:p>
-            <a:pPr lvl="1"/>
-            <a:endParaRPr lang="en-US" altLang="zh-CN" dirty="0"/>
-          </a:p>
-          <a:p>
-            <a:pPr lvl="1"/>
-            <a:r>
-              <a:rPr lang="en-US" altLang="zh-CN" dirty="0"/>
-              <a:t>Feature-Gruppen</a:t>
-            </a:r>
-          </a:p>
-          <a:p>
-            <a:pPr lvl="2"/>
-            <a:r>
-              <a:rPr lang="en-US" altLang="zh-CN" dirty="0"/>
-              <a:t>ORIGI: </a:t>
-            </a:r>
-            <a:r>
-              <a:rPr lang="en-US" altLang="zh-CN" dirty="0" err="1"/>
-              <a:t>resamplelte</a:t>
+              <a:t>partielle</a:t>
             </a:r>
             <a:r>
               <a:rPr lang="en-US" altLang="zh-CN" dirty="0"/>
@@ -11424,75 +11391,59 @@
             </a:r>
             <a:r>
               <a:rPr lang="en-US" altLang="zh-CN" dirty="0" err="1"/>
-              <a:t>Spannungswert</a:t>
+              <a:t>Reaktivierung</a:t>
+            </a:r>
+            <a:r>
+              <a:rPr lang="en-US" altLang="zh-CN" dirty="0"/>
+              <a:t> von </a:t>
+            </a:r>
+            <a:r>
+              <a:rPr lang="en-US" altLang="zh-CN" dirty="0" err="1"/>
+              <a:t>immobilisiertem</a:t>
+            </a:r>
+            <a:r>
+              <a:rPr lang="en-US" altLang="zh-CN" dirty="0"/>
+              <a:t> </a:t>
+            </a:r>
+            <a:r>
+              <a:rPr lang="en-US" altLang="zh-CN" dirty="0" err="1"/>
+              <a:t>Lithim</a:t>
             </a:r>
             <a:endParaRPr lang="en-US" altLang="zh-CN" dirty="0"/>
           </a:p>
           <a:p>
-            <a:pPr lvl="2"/>
             <a:r>
               <a:rPr lang="en-US" altLang="zh-CN" dirty="0"/>
-              <a:t>STATS: </a:t>
+              <a:t>2 Tage Ruhe: ca. 40%reversible </a:t>
             </a:r>
             <a:r>
               <a:rPr lang="en-US" altLang="zh-CN" dirty="0" err="1"/>
-              <a:t>Max,Mean,Min,Var,Ske,Kur</a:t>
-            </a:r>
-            <a:endParaRPr lang="en-US" altLang="zh-CN" dirty="0"/>
-          </a:p>
-          <a:p>
-            <a:pPr lvl="2"/>
-            <a:r>
-              <a:rPr lang="en-US" altLang="zh-CN" dirty="0">
-                <a:solidFill>
-                  <a:srgbClr val="FF0000"/>
-                </a:solidFill>
-              </a:rPr>
-              <a:t>ECM:OCV,R0,R1,R2,C1,C2</a:t>
-            </a:r>
-          </a:p>
-          <a:p>
-            <a:pPr lvl="1"/>
+              <a:t>Verlust</a:t>
+            </a:r>
             <a:r>
               <a:rPr lang="en-US" altLang="zh-CN" dirty="0"/>
-              <a:t>Ziel:</a:t>
-            </a:r>
-          </a:p>
-          <a:p>
-            <a:pPr lvl="2"/>
-            <a:r>
-              <a:rPr lang="en-US" altLang="zh-CN" dirty="0"/>
-              <a:t>SOH-</a:t>
+              <a:t> </a:t>
+            </a:r>
+            <a:r>
+              <a:rPr lang="en-US" altLang="zh-CN" dirty="0" err="1"/>
+              <a:t>zu</a:t>
             </a:r>
             <a:r>
               <a:rPr lang="de-DE" altLang="zh-CN" dirty="0"/>
-              <a:t>Schätzung</a:t>
-            </a:r>
-          </a:p>
-          <a:p>
-            <a:pPr lvl="2"/>
-            <a:r>
-              <a:rPr lang="de-DE" altLang="zh-CN" dirty="0"/>
-              <a:t>RMSE</a:t>
-            </a:r>
-            <a:r>
-              <a:rPr lang="en-US" altLang="zh-CN" dirty="0"/>
-              <a:t>/MAE/R</a:t>
-            </a:r>
-            <a:r>
-              <a:rPr lang="en-US" altLang="zh-CN" baseline="30000" dirty="0"/>
-              <a:t>2</a:t>
-            </a:r>
-            <a:endParaRPr lang="zh-CN" altLang="en-US" baseline="30000" dirty="0"/>
-          </a:p>
-        </p:txBody>
-      </p:sp>
-      <p:sp>
-        <p:nvSpPr>
-          <p:cNvPr id="7" name="内容占位符 6">
+              <a:t>rückgewonnen</a:t>
+            </a:r>
+          </a:p>
+          <a:p>
+            <a:endParaRPr lang="zh-CN" altLang="en-US" dirty="0"/>
+          </a:p>
+        </p:txBody>
+      </p:sp>
+      <p:sp>
+        <p:nvSpPr>
+          <p:cNvPr id="4" name="日期占位符 3">
             <a:extLst>
               <a:ext uri="{FF2B5EF4-FFF2-40B4-BE49-F238E27FC236}">
-                <a16:creationId xmlns:a16="http://schemas.microsoft.com/office/drawing/2014/main" id="{470E75EA-F2F9-F551-F3F7-93895C99028D}"/>
+                <a16:creationId xmlns:a16="http://schemas.microsoft.com/office/drawing/2014/main" id="{BA7E3CD1-8D4E-8DCA-89D2-D1AA476CBD59}"/>
               </a:ext>
             </a:extLst>
           </p:cNvPr>
@@ -11500,7 +11451,7 @@
             <a:spLocks noGrp="1"/>
           </p:cNvSpPr>
           <p:nvPr>
-            <p:ph idx="13"/>
+            <p:ph type="dt" sz="half" idx="10"/>
           </p:nvPr>
         </p:nvSpPr>
         <p:spPr/>
@@ -11508,129 +11459,21 @@
           <a:bodyPr/>
           <a:lstStyle/>
           <a:p>
-            <a:r>
-              <a:rPr lang="en-US" altLang="zh-CN" dirty="0"/>
-              <a:t>Transfer Learning</a:t>
-            </a:r>
-          </a:p>
-          <a:p>
-            <a:pPr lvl="1"/>
-            <a:r>
-              <a:rPr lang="en-US" altLang="zh-CN" dirty="0"/>
-              <a:t>Source Domain: NAC</a:t>
-            </a:r>
-          </a:p>
-          <a:p>
-            <a:pPr lvl="1"/>
-            <a:r>
-              <a:rPr lang="en-US" altLang="zh-CN" dirty="0"/>
-              <a:t>Target Domain: LFP</a:t>
-            </a:r>
-          </a:p>
-          <a:p>
-            <a:pPr lvl="1"/>
-            <a:r>
-              <a:rPr lang="en-US" altLang="zh-CN" dirty="0"/>
-              <a:t>TL1:Datenaugumentation</a:t>
-            </a:r>
-          </a:p>
-          <a:p>
-            <a:pPr lvl="2"/>
-            <a:r>
-              <a:rPr lang="en-US" altLang="zh-CN" dirty="0"/>
-              <a:t>SD + </a:t>
-            </a:r>
-            <a:r>
-              <a:rPr lang="en-US" altLang="zh-CN" dirty="0" err="1"/>
-              <a:t>wenige</a:t>
-            </a:r>
-            <a:r>
-              <a:rPr lang="en-US" altLang="zh-CN" dirty="0"/>
-              <a:t> TD-</a:t>
-            </a:r>
-            <a:r>
-              <a:rPr lang="en-US" altLang="zh-CN" dirty="0" err="1"/>
-              <a:t>Daten</a:t>
-            </a:r>
-            <a:endParaRPr lang="en-US" altLang="zh-CN" dirty="0"/>
-          </a:p>
-          <a:p>
-            <a:r>
-              <a:rPr lang="en-US" altLang="zh-CN" dirty="0"/>
-              <a:t>TL2:Feature Alignment</a:t>
-            </a:r>
-          </a:p>
-          <a:p>
-            <a:pPr lvl="1"/>
-            <a:r>
-              <a:rPr lang="en-US" altLang="zh-CN" dirty="0"/>
-              <a:t>TD-Feature -&gt;SD-Feature Raum</a:t>
-            </a:r>
-          </a:p>
-          <a:p>
-            <a:pPr lvl="1"/>
-            <a:r>
-              <a:rPr lang="en-US" altLang="zh-CN" dirty="0"/>
-              <a:t>X’ = X·diag(w)+b</a:t>
-            </a:r>
-          </a:p>
-          <a:p>
-            <a:r>
-              <a:rPr lang="en-US" altLang="zh-CN" dirty="0"/>
-              <a:t>TL3</a:t>
-            </a:r>
-          </a:p>
-          <a:p>
-            <a:pPr lvl="1"/>
-            <a:r>
-              <a:rPr lang="en-US" altLang="zh-CN" dirty="0"/>
-              <a:t>Source-Modell + </a:t>
-            </a:r>
-            <a:r>
-              <a:rPr lang="en-US" altLang="zh-CN" dirty="0" err="1"/>
-              <a:t>Korrekturmodell</a:t>
-            </a:r>
-            <a:endParaRPr lang="en-US" altLang="zh-CN" dirty="0"/>
-          </a:p>
-          <a:p>
-            <a:pPr lvl="1"/>
-            <a:r>
-              <a:rPr lang="en-US" altLang="zh-CN" dirty="0"/>
-              <a:t>ΔSOH = SOH</a:t>
-            </a:r>
-            <a:r>
-              <a:rPr lang="en-US" altLang="zh-CN" sz="2000" baseline="-25000" dirty="0"/>
-              <a:t>true</a:t>
-            </a:r>
-            <a:r>
-              <a:rPr lang="en-US" altLang="zh-CN" dirty="0"/>
-              <a:t> – SOH</a:t>
-            </a:r>
-            <a:r>
-              <a:rPr lang="en-US" altLang="zh-CN" baseline="-25000" dirty="0"/>
-              <a:t>pred</a:t>
-            </a:r>
-          </a:p>
-          <a:p>
-            <a:pPr lvl="1"/>
-            <a:r>
-              <a:rPr lang="en-US" altLang="zh-CN" dirty="0"/>
-              <a:t>Bias-</a:t>
-            </a:r>
-            <a:r>
-              <a:rPr lang="en-US" altLang="zh-CN" dirty="0" err="1"/>
-              <a:t>Korrektur</a:t>
-            </a:r>
-            <a:endParaRPr lang="en-US" altLang="zh-CN" dirty="0"/>
-          </a:p>
-        </p:txBody>
-      </p:sp>
-      <p:sp>
-        <p:nvSpPr>
-          <p:cNvPr id="4" name="日期占位符 3">
+            <a:pPr algn="l"/>
+            <a:fld id="{F887C18F-21B2-48B8-9586-9343C0AE58EE}" type="datetime5">
+              <a:rPr lang="zh-CN" altLang="en-US" smtClean="0"/>
+              <a:t>2026/6/29</a:t>
+            </a:fld>
+            <a:endParaRPr lang="de-DE" dirty="0"/>
+          </a:p>
+        </p:txBody>
+      </p:sp>
+      <p:sp>
+        <p:nvSpPr>
+          <p:cNvPr id="5" name="页脚占位符 4">
             <a:extLst>
               <a:ext uri="{FF2B5EF4-FFF2-40B4-BE49-F238E27FC236}">
-                <a16:creationId xmlns:a16="http://schemas.microsoft.com/office/drawing/2014/main" id="{17C7353B-1599-2F1C-D07A-BA2D6B9B5A30}"/>
+                <a16:creationId xmlns:a16="http://schemas.microsoft.com/office/drawing/2014/main" id="{E8D55843-3BB7-39C7-91B5-213D9B310252}"/>
               </a:ext>
             </a:extLst>
           </p:cNvPr>
@@ -11638,7 +11481,7 @@
             <a:spLocks noGrp="1"/>
           </p:cNvSpPr>
           <p:nvPr>
-            <p:ph type="dt" sz="half" idx="14"/>
+            <p:ph type="ftr" sz="quarter" idx="11"/>
           </p:nvPr>
         </p:nvSpPr>
         <p:spPr/>
@@ -11646,21 +11489,20 @@
           <a:bodyPr/>
           <a:lstStyle/>
           <a:p>
-            <a:pPr algn="l"/>
-            <a:fld id="{F887C18F-21B2-48B8-9586-9343C0AE58EE}" type="datetime5">
-              <a:rPr lang="zh-CN" altLang="en-US" smtClean="0"/>
-              <a:t>2026/6/26</a:t>
-            </a:fld>
-            <a:endParaRPr lang="de-DE" dirty="0"/>
-          </a:p>
-        </p:txBody>
-      </p:sp>
-      <p:sp>
-        <p:nvSpPr>
-          <p:cNvPr id="5" name="页脚占位符 4">
+            <a:r>
+              <a:rPr lang="en-US"/>
+              <a:t>Liang Huang</a:t>
+            </a:r>
+            <a:endParaRPr lang="en-US" dirty="0"/>
+          </a:p>
+        </p:txBody>
+      </p:sp>
+      <p:sp>
+        <p:nvSpPr>
+          <p:cNvPr id="6" name="灯片编号占位符 5">
             <a:extLst>
               <a:ext uri="{FF2B5EF4-FFF2-40B4-BE49-F238E27FC236}">
-                <a16:creationId xmlns:a16="http://schemas.microsoft.com/office/drawing/2014/main" id="{6D1DF1F6-B273-A507-C13D-9CAC443BD195}"/>
+                <a16:creationId xmlns:a16="http://schemas.microsoft.com/office/drawing/2014/main" id="{FB27361A-28EF-3455-7405-4288607EB100}"/>
               </a:ext>
             </a:extLst>
           </p:cNvPr>
@@ -11668,36 +11510,7 @@
             <a:spLocks noGrp="1"/>
           </p:cNvSpPr>
           <p:nvPr>
-            <p:ph type="ftr" sz="quarter" idx="15"/>
-          </p:nvPr>
-        </p:nvSpPr>
-        <p:spPr/>
-        <p:txBody>
-          <a:bodyPr/>
-          <a:lstStyle/>
-          <a:p>
-            <a:r>
-              <a:rPr lang="en-US"/>
-              <a:t>Liang Huang</a:t>
-            </a:r>
-            <a:endParaRPr lang="en-US" dirty="0"/>
-          </a:p>
-        </p:txBody>
-      </p:sp>
-      <p:sp>
-        <p:nvSpPr>
-          <p:cNvPr id="6" name="灯片编号占位符 5">
-            <a:extLst>
-              <a:ext uri="{FF2B5EF4-FFF2-40B4-BE49-F238E27FC236}">
-                <a16:creationId xmlns:a16="http://schemas.microsoft.com/office/drawing/2014/main" id="{F65085E7-6919-BAEF-1197-91290379580D}"/>
-              </a:ext>
-            </a:extLst>
-          </p:cNvPr>
-          <p:cNvSpPr>
-            <a:spLocks noGrp="1"/>
-          </p:cNvSpPr>
-          <p:nvPr>
-            <p:ph type="sldNum" sz="quarter" idx="16"/>
+            <p:ph type="sldNum" sz="quarter" idx="12"/>
           </p:nvPr>
         </p:nvSpPr>
         <p:spPr/>
@@ -11713,10 +11526,46 @@
           </a:p>
         </p:txBody>
       </p:sp>
+      <p:pic>
+        <p:nvPicPr>
+          <p:cNvPr id="11" name="图片 10">
+            <a:extLst>
+              <a:ext uri="{FF2B5EF4-FFF2-40B4-BE49-F238E27FC236}">
+                <a16:creationId xmlns:a16="http://schemas.microsoft.com/office/drawing/2014/main" id="{BEE30925-EE32-5BBC-0468-069C914F3506}"/>
+              </a:ext>
+            </a:extLst>
+          </p:cNvPr>
+          <p:cNvPicPr>
+            <a:picLocks noChangeAspect="1"/>
+          </p:cNvPicPr>
+          <p:nvPr/>
+        </p:nvPicPr>
+        <p:blipFill>
+          <a:blip r:embed="rId2" cstate="print">
+            <a:extLst>
+              <a:ext uri="{28A0092B-C50C-407E-A947-70E740481C1C}">
+                <a14:useLocalDpi xmlns:a14="http://schemas.microsoft.com/office/drawing/2010/main" val="0"/>
+              </a:ext>
+            </a:extLst>
+          </a:blip>
+          <a:stretch>
+            <a:fillRect/>
+          </a:stretch>
+        </p:blipFill>
+        <p:spPr>
+          <a:xfrm>
+            <a:off x="383950" y="2693313"/>
+            <a:ext cx="5334000" cy="3429000"/>
+          </a:xfrm>
+          <a:prstGeom prst="rect">
+            <a:avLst/>
+          </a:prstGeom>
+        </p:spPr>
+      </p:pic>
     </p:spTree>
     <p:extLst>
       <p:ext uri="{BB962C8B-B14F-4D97-AF65-F5344CB8AC3E}">
-        <p14:creationId xmlns:p14="http://schemas.microsoft.com/office/powerpoint/2010/main" val="3754291302"/>
+        <p14:creationId xmlns:p14="http://schemas.microsoft.com/office/powerpoint/2010/main" val="510032915"/>
       </p:ext>
     </p:extLst>
   </p:cSld>
@@ -11745,6 +11594,444 @@
       </p:grpSpPr>
       <p:sp>
         <p:nvSpPr>
+          <p:cNvPr id="2" name="标题 1">
+            <a:extLst>
+              <a:ext uri="{FF2B5EF4-FFF2-40B4-BE49-F238E27FC236}">
+                <a16:creationId xmlns:a16="http://schemas.microsoft.com/office/drawing/2014/main" id="{6226A2EF-C92D-5728-96B5-AA3CFA3D514F}"/>
+              </a:ext>
+            </a:extLst>
+          </p:cNvPr>
+          <p:cNvSpPr>
+            <a:spLocks noGrp="1"/>
+          </p:cNvSpPr>
+          <p:nvPr>
+            <p:ph type="title"/>
+          </p:nvPr>
+        </p:nvSpPr>
+        <p:spPr/>
+        <p:txBody>
+          <a:bodyPr/>
+          <a:lstStyle/>
+          <a:p>
+            <a:r>
+              <a:rPr lang="en-US" altLang="zh-CN" dirty="0"/>
+              <a:t>ML- und Transfer Leraning</a:t>
+            </a:r>
+            <a:r>
+              <a:rPr lang="en-US" altLang="zh-CN" baseline="30000" dirty="0"/>
+              <a:t>3</a:t>
+            </a:r>
+            <a:endParaRPr lang="zh-CN" altLang="en-US" baseline="30000" dirty="0"/>
+          </a:p>
+        </p:txBody>
+      </p:sp>
+      <p:sp>
+        <p:nvSpPr>
+          <p:cNvPr id="3" name="内容占位符 2">
+            <a:extLst>
+              <a:ext uri="{FF2B5EF4-FFF2-40B4-BE49-F238E27FC236}">
+                <a16:creationId xmlns:a16="http://schemas.microsoft.com/office/drawing/2014/main" id="{70C10CCF-50C4-8A18-FDC3-26468128C3F6}"/>
+              </a:ext>
+            </a:extLst>
+          </p:cNvPr>
+          <p:cNvSpPr>
+            <a:spLocks noGrp="1"/>
+          </p:cNvSpPr>
+          <p:nvPr>
+            <p:ph idx="1"/>
+          </p:nvPr>
+        </p:nvSpPr>
+        <p:spPr/>
+        <p:txBody>
+          <a:bodyPr/>
+          <a:lstStyle/>
+          <a:p>
+            <a:r>
+              <a:rPr lang="en-US" altLang="zh-CN" dirty="0"/>
+              <a:t>Machine Learning</a:t>
+            </a:r>
+          </a:p>
+          <a:p>
+            <a:pPr lvl="1"/>
+            <a:r>
+              <a:rPr lang="en-US" altLang="zh-CN" dirty="0"/>
+              <a:t>Input</a:t>
+            </a:r>
+          </a:p>
+          <a:p>
+            <a:pPr lvl="2"/>
+            <a:r>
+              <a:rPr lang="en-US" altLang="zh-CN" dirty="0" err="1"/>
+              <a:t>Spannungsrelaxation</a:t>
+            </a:r>
+            <a:endParaRPr lang="en-US" altLang="zh-CN" dirty="0"/>
+          </a:p>
+          <a:p>
+            <a:pPr lvl="2"/>
+            <a:r>
+              <a:rPr lang="en-US" altLang="zh-CN" dirty="0" err="1"/>
+              <a:t>Entladeabschnitte</a:t>
+            </a:r>
+            <a:endParaRPr lang="en-US" altLang="zh-CN" dirty="0"/>
+          </a:p>
+          <a:p>
+            <a:pPr lvl="2"/>
+            <a:r>
+              <a:rPr lang="en-US" altLang="zh-CN" dirty="0" err="1"/>
+              <a:t>Rekonstruierter</a:t>
+            </a:r>
+            <a:r>
+              <a:rPr lang="en-US" altLang="zh-CN" dirty="0"/>
+              <a:t> SOH</a:t>
+            </a:r>
+          </a:p>
+          <a:p>
+            <a:pPr lvl="1"/>
+            <a:endParaRPr lang="en-US" altLang="zh-CN" dirty="0"/>
+          </a:p>
+          <a:p>
+            <a:pPr lvl="1"/>
+            <a:r>
+              <a:rPr lang="en-US" altLang="zh-CN" dirty="0"/>
+              <a:t>Feature-Gruppen</a:t>
+            </a:r>
+          </a:p>
+          <a:p>
+            <a:pPr lvl="2"/>
+            <a:r>
+              <a:rPr lang="en-US" altLang="zh-CN" dirty="0"/>
+              <a:t>ORIGI: </a:t>
+            </a:r>
+            <a:r>
+              <a:rPr lang="en-US" altLang="zh-CN" dirty="0" err="1"/>
+              <a:t>resamplelte</a:t>
+            </a:r>
+            <a:r>
+              <a:rPr lang="en-US" altLang="zh-CN" dirty="0"/>
+              <a:t> </a:t>
+            </a:r>
+            <a:r>
+              <a:rPr lang="en-US" altLang="zh-CN" dirty="0" err="1"/>
+              <a:t>Spannungswert</a:t>
+            </a:r>
+            <a:endParaRPr lang="en-US" altLang="zh-CN" dirty="0"/>
+          </a:p>
+          <a:p>
+            <a:pPr lvl="2"/>
+            <a:r>
+              <a:rPr lang="en-US" altLang="zh-CN" dirty="0"/>
+              <a:t>STATS: </a:t>
+            </a:r>
+            <a:r>
+              <a:rPr lang="en-US" altLang="zh-CN" dirty="0" err="1"/>
+              <a:t>Max,Mean,Min,Var,Ske,Kur</a:t>
+            </a:r>
+            <a:endParaRPr lang="en-US" altLang="zh-CN" dirty="0"/>
+          </a:p>
+          <a:p>
+            <a:pPr lvl="2"/>
+            <a:r>
+              <a:rPr lang="en-US" altLang="zh-CN" dirty="0">
+                <a:solidFill>
+                  <a:srgbClr val="FF0000"/>
+                </a:solidFill>
+              </a:rPr>
+              <a:t>ECM:OCV,R0,R1,R2,C1,C2</a:t>
+            </a:r>
+          </a:p>
+          <a:p>
+            <a:pPr lvl="1"/>
+            <a:r>
+              <a:rPr lang="en-US" altLang="zh-CN" dirty="0"/>
+              <a:t>Ziel:</a:t>
+            </a:r>
+          </a:p>
+          <a:p>
+            <a:pPr lvl="2"/>
+            <a:r>
+              <a:rPr lang="en-US" altLang="zh-CN" dirty="0"/>
+              <a:t>SOH-</a:t>
+            </a:r>
+            <a:r>
+              <a:rPr lang="de-DE" altLang="zh-CN" dirty="0"/>
+              <a:t>Schätzung</a:t>
+            </a:r>
+          </a:p>
+          <a:p>
+            <a:pPr lvl="2"/>
+            <a:r>
+              <a:rPr lang="de-DE" altLang="zh-CN" dirty="0"/>
+              <a:t>RMSE</a:t>
+            </a:r>
+            <a:r>
+              <a:rPr lang="en-US" altLang="zh-CN" dirty="0"/>
+              <a:t>/MAE/R</a:t>
+            </a:r>
+            <a:r>
+              <a:rPr lang="en-US" altLang="zh-CN" baseline="30000" dirty="0"/>
+              <a:t>2</a:t>
+            </a:r>
+            <a:endParaRPr lang="zh-CN" altLang="en-US" baseline="30000" dirty="0"/>
+          </a:p>
+        </p:txBody>
+      </p:sp>
+      <p:sp>
+        <p:nvSpPr>
+          <p:cNvPr id="7" name="内容占位符 6">
+            <a:extLst>
+              <a:ext uri="{FF2B5EF4-FFF2-40B4-BE49-F238E27FC236}">
+                <a16:creationId xmlns:a16="http://schemas.microsoft.com/office/drawing/2014/main" id="{470E75EA-F2F9-F551-F3F7-93895C99028D}"/>
+              </a:ext>
+            </a:extLst>
+          </p:cNvPr>
+          <p:cNvSpPr>
+            <a:spLocks noGrp="1"/>
+          </p:cNvSpPr>
+          <p:nvPr>
+            <p:ph idx="13"/>
+          </p:nvPr>
+        </p:nvSpPr>
+        <p:spPr/>
+        <p:txBody>
+          <a:bodyPr/>
+          <a:lstStyle/>
+          <a:p>
+            <a:r>
+              <a:rPr lang="en-US" altLang="zh-CN" dirty="0"/>
+              <a:t>Transfer Learning</a:t>
+            </a:r>
+          </a:p>
+          <a:p>
+            <a:pPr lvl="1"/>
+            <a:r>
+              <a:rPr lang="en-US" altLang="zh-CN" dirty="0"/>
+              <a:t>Source Domain: NAC</a:t>
+            </a:r>
+          </a:p>
+          <a:p>
+            <a:pPr lvl="1"/>
+            <a:r>
+              <a:rPr lang="en-US" altLang="zh-CN" dirty="0"/>
+              <a:t>Target Domain: LFP</a:t>
+            </a:r>
+          </a:p>
+          <a:p>
+            <a:r>
+              <a:rPr lang="en-US" altLang="zh-CN" dirty="0"/>
+              <a:t>TL1:Datenaugumentation</a:t>
+            </a:r>
+          </a:p>
+          <a:p>
+            <a:pPr lvl="1"/>
+            <a:r>
+              <a:rPr lang="en-US" altLang="zh-CN" dirty="0"/>
+              <a:t>SD + </a:t>
+            </a:r>
+            <a:r>
+              <a:rPr lang="en-US" altLang="zh-CN" dirty="0" err="1"/>
+              <a:t>wenige</a:t>
+            </a:r>
+            <a:r>
+              <a:rPr lang="en-US" altLang="zh-CN" dirty="0"/>
+              <a:t> TD-</a:t>
+            </a:r>
+            <a:r>
+              <a:rPr lang="en-US" altLang="zh-CN" dirty="0" err="1"/>
+              <a:t>Daten</a:t>
+            </a:r>
+            <a:endParaRPr lang="en-US" altLang="zh-CN" dirty="0"/>
+          </a:p>
+          <a:p>
+            <a:r>
+              <a:rPr lang="en-US" altLang="zh-CN" dirty="0"/>
+              <a:t>TL2:Feature Alignment</a:t>
+            </a:r>
+          </a:p>
+          <a:p>
+            <a:pPr lvl="1"/>
+            <a:r>
+              <a:rPr lang="en-US" altLang="zh-CN" dirty="0"/>
+              <a:t>TD-Feature -&gt;SD-Feature Raum</a:t>
+            </a:r>
+          </a:p>
+          <a:p>
+            <a:pPr lvl="1"/>
+            <a:r>
+              <a:rPr lang="en-US" altLang="zh-CN" dirty="0"/>
+              <a:t>X’ = X·diag(w)+b</a:t>
+            </a:r>
+          </a:p>
+          <a:p>
+            <a:r>
+              <a:rPr lang="en-US" altLang="zh-CN" dirty="0"/>
+              <a:t>TL3</a:t>
+            </a:r>
+          </a:p>
+          <a:p>
+            <a:pPr lvl="1"/>
+            <a:r>
+              <a:rPr lang="en-US" altLang="zh-CN" dirty="0"/>
+              <a:t>Source-Modell + </a:t>
+            </a:r>
+            <a:r>
+              <a:rPr lang="en-US" altLang="zh-CN" dirty="0" err="1"/>
+              <a:t>Korrekturmodell</a:t>
+            </a:r>
+            <a:endParaRPr lang="en-US" altLang="zh-CN" dirty="0"/>
+          </a:p>
+          <a:p>
+            <a:pPr lvl="1"/>
+            <a:r>
+              <a:rPr lang="en-US" altLang="zh-CN" dirty="0"/>
+              <a:t>ΔSOH = SOH</a:t>
+            </a:r>
+            <a:r>
+              <a:rPr lang="en-US" altLang="zh-CN" sz="2000" baseline="-25000" dirty="0"/>
+              <a:t>true</a:t>
+            </a:r>
+            <a:r>
+              <a:rPr lang="en-US" altLang="zh-CN" dirty="0"/>
+              <a:t> – SOH</a:t>
+            </a:r>
+            <a:r>
+              <a:rPr lang="en-US" altLang="zh-CN" baseline="-25000" dirty="0"/>
+              <a:t>pred</a:t>
+            </a:r>
+          </a:p>
+          <a:p>
+            <a:pPr lvl="1"/>
+            <a:r>
+              <a:rPr lang="en-US" altLang="zh-CN" dirty="0"/>
+              <a:t>Bias-</a:t>
+            </a:r>
+            <a:r>
+              <a:rPr lang="en-US" altLang="zh-CN" dirty="0" err="1"/>
+              <a:t>Korrektur</a:t>
+            </a:r>
+            <a:endParaRPr lang="en-US" altLang="zh-CN" dirty="0"/>
+          </a:p>
+        </p:txBody>
+      </p:sp>
+      <p:sp>
+        <p:nvSpPr>
+          <p:cNvPr id="4" name="日期占位符 3">
+            <a:extLst>
+              <a:ext uri="{FF2B5EF4-FFF2-40B4-BE49-F238E27FC236}">
+                <a16:creationId xmlns:a16="http://schemas.microsoft.com/office/drawing/2014/main" id="{17C7353B-1599-2F1C-D07A-BA2D6B9B5A30}"/>
+              </a:ext>
+            </a:extLst>
+          </p:cNvPr>
+          <p:cNvSpPr>
+            <a:spLocks noGrp="1"/>
+          </p:cNvSpPr>
+          <p:nvPr>
+            <p:ph type="dt" sz="half" idx="14"/>
+          </p:nvPr>
+        </p:nvSpPr>
+        <p:spPr/>
+        <p:txBody>
+          <a:bodyPr/>
+          <a:lstStyle/>
+          <a:p>
+            <a:pPr algn="l"/>
+            <a:fld id="{F887C18F-21B2-48B8-9586-9343C0AE58EE}" type="datetime5">
+              <a:rPr lang="zh-CN" altLang="en-US" smtClean="0"/>
+              <a:t>2026/6/29</a:t>
+            </a:fld>
+            <a:endParaRPr lang="de-DE" dirty="0"/>
+          </a:p>
+        </p:txBody>
+      </p:sp>
+      <p:sp>
+        <p:nvSpPr>
+          <p:cNvPr id="5" name="页脚占位符 4">
+            <a:extLst>
+              <a:ext uri="{FF2B5EF4-FFF2-40B4-BE49-F238E27FC236}">
+                <a16:creationId xmlns:a16="http://schemas.microsoft.com/office/drawing/2014/main" id="{6D1DF1F6-B273-A507-C13D-9CAC443BD195}"/>
+              </a:ext>
+            </a:extLst>
+          </p:cNvPr>
+          <p:cNvSpPr>
+            <a:spLocks noGrp="1"/>
+          </p:cNvSpPr>
+          <p:nvPr>
+            <p:ph type="ftr" sz="quarter" idx="15"/>
+          </p:nvPr>
+        </p:nvSpPr>
+        <p:spPr/>
+        <p:txBody>
+          <a:bodyPr/>
+          <a:lstStyle/>
+          <a:p>
+            <a:r>
+              <a:rPr lang="en-US"/>
+              <a:t>Liang Huang</a:t>
+            </a:r>
+            <a:endParaRPr lang="en-US" dirty="0"/>
+          </a:p>
+        </p:txBody>
+      </p:sp>
+      <p:sp>
+        <p:nvSpPr>
+          <p:cNvPr id="6" name="灯片编号占位符 5">
+            <a:extLst>
+              <a:ext uri="{FF2B5EF4-FFF2-40B4-BE49-F238E27FC236}">
+                <a16:creationId xmlns:a16="http://schemas.microsoft.com/office/drawing/2014/main" id="{F65085E7-6919-BAEF-1197-91290379580D}"/>
+              </a:ext>
+            </a:extLst>
+          </p:cNvPr>
+          <p:cNvSpPr>
+            <a:spLocks noGrp="1"/>
+          </p:cNvSpPr>
+          <p:nvPr>
+            <p:ph type="sldNum" sz="quarter" idx="16"/>
+          </p:nvPr>
+        </p:nvSpPr>
+        <p:spPr/>
+        <p:txBody>
+          <a:bodyPr/>
+          <a:lstStyle/>
+          <a:p>
+            <a:fld id="{4D01E63C-D794-4429-8564-635E6253AC5C}" type="slidenum">
+              <a:rPr lang="en-US" smtClean="0"/>
+              <a:t>11</a:t>
+            </a:fld>
+            <a:endParaRPr lang="en-US" dirty="0"/>
+          </a:p>
+        </p:txBody>
+      </p:sp>
+    </p:spTree>
+    <p:extLst>
+      <p:ext uri="{BB962C8B-B14F-4D97-AF65-F5344CB8AC3E}">
+        <p14:creationId xmlns:p14="http://schemas.microsoft.com/office/powerpoint/2010/main" val="3754291302"/>
+      </p:ext>
+    </p:extLst>
+  </p:cSld>
+  <p:clrMapOvr>
+    <a:masterClrMapping/>
+  </p:clrMapOvr>
+</p:sld>
+</file>
+
+<file path=ppt/slides/slide12.xml><?xml version="1.0" encoding="utf-8"?>
+<p:sld xmlns:a="http://schemas.openxmlformats.org/drawingml/2006/main" xmlns:r="http://schemas.openxmlformats.org/officeDocument/2006/relationships" xmlns:p="http://schemas.openxmlformats.org/presentationml/2006/main">
+  <p:cSld>
+    <p:spTree>
+      <p:nvGrpSpPr>
+        <p:cNvPr id="1" name=""/>
+        <p:cNvGrpSpPr/>
+        <p:nvPr/>
+      </p:nvGrpSpPr>
+      <p:grpSpPr>
+        <a:xfrm>
+          <a:off x="0" y="0"/>
+          <a:ext cx="0" cy="0"/>
+          <a:chOff x="0" y="0"/>
+          <a:chExt cx="0" cy="0"/>
+        </a:xfrm>
+      </p:grpSpPr>
+      <p:sp>
+        <p:nvSpPr>
           <p:cNvPr id="5" name="标题 4"/>
           <p:cNvSpPr>
             <a:spLocks noGrp="1"/>
@@ -11934,7 +12221,7 @@
           <a:p>
             <a:fld id="{D35072EC-9367-4D7B-8652-6A082F0A7E89}" type="datetime5">
               <a:rPr lang="zh-CN" altLang="en-US" smtClean="0"/>
-              <a:t>2026/6/26</a:t>
+              <a:t>2026/6/29</a:t>
             </a:fld>
             <a:endParaRPr lang="de-DE" dirty="0"/>
           </a:p>
@@ -11980,7 +12267,7 @@
           <a:p>
             <a:fld id="{4D01E63C-D794-4429-8564-635E6253AC5C}" type="slidenum">
               <a:rPr lang="en-US" smtClean="0"/>
-              <a:t>11</a:t>
+              <a:t>12</a:t>
             </a:fld>
             <a:endParaRPr lang="en-US" dirty="0"/>
           </a:p>
@@ -12017,7 +12304,7 @@
 </p:sld>
 </file>
 
-<file path=ppt/slides/slide12.xml><?xml version="1.0" encoding="utf-8"?>
+<file path=ppt/slides/slide13.xml><?xml version="1.0" encoding="utf-8"?>
 <p:sld xmlns:a="http://schemas.openxmlformats.org/drawingml/2006/main" xmlns:r="http://schemas.openxmlformats.org/officeDocument/2006/relationships" xmlns:p="http://schemas.openxmlformats.org/presentationml/2006/main">
   <p:cSld>
     <p:spTree>
@@ -12134,7 +12421,17 @@
                 </a14:m>
                 <a:r>
                   <a:rPr lang="zh-CN" altLang="zh-CN" dirty="0"/>
-                  <a:t>entsprechen den Werten des vorherigen Zeitschritts.</a:t>
+                  <a:t>entsprechen den Werten des </a:t>
+                </a:r>
+                <a:endParaRPr lang="en-US" altLang="zh-CN" dirty="0"/>
+              </a:p>
+              <a:p>
+                <a:pPr marL="0" indent="0">
+                  <a:buNone/>
+                </a:pPr>
+                <a:r>
+                  <a:rPr lang="zh-CN" altLang="zh-CN" dirty="0"/>
+                  <a:t>vorherigen Zeitschritts.</a:t>
                 </a:r>
                 <a:endParaRPr lang="zh-CN" altLang="en-US" dirty="0"/>
               </a:p>
@@ -12162,7 +12459,7 @@
               <a:blipFill>
                 <a:blip r:embed="rId2"/>
                 <a:stretch>
-                  <a:fillRect l="-1281"/>
+                  <a:fillRect l="-1387"/>
                 </a:stretch>
               </a:blipFill>
             </p:spPr>
@@ -12204,7 +12501,7 @@
           <a:p>
             <a:fld id="{D35072EC-9367-4D7B-8652-6A082F0A7E89}" type="datetime5">
               <a:rPr lang="zh-CN" altLang="en-US" smtClean="0"/>
-              <a:t>2026/6/26</a:t>
+              <a:t>2026/6/29</a:t>
             </a:fld>
             <a:endParaRPr lang="de-DE" dirty="0"/>
           </a:p>
@@ -12262,7 +12559,7 @@
           <a:p>
             <a:fld id="{4D01E63C-D794-4429-8564-635E6253AC5C}" type="slidenum">
               <a:rPr lang="en-US" smtClean="0"/>
-              <a:t>12</a:t>
+              <a:t>13</a:t>
             </a:fld>
             <a:endParaRPr lang="en-US" dirty="0"/>
           </a:p>
@@ -12290,8 +12587,8 @@
         </p:blipFill>
         <p:spPr>
           <a:xfrm>
-            <a:off x="8659567" y="974725"/>
-            <a:ext cx="2831126" cy="2316480"/>
+            <a:off x="5491624" y="974725"/>
+            <a:ext cx="5999069" cy="4908550"/>
           </a:xfrm>
           <a:prstGeom prst="rect">
             <a:avLst/>
@@ -12376,13 +12673,13 @@
           <p:nvPr>
             <p:extLst>
               <p:ext uri="{D42A27DB-BD31-4B8C-83A1-F6EECF244321}">
-                <p14:modId xmlns:p14="http://schemas.microsoft.com/office/powerpoint/2010/main" val="2157108592"/>
+                <p14:modId xmlns:p14="http://schemas.microsoft.com/office/powerpoint/2010/main" val="1136168212"/>
               </p:ext>
             </p:extLst>
           </p:nvPr>
         </p:nvGraphicFramePr>
         <p:xfrm>
-          <a:off x="383858" y="3100290"/>
+          <a:off x="383858" y="3517637"/>
           <a:ext cx="3146989" cy="769767"/>
         </p:xfrm>
         <a:graphic>
@@ -12410,7 +12707,7 @@
                     </p:blipFill>
                     <p:spPr>
                       <a:xfrm>
-                        <a:off x="383858" y="3100290"/>
+                        <a:off x="383858" y="3517637"/>
                         <a:ext cx="3146989" cy="769767"/>
                       </a:xfrm>
                       <a:prstGeom prst="rect">
@@ -12424,6 +12721,46 @@
           </a:graphicData>
         </a:graphic>
       </p:graphicFrame>
+      <p:sp>
+        <p:nvSpPr>
+          <p:cNvPr id="8" name="文本框 7">
+            <a:extLst>
+              <a:ext uri="{FF2B5EF4-FFF2-40B4-BE49-F238E27FC236}">
+                <a16:creationId xmlns:a16="http://schemas.microsoft.com/office/drawing/2014/main" id="{F1613E3A-9E36-66BA-738F-D96D82706C31}"/>
+              </a:ext>
+            </a:extLst>
+          </p:cNvPr>
+          <p:cNvSpPr txBox="1"/>
+          <p:nvPr/>
+        </p:nvSpPr>
+        <p:spPr>
+          <a:xfrm>
+            <a:off x="383858" y="4688147"/>
+            <a:ext cx="1441420" cy="369332"/>
+          </a:xfrm>
+          <a:prstGeom prst="rect">
+            <a:avLst/>
+          </a:prstGeom>
+          <a:noFill/>
+        </p:spPr>
+        <p:txBody>
+          <a:bodyPr wrap="none" rtlCol="0">
+            <a:spAutoFit/>
+          </a:bodyPr>
+          <a:lstStyle/>
+          <a:p>
+            <a:r>
+              <a:rPr lang="en-US" altLang="zh-CN" dirty="0"/>
+              <a:t>RC</a:t>
+            </a:r>
+            <a:r>
+              <a:rPr lang="zh-CN" altLang="en-US" dirty="0"/>
+              <a:t>数据展示</a:t>
+            </a:r>
+            <a:endParaRPr lang="en-US" altLang="zh-CN" dirty="0"/>
+          </a:p>
+        </p:txBody>
+      </p:sp>
     </p:spTree>
     <p:extLst>
       <p:ext uri="{BB962C8B-B14F-4D97-AF65-F5344CB8AC3E}">
@@ -12437,7 +12774,7 @@
 </p:sld>
 </file>
 
-<file path=ppt/slides/slide13.xml><?xml version="1.0" encoding="utf-8"?>
+<file path=ppt/slides/slide14.xml><?xml version="1.0" encoding="utf-8"?>
 <p:sld xmlns:a="http://schemas.openxmlformats.org/drawingml/2006/main" xmlns:r="http://schemas.openxmlformats.org/officeDocument/2006/relationships" xmlns:p="http://schemas.openxmlformats.org/presentationml/2006/main">
   <p:cSld>
     <p:spTree>
@@ -12551,7 +12888,7 @@
           <a:p>
             <a:fld id="{D35072EC-9367-4D7B-8652-6A082F0A7E89}" type="datetime5">
               <a:rPr lang="zh-CN" altLang="en-US" smtClean="0"/>
-              <a:t>2026/6/26</a:t>
+              <a:t>2026/6/29</a:t>
             </a:fld>
             <a:endParaRPr lang="de-DE" dirty="0"/>
           </a:p>
@@ -12597,7 +12934,7 @@
           <a:p>
             <a:fld id="{4D01E63C-D794-4429-8564-635E6253AC5C}" type="slidenum">
               <a:rPr lang="en-US" smtClean="0"/>
-              <a:t>13</a:t>
+              <a:t>14</a:t>
             </a:fld>
             <a:endParaRPr lang="en-US" dirty="0"/>
           </a:p>
@@ -12999,6 +13336,41 @@
           </a:graphicData>
         </a:graphic>
       </p:graphicFrame>
+      <p:sp>
+        <p:nvSpPr>
+          <p:cNvPr id="6" name="文本框 5">
+            <a:extLst>
+              <a:ext uri="{FF2B5EF4-FFF2-40B4-BE49-F238E27FC236}">
+                <a16:creationId xmlns:a16="http://schemas.microsoft.com/office/drawing/2014/main" id="{037BEADD-DB2E-FA33-3405-12D6FBAFCDC4}"/>
+              </a:ext>
+            </a:extLst>
+          </p:cNvPr>
+          <p:cNvSpPr txBox="1"/>
+          <p:nvPr/>
+        </p:nvSpPr>
+        <p:spPr>
+          <a:xfrm>
+            <a:off x="3072528" y="4809242"/>
+            <a:ext cx="2492990" cy="369332"/>
+          </a:xfrm>
+          <a:prstGeom prst="rect">
+            <a:avLst/>
+          </a:prstGeom>
+          <a:noFill/>
+        </p:spPr>
+        <p:txBody>
+          <a:bodyPr wrap="none" rtlCol="0">
+            <a:spAutoFit/>
+          </a:bodyPr>
+          <a:lstStyle/>
+          <a:p>
+            <a:r>
+              <a:rPr lang="zh-CN" altLang="en-US" dirty="0"/>
+              <a:t>介绍数据：工况，片段</a:t>
+            </a:r>
+          </a:p>
+        </p:txBody>
+      </p:sp>
     </p:spTree>
     <p:extLst>
       <p:ext uri="{BB962C8B-B14F-4D97-AF65-F5344CB8AC3E}">
@@ -13012,7 +13384,7 @@
 </p:sld>
 </file>
 
-<file path=ppt/slides/slide14.xml><?xml version="1.0" encoding="utf-8"?>
+<file path=ppt/slides/slide15.xml><?xml version="1.0" encoding="utf-8"?>
 <p:sld xmlns:a="http://schemas.openxmlformats.org/drawingml/2006/main" xmlns:r="http://schemas.openxmlformats.org/officeDocument/2006/relationships" xmlns:p="http://schemas.openxmlformats.org/presentationml/2006/main">
   <p:cSld>
     <p:spTree>
@@ -13220,7 +13592,7 @@
           <a:p>
             <a:fld id="{D35072EC-9367-4D7B-8652-6A082F0A7E89}" type="datetime5">
               <a:rPr lang="zh-CN" altLang="en-US" smtClean="0"/>
-              <a:t>2026/6/26</a:t>
+              <a:t>2026/6/29</a:t>
             </a:fld>
             <a:endParaRPr lang="de-DE" dirty="0"/>
           </a:p>
@@ -13266,7 +13638,7 @@
           <a:p>
             <a:fld id="{4D01E63C-D794-4429-8564-635E6253AC5C}" type="slidenum">
               <a:rPr lang="en-US" smtClean="0"/>
-              <a:t>14</a:t>
+              <a:t>15</a:t>
             </a:fld>
             <a:endParaRPr lang="en-US" dirty="0"/>
           </a:p>
@@ -13303,7 +13675,7 @@
 </p:sld>
 </file>
 
-<file path=ppt/slides/slide15.xml><?xml version="1.0" encoding="utf-8"?>
+<file path=ppt/slides/slide16.xml><?xml version="1.0" encoding="utf-8"?>
 <p:sld xmlns:a="http://schemas.openxmlformats.org/drawingml/2006/main" xmlns:r="http://schemas.openxmlformats.org/officeDocument/2006/relationships" xmlns:p="http://schemas.openxmlformats.org/presentationml/2006/main">
   <p:cSld>
     <p:spTree>
@@ -13461,6 +13833,17 @@
             </a:endParaRPr>
           </a:p>
           <a:p>
+            <a:r>
+              <a:rPr lang="zh-CN" altLang="en-US" dirty="0">
+                <a:sym typeface="Wingdings" panose="05000000000000000000" pitchFamily="2" charset="2"/>
+              </a:rPr>
+              <a:t>数据整理</a:t>
+            </a:r>
+            <a:endParaRPr lang="en-US" altLang="zh-CN" dirty="0">
+              <a:sym typeface="Wingdings" panose="05000000000000000000" pitchFamily="2" charset="2"/>
+            </a:endParaRPr>
+          </a:p>
+          <a:p>
             <a:pPr lvl="1"/>
             <a:endParaRPr lang="en-US" altLang="zh-CN" dirty="0"/>
           </a:p>
@@ -13494,7 +13877,7 @@
             <a:pPr algn="l"/>
             <a:fld id="{F887C18F-21B2-48B8-9586-9343C0AE58EE}" type="datetime5">
               <a:rPr lang="zh-CN" altLang="en-US" smtClean="0"/>
-              <a:t>2026/6/26</a:t>
+              <a:t>2026/6/29</a:t>
             </a:fld>
             <a:endParaRPr lang="de-DE" dirty="0"/>
           </a:p>
@@ -13552,7 +13935,7 @@
           <a:p>
             <a:fld id="{4D01E63C-D794-4429-8564-635E6253AC5C}" type="slidenum">
               <a:rPr lang="en-US" smtClean="0"/>
-              <a:t>15</a:t>
+              <a:t>16</a:t>
             </a:fld>
             <a:endParaRPr lang="en-US" dirty="0"/>
           </a:p>
@@ -13636,201 +14019,6 @@
 </p:sld>
 </file>
 
-<file path=ppt/slides/slide16.xml><?xml version="1.0" encoding="utf-8"?>
-<p:sld xmlns:a="http://schemas.openxmlformats.org/drawingml/2006/main" xmlns:r="http://schemas.openxmlformats.org/officeDocument/2006/relationships" xmlns:p="http://schemas.openxmlformats.org/presentationml/2006/main">
-  <p:cSld>
-    <p:spTree>
-      <p:nvGrpSpPr>
-        <p:cNvPr id="1" name=""/>
-        <p:cNvGrpSpPr/>
-        <p:nvPr/>
-      </p:nvGrpSpPr>
-      <p:grpSpPr>
-        <a:xfrm>
-          <a:off x="0" y="0"/>
-          <a:ext cx="0" cy="0"/>
-          <a:chOff x="0" y="0"/>
-          <a:chExt cx="0" cy="0"/>
-        </a:xfrm>
-      </p:grpSpPr>
-      <p:sp>
-        <p:nvSpPr>
-          <p:cNvPr id="2" name="标题 1">
-            <a:extLst>
-              <a:ext uri="{FF2B5EF4-FFF2-40B4-BE49-F238E27FC236}">
-                <a16:creationId xmlns:a16="http://schemas.microsoft.com/office/drawing/2014/main" id="{75E9A57C-206D-83C0-B45E-17FED2A88F5E}"/>
-              </a:ext>
-            </a:extLst>
-          </p:cNvPr>
-          <p:cNvSpPr>
-            <a:spLocks noGrp="1"/>
-          </p:cNvSpPr>
-          <p:nvPr>
-            <p:ph type="title"/>
-          </p:nvPr>
-        </p:nvSpPr>
-        <p:spPr/>
-        <p:txBody>
-          <a:bodyPr/>
-          <a:lstStyle/>
-          <a:p>
-            <a:r>
-              <a:rPr lang="en-US" altLang="zh-CN" dirty="0" err="1"/>
-              <a:t>Weitere</a:t>
-            </a:r>
-            <a:r>
-              <a:rPr lang="en-US" altLang="zh-CN" dirty="0"/>
-              <a:t> Arbeit</a:t>
-            </a:r>
-            <a:endParaRPr lang="zh-CN" altLang="en-US" dirty="0"/>
-          </a:p>
-        </p:txBody>
-      </p:sp>
-      <p:sp>
-        <p:nvSpPr>
-          <p:cNvPr id="3" name="内容占位符 2">
-            <a:extLst>
-              <a:ext uri="{FF2B5EF4-FFF2-40B4-BE49-F238E27FC236}">
-                <a16:creationId xmlns:a16="http://schemas.microsoft.com/office/drawing/2014/main" id="{FA68EC69-78AA-5C28-D840-8AB9EA880AF6}"/>
-              </a:ext>
-            </a:extLst>
-          </p:cNvPr>
-          <p:cNvSpPr>
-            <a:spLocks noGrp="1"/>
-          </p:cNvSpPr>
-          <p:nvPr>
-            <p:ph idx="1"/>
-          </p:nvPr>
-        </p:nvSpPr>
-        <p:spPr/>
-        <p:txBody>
-          <a:bodyPr/>
-          <a:lstStyle/>
-          <a:p>
-            <a:endParaRPr lang="en-US" altLang="zh-CN" dirty="0"/>
-          </a:p>
-          <a:p>
-            <a:endParaRPr lang="en-US" altLang="zh-CN" dirty="0"/>
-          </a:p>
-          <a:p>
-            <a:endParaRPr lang="en-US" altLang="zh-CN" dirty="0"/>
-          </a:p>
-          <a:p>
-            <a:r>
-              <a:rPr lang="en-US" altLang="zh-CN" dirty="0"/>
-              <a:t>Machine Learning</a:t>
-            </a:r>
-          </a:p>
-          <a:p>
-            <a:r>
-              <a:rPr lang="en-US" altLang="zh-CN" dirty="0"/>
-              <a:t>Transfer Learning</a:t>
-            </a:r>
-            <a:endParaRPr lang="zh-CN" altLang="en-US" dirty="0"/>
-          </a:p>
-        </p:txBody>
-      </p:sp>
-      <p:sp>
-        <p:nvSpPr>
-          <p:cNvPr id="4" name="日期占位符 3">
-            <a:extLst>
-              <a:ext uri="{FF2B5EF4-FFF2-40B4-BE49-F238E27FC236}">
-                <a16:creationId xmlns:a16="http://schemas.microsoft.com/office/drawing/2014/main" id="{E1AE2317-5EE1-5E98-93DD-CBF7BECFCA6C}"/>
-              </a:ext>
-            </a:extLst>
-          </p:cNvPr>
-          <p:cNvSpPr>
-            <a:spLocks noGrp="1"/>
-          </p:cNvSpPr>
-          <p:nvPr>
-            <p:ph type="dt" sz="half" idx="10"/>
-          </p:nvPr>
-        </p:nvSpPr>
-        <p:spPr/>
-        <p:txBody>
-          <a:bodyPr/>
-          <a:lstStyle/>
-          <a:p>
-            <a:pPr algn="l"/>
-            <a:fld id="{F887C18F-21B2-48B8-9586-9343C0AE58EE}" type="datetime5">
-              <a:rPr lang="zh-CN" altLang="en-US" smtClean="0"/>
-              <a:t>2026/6/26</a:t>
-            </a:fld>
-            <a:endParaRPr lang="de-DE" dirty="0"/>
-          </a:p>
-        </p:txBody>
-      </p:sp>
-      <p:sp>
-        <p:nvSpPr>
-          <p:cNvPr id="5" name="页脚占位符 4">
-            <a:extLst>
-              <a:ext uri="{FF2B5EF4-FFF2-40B4-BE49-F238E27FC236}">
-                <a16:creationId xmlns:a16="http://schemas.microsoft.com/office/drawing/2014/main" id="{8CC10BAD-195D-1F09-ACFB-22AC34538E2A}"/>
-              </a:ext>
-            </a:extLst>
-          </p:cNvPr>
-          <p:cNvSpPr>
-            <a:spLocks noGrp="1"/>
-          </p:cNvSpPr>
-          <p:nvPr>
-            <p:ph type="ftr" sz="quarter" idx="11"/>
-          </p:nvPr>
-        </p:nvSpPr>
-        <p:spPr/>
-        <p:txBody>
-          <a:bodyPr/>
-          <a:lstStyle/>
-          <a:p>
-            <a:r>
-              <a:rPr lang="en-US"/>
-              <a:t>Liang Huang</a:t>
-            </a:r>
-            <a:endParaRPr lang="en-US" dirty="0"/>
-          </a:p>
-        </p:txBody>
-      </p:sp>
-      <p:sp>
-        <p:nvSpPr>
-          <p:cNvPr id="6" name="灯片编号占位符 5">
-            <a:extLst>
-              <a:ext uri="{FF2B5EF4-FFF2-40B4-BE49-F238E27FC236}">
-                <a16:creationId xmlns:a16="http://schemas.microsoft.com/office/drawing/2014/main" id="{9D6BCB71-C048-E186-F8FD-96C0996EF3F5}"/>
-              </a:ext>
-            </a:extLst>
-          </p:cNvPr>
-          <p:cNvSpPr>
-            <a:spLocks noGrp="1"/>
-          </p:cNvSpPr>
-          <p:nvPr>
-            <p:ph type="sldNum" sz="quarter" idx="12"/>
-          </p:nvPr>
-        </p:nvSpPr>
-        <p:spPr/>
-        <p:txBody>
-          <a:bodyPr/>
-          <a:lstStyle/>
-          <a:p>
-            <a:fld id="{4D01E63C-D794-4429-8564-635E6253AC5C}" type="slidenum">
-              <a:rPr lang="en-US" smtClean="0"/>
-              <a:t>16</a:t>
-            </a:fld>
-            <a:endParaRPr lang="en-US" dirty="0"/>
-          </a:p>
-        </p:txBody>
-      </p:sp>
-    </p:spTree>
-    <p:extLst>
-      <p:ext uri="{BB962C8B-B14F-4D97-AF65-F5344CB8AC3E}">
-        <p14:creationId xmlns:p14="http://schemas.microsoft.com/office/powerpoint/2010/main" val="2240135073"/>
-      </p:ext>
-    </p:extLst>
-  </p:cSld>
-  <p:clrMapOvr>
-    <a:masterClrMapping/>
-  </p:clrMapOvr>
-</p:sld>
-</file>
-
 <file path=ppt/slides/slide17.xml><?xml version="1.0" encoding="utf-8"?>
 <p:sld xmlns:a="http://schemas.openxmlformats.org/drawingml/2006/main" xmlns:r="http://schemas.openxmlformats.org/officeDocument/2006/relationships" xmlns:p="http://schemas.openxmlformats.org/presentationml/2006/main">
   <p:cSld>
@@ -13848,9 +14036,216 @@
           <a:chExt cx="0" cy="0"/>
         </a:xfrm>
       </p:grpSpPr>
+      <p:sp>
+        <p:nvSpPr>
+          <p:cNvPr id="2" name="标题 1">
+            <a:extLst>
+              <a:ext uri="{FF2B5EF4-FFF2-40B4-BE49-F238E27FC236}">
+                <a16:creationId xmlns:a16="http://schemas.microsoft.com/office/drawing/2014/main" id="{75E9A57C-206D-83C0-B45E-17FED2A88F5E}"/>
+              </a:ext>
+            </a:extLst>
+          </p:cNvPr>
+          <p:cNvSpPr>
+            <a:spLocks noGrp="1"/>
+          </p:cNvSpPr>
+          <p:nvPr>
+            <p:ph type="title"/>
+          </p:nvPr>
+        </p:nvSpPr>
+        <p:spPr/>
+        <p:txBody>
+          <a:bodyPr/>
+          <a:lstStyle/>
+          <a:p>
+            <a:r>
+              <a:rPr lang="en-US" altLang="zh-CN" dirty="0" err="1"/>
+              <a:t>Weitere</a:t>
+            </a:r>
+            <a:r>
+              <a:rPr lang="en-US" altLang="zh-CN" dirty="0"/>
+              <a:t> Arbeit</a:t>
+            </a:r>
+            <a:endParaRPr lang="zh-CN" altLang="en-US" dirty="0"/>
+          </a:p>
+        </p:txBody>
+      </p:sp>
+      <p:sp>
+        <p:nvSpPr>
+          <p:cNvPr id="3" name="内容占位符 2">
+            <a:extLst>
+              <a:ext uri="{FF2B5EF4-FFF2-40B4-BE49-F238E27FC236}">
+                <a16:creationId xmlns:a16="http://schemas.microsoft.com/office/drawing/2014/main" id="{FA68EC69-78AA-5C28-D840-8AB9EA880AF6}"/>
+              </a:ext>
+            </a:extLst>
+          </p:cNvPr>
+          <p:cNvSpPr>
+            <a:spLocks noGrp="1"/>
+          </p:cNvSpPr>
+          <p:nvPr>
+            <p:ph idx="1"/>
+          </p:nvPr>
+        </p:nvSpPr>
+        <p:spPr/>
+        <p:txBody>
+          <a:bodyPr/>
+          <a:lstStyle/>
+          <a:p>
+            <a:endParaRPr lang="en-US" altLang="zh-CN" dirty="0"/>
+          </a:p>
+          <a:p>
+            <a:endParaRPr lang="en-US" altLang="zh-CN" dirty="0"/>
+          </a:p>
+          <a:p>
+            <a:endParaRPr lang="en-US" altLang="zh-CN" dirty="0"/>
+          </a:p>
+          <a:p>
+            <a:r>
+              <a:rPr lang="en-US" altLang="zh-CN" dirty="0"/>
+              <a:t>Machine Learning</a:t>
+            </a:r>
+          </a:p>
+          <a:p>
+            <a:r>
+              <a:rPr lang="en-US" altLang="zh-CN" dirty="0"/>
+              <a:t>Transfer Learning</a:t>
+            </a:r>
+            <a:endParaRPr lang="zh-CN" altLang="en-US" dirty="0"/>
+          </a:p>
+        </p:txBody>
+      </p:sp>
+      <p:sp>
+        <p:nvSpPr>
+          <p:cNvPr id="4" name="日期占位符 3">
+            <a:extLst>
+              <a:ext uri="{FF2B5EF4-FFF2-40B4-BE49-F238E27FC236}">
+                <a16:creationId xmlns:a16="http://schemas.microsoft.com/office/drawing/2014/main" id="{E1AE2317-5EE1-5E98-93DD-CBF7BECFCA6C}"/>
+              </a:ext>
+            </a:extLst>
+          </p:cNvPr>
+          <p:cNvSpPr>
+            <a:spLocks noGrp="1"/>
+          </p:cNvSpPr>
+          <p:nvPr>
+            <p:ph type="dt" sz="half" idx="10"/>
+          </p:nvPr>
+        </p:nvSpPr>
+        <p:spPr/>
+        <p:txBody>
+          <a:bodyPr/>
+          <a:lstStyle/>
+          <a:p>
+            <a:pPr algn="l"/>
+            <a:fld id="{F887C18F-21B2-48B8-9586-9343C0AE58EE}" type="datetime5">
+              <a:rPr lang="zh-CN" altLang="en-US" smtClean="0"/>
+              <a:t>2026/6/29</a:t>
+            </a:fld>
+            <a:endParaRPr lang="de-DE" dirty="0"/>
+          </a:p>
+        </p:txBody>
+      </p:sp>
+      <p:sp>
+        <p:nvSpPr>
+          <p:cNvPr id="5" name="页脚占位符 4">
+            <a:extLst>
+              <a:ext uri="{FF2B5EF4-FFF2-40B4-BE49-F238E27FC236}">
+                <a16:creationId xmlns:a16="http://schemas.microsoft.com/office/drawing/2014/main" id="{8CC10BAD-195D-1F09-ACFB-22AC34538E2A}"/>
+              </a:ext>
+            </a:extLst>
+          </p:cNvPr>
+          <p:cNvSpPr>
+            <a:spLocks noGrp="1"/>
+          </p:cNvSpPr>
+          <p:nvPr>
+            <p:ph type="ftr" sz="quarter" idx="11"/>
+          </p:nvPr>
+        </p:nvSpPr>
+        <p:spPr/>
+        <p:txBody>
+          <a:bodyPr/>
+          <a:lstStyle/>
+          <a:p>
+            <a:r>
+              <a:rPr lang="en-US"/>
+              <a:t>Liang Huang</a:t>
+            </a:r>
+            <a:endParaRPr lang="en-US" dirty="0"/>
+          </a:p>
+        </p:txBody>
+      </p:sp>
+      <p:sp>
+        <p:nvSpPr>
+          <p:cNvPr id="6" name="灯片编号占位符 5">
+            <a:extLst>
+              <a:ext uri="{FF2B5EF4-FFF2-40B4-BE49-F238E27FC236}">
+                <a16:creationId xmlns:a16="http://schemas.microsoft.com/office/drawing/2014/main" id="{9D6BCB71-C048-E186-F8FD-96C0996EF3F5}"/>
+              </a:ext>
+            </a:extLst>
+          </p:cNvPr>
+          <p:cNvSpPr>
+            <a:spLocks noGrp="1"/>
+          </p:cNvSpPr>
+          <p:nvPr>
+            <p:ph type="sldNum" sz="quarter" idx="12"/>
+          </p:nvPr>
+        </p:nvSpPr>
+        <p:spPr/>
+        <p:txBody>
+          <a:bodyPr/>
+          <a:lstStyle/>
+          <a:p>
+            <a:fld id="{4D01E63C-D794-4429-8564-635E6253AC5C}" type="slidenum">
+              <a:rPr lang="en-US" smtClean="0"/>
+              <a:t>17</a:t>
+            </a:fld>
+            <a:endParaRPr lang="en-US" dirty="0"/>
+          </a:p>
+        </p:txBody>
+      </p:sp>
+    </p:spTree>
+    <p:extLst>
+      <p:ext uri="{BB962C8B-B14F-4D97-AF65-F5344CB8AC3E}">
+        <p14:creationId xmlns:p14="http://schemas.microsoft.com/office/powerpoint/2010/main" val="2240135073"/>
+      </p:ext>
+    </p:extLst>
+  </p:cSld>
+  <p:clrMapOvr>
+    <a:masterClrMapping/>
+  </p:clrMapOvr>
+</p:sld>
+</file>
+
+<file path=ppt/slides/slide18.xml><?xml version="1.0" encoding="utf-8"?>
+<p:sld xmlns:a="http://schemas.openxmlformats.org/drawingml/2006/main" xmlns:r="http://schemas.openxmlformats.org/officeDocument/2006/relationships" xmlns:p="http://schemas.openxmlformats.org/presentationml/2006/main">
+  <p:cSld>
+    <p:spTree>
+      <p:nvGrpSpPr>
+        <p:cNvPr id="1" name="">
+          <a:extLst>
+            <a:ext uri="{FF2B5EF4-FFF2-40B4-BE49-F238E27FC236}">
+              <a16:creationId xmlns:a16="http://schemas.microsoft.com/office/drawing/2014/main" id="{D0555A29-A490-1F15-848A-CAC225DABDC9}"/>
+            </a:ext>
+          </a:extLst>
+        </p:cNvPr>
+        <p:cNvGrpSpPr/>
+        <p:nvPr/>
+      </p:nvGrpSpPr>
+      <p:grpSpPr>
+        <a:xfrm>
+          <a:off x="0" y="0"/>
+          <a:ext cx="0" cy="0"/>
+          <a:chOff x="0" y="0"/>
+          <a:chExt cx="0" cy="0"/>
+        </a:xfrm>
+      </p:grpSpPr>
       <p:graphicFrame>
         <p:nvGraphicFramePr>
-          <p:cNvPr id="7" name="Objekt 6" hidden="1"/>
+          <p:cNvPr id="7" name="Objekt 6" hidden="1">
+            <a:extLst>
+              <a:ext uri="{FF2B5EF4-FFF2-40B4-BE49-F238E27FC236}">
+                <a16:creationId xmlns:a16="http://schemas.microsoft.com/office/drawing/2014/main" id="{604D3EE2-8984-D6B4-BEB0-9F43663384D0}"/>
+              </a:ext>
+            </a:extLst>
+          </p:cNvPr>
           <p:cNvGraphicFramePr>
             <a:graphicFrameLocks noChangeAspect="1"/>
           </p:cNvGraphicFramePr>
@@ -13877,7 +14272,7 @@
                   <p:embed/>
                   <p:pic>
                     <p:nvPicPr>
-                      <p:cNvPr id="0" name="图片 1"/>
+                      <p:cNvPr id="7" name="Objekt 6" hidden="1"/>
                       <p:cNvPicPr/>
                       <p:nvPr/>
                     </p:nvPicPr>
@@ -13905,7 +14300,13 @@
       </p:graphicFrame>
       <p:sp>
         <p:nvSpPr>
-          <p:cNvPr id="3" name="Titel 1"/>
+          <p:cNvPr id="3" name="Titel 1">
+            <a:extLst>
+              <a:ext uri="{FF2B5EF4-FFF2-40B4-BE49-F238E27FC236}">
+                <a16:creationId xmlns:a16="http://schemas.microsoft.com/office/drawing/2014/main" id="{8AB5A0E8-8E7B-F8A7-90B2-A6E08B4183BC}"/>
+              </a:ext>
+            </a:extLst>
+          </p:cNvPr>
           <p:cNvSpPr>
             <a:spLocks noGrp="1"/>
           </p:cNvSpPr>
@@ -13975,7 +14376,13 @@
       </p:sp>
       <p:sp>
         <p:nvSpPr>
-          <p:cNvPr id="10" name="日期占位符 9"/>
+          <p:cNvPr id="10" name="日期占位符 9">
+            <a:extLst>
+              <a:ext uri="{FF2B5EF4-FFF2-40B4-BE49-F238E27FC236}">
+                <a16:creationId xmlns:a16="http://schemas.microsoft.com/office/drawing/2014/main" id="{246F287C-63BD-4FF7-AE6F-61FA3EEF279B}"/>
+              </a:ext>
+            </a:extLst>
+          </p:cNvPr>
           <p:cNvSpPr>
             <a:spLocks noGrp="1"/>
           </p:cNvSpPr>
@@ -13991,7 +14398,7 @@
             <a:pPr algn="l"/>
             <a:fld id="{6D3069C6-0311-4A39-8CC1-DA405FE38D0C}" type="datetime5">
               <a:rPr lang="zh-CN" altLang="en-US" smtClean="0"/>
-              <a:t>2026/6/26</a:t>
+              <a:t>2026/6/29</a:t>
             </a:fld>
             <a:endParaRPr lang="de-DE" dirty="0"/>
           </a:p>
@@ -13999,7 +14406,13 @@
       </p:sp>
       <p:sp>
         <p:nvSpPr>
-          <p:cNvPr id="11" name="页脚占位符 10"/>
+          <p:cNvPr id="11" name="页脚占位符 10">
+            <a:extLst>
+              <a:ext uri="{FF2B5EF4-FFF2-40B4-BE49-F238E27FC236}">
+                <a16:creationId xmlns:a16="http://schemas.microsoft.com/office/drawing/2014/main" id="{F05B2C2A-F30D-6C4A-39ED-386391391FF9}"/>
+              </a:ext>
+            </a:extLst>
+          </p:cNvPr>
           <p:cNvSpPr>
             <a:spLocks noGrp="1"/>
           </p:cNvSpPr>
@@ -14019,7 +14432,209 @@
           </a:p>
         </p:txBody>
       </p:sp>
+      <p:pic>
+        <p:nvPicPr>
+          <p:cNvPr id="6" name="图片 5">
+            <a:extLst>
+              <a:ext uri="{FF2B5EF4-FFF2-40B4-BE49-F238E27FC236}">
+                <a16:creationId xmlns:a16="http://schemas.microsoft.com/office/drawing/2014/main" id="{3757805B-91B9-6FC4-32B6-DB936513E154}"/>
+              </a:ext>
+            </a:extLst>
+          </p:cNvPr>
+          <p:cNvPicPr>
+            <a:picLocks noChangeAspect="1"/>
+          </p:cNvPicPr>
+          <p:nvPr/>
+        </p:nvPicPr>
+        <p:blipFill>
+          <a:blip r:embed="rId5" cstate="print">
+            <a:extLst>
+              <a:ext uri="{28A0092B-C50C-407E-A947-70E740481C1C}">
+                <a14:useLocalDpi xmlns:a14="http://schemas.microsoft.com/office/drawing/2010/main" val="0"/>
+              </a:ext>
+            </a:extLst>
+          </a:blip>
+          <a:stretch>
+            <a:fillRect/>
+          </a:stretch>
+        </p:blipFill>
+        <p:spPr>
+          <a:xfrm>
+            <a:off x="7598139" y="4535813"/>
+            <a:ext cx="2145279" cy="1207361"/>
+          </a:xfrm>
+          <a:prstGeom prst="rect">
+            <a:avLst/>
+          </a:prstGeom>
+        </p:spPr>
+      </p:pic>
+      <p:sp>
+        <p:nvSpPr>
+          <p:cNvPr id="13" name="页脚占位符 10">
+            <a:extLst>
+              <a:ext uri="{FF2B5EF4-FFF2-40B4-BE49-F238E27FC236}">
+                <a16:creationId xmlns:a16="http://schemas.microsoft.com/office/drawing/2014/main" id="{C03F6F5B-5420-DDE9-8827-E04BB2D7E9D8}"/>
+              </a:ext>
+            </a:extLst>
+          </p:cNvPr>
+          <p:cNvSpPr txBox="1"/>
+          <p:nvPr/>
+        </p:nvSpPr>
+        <p:spPr>
+          <a:xfrm>
+            <a:off x="382449" y="4388726"/>
+            <a:ext cx="11425513" cy="524824"/>
+          </a:xfrm>
+          <a:prstGeom prst="rect">
+            <a:avLst/>
+          </a:prstGeom>
+        </p:spPr>
+        <p:txBody>
+          <a:bodyPr vert="horz" lIns="0" tIns="0" rIns="0" bIns="0" rtlCol="0" anchor="t"/>
+          <a:lstStyle>
+            <a:defPPr>
+              <a:defRPr lang="de-DE"/>
+            </a:defPPr>
+            <a:lvl1pPr algn="l" rtl="0" eaLnBrk="0" fontAlgn="base" hangingPunct="0">
+              <a:spcBef>
+                <a:spcPct val="0"/>
+              </a:spcBef>
+              <a:spcAft>
+                <a:spcPct val="0"/>
+              </a:spcAft>
+              <a:defRPr sz="2000" b="0" kern="1200">
+                <a:solidFill>
+                  <a:schemeClr val="tx1"/>
+                </a:solidFill>
+                <a:latin typeface="Arial" panose="020B0604020202020204" pitchFamily="34" charset="0"/>
+                <a:ea typeface="+mn-ea"/>
+                <a:cs typeface="+mn-cs"/>
+              </a:defRPr>
+            </a:lvl1pPr>
+            <a:lvl2pPr marL="457200" algn="l" rtl="0" eaLnBrk="0" fontAlgn="base" hangingPunct="0">
+              <a:spcBef>
+                <a:spcPct val="0"/>
+              </a:spcBef>
+              <a:spcAft>
+                <a:spcPct val="0"/>
+              </a:spcAft>
+              <a:defRPr kern="1200">
+                <a:solidFill>
+                  <a:schemeClr val="tx1"/>
+                </a:solidFill>
+                <a:latin typeface="Arial" panose="020B0604020202020204" pitchFamily="34" charset="0"/>
+                <a:ea typeface="+mn-ea"/>
+                <a:cs typeface="+mn-cs"/>
+              </a:defRPr>
+            </a:lvl2pPr>
+            <a:lvl3pPr marL="914400" algn="l" rtl="0" eaLnBrk="0" fontAlgn="base" hangingPunct="0">
+              <a:spcBef>
+                <a:spcPct val="0"/>
+              </a:spcBef>
+              <a:spcAft>
+                <a:spcPct val="0"/>
+              </a:spcAft>
+              <a:defRPr kern="1200">
+                <a:solidFill>
+                  <a:schemeClr val="tx1"/>
+                </a:solidFill>
+                <a:latin typeface="Arial" panose="020B0604020202020204" pitchFamily="34" charset="0"/>
+                <a:ea typeface="+mn-ea"/>
+                <a:cs typeface="+mn-cs"/>
+              </a:defRPr>
+            </a:lvl3pPr>
+            <a:lvl4pPr marL="1371600" algn="l" rtl="0" eaLnBrk="0" fontAlgn="base" hangingPunct="0">
+              <a:spcBef>
+                <a:spcPct val="0"/>
+              </a:spcBef>
+              <a:spcAft>
+                <a:spcPct val="0"/>
+              </a:spcAft>
+              <a:defRPr kern="1200">
+                <a:solidFill>
+                  <a:schemeClr val="tx1"/>
+                </a:solidFill>
+                <a:latin typeface="Arial" panose="020B0604020202020204" pitchFamily="34" charset="0"/>
+                <a:ea typeface="+mn-ea"/>
+                <a:cs typeface="+mn-cs"/>
+              </a:defRPr>
+            </a:lvl4pPr>
+            <a:lvl5pPr marL="1828800" algn="l" rtl="0" eaLnBrk="0" fontAlgn="base" hangingPunct="0">
+              <a:spcBef>
+                <a:spcPct val="0"/>
+              </a:spcBef>
+              <a:spcAft>
+                <a:spcPct val="0"/>
+              </a:spcAft>
+              <a:defRPr kern="1200">
+                <a:solidFill>
+                  <a:schemeClr val="tx1"/>
+                </a:solidFill>
+                <a:latin typeface="Arial" panose="020B0604020202020204" pitchFamily="34" charset="0"/>
+                <a:ea typeface="+mn-ea"/>
+                <a:cs typeface="+mn-cs"/>
+              </a:defRPr>
+            </a:lvl5pPr>
+            <a:lvl6pPr marL="2286000" algn="l" defTabSz="914400" rtl="0" eaLnBrk="1" latinLnBrk="0" hangingPunct="1">
+              <a:defRPr kern="1200">
+                <a:solidFill>
+                  <a:schemeClr val="tx1"/>
+                </a:solidFill>
+                <a:latin typeface="Arial" panose="020B0604020202020204" pitchFamily="34" charset="0"/>
+                <a:ea typeface="+mn-ea"/>
+                <a:cs typeface="+mn-cs"/>
+              </a:defRPr>
+            </a:lvl6pPr>
+            <a:lvl7pPr marL="2743200" algn="l" defTabSz="914400" rtl="0" eaLnBrk="1" latinLnBrk="0" hangingPunct="1">
+              <a:defRPr kern="1200">
+                <a:solidFill>
+                  <a:schemeClr val="tx1"/>
+                </a:solidFill>
+                <a:latin typeface="Arial" panose="020B0604020202020204" pitchFamily="34" charset="0"/>
+                <a:ea typeface="+mn-ea"/>
+                <a:cs typeface="+mn-cs"/>
+              </a:defRPr>
+            </a:lvl7pPr>
+            <a:lvl8pPr marL="3200400" algn="l" defTabSz="914400" rtl="0" eaLnBrk="1" latinLnBrk="0" hangingPunct="1">
+              <a:defRPr kern="1200">
+                <a:solidFill>
+                  <a:schemeClr val="tx1"/>
+                </a:solidFill>
+                <a:latin typeface="Arial" panose="020B0604020202020204" pitchFamily="34" charset="0"/>
+                <a:ea typeface="+mn-ea"/>
+                <a:cs typeface="+mn-cs"/>
+              </a:defRPr>
+            </a:lvl8pPr>
+            <a:lvl9pPr marL="3657600" algn="l" defTabSz="914400" rtl="0" eaLnBrk="1" latinLnBrk="0" hangingPunct="1">
+              <a:defRPr kern="1200">
+                <a:solidFill>
+                  <a:schemeClr val="tx1"/>
+                </a:solidFill>
+                <a:latin typeface="Arial" panose="020B0604020202020204" pitchFamily="34" charset="0"/>
+                <a:ea typeface="+mn-ea"/>
+                <a:cs typeface="+mn-cs"/>
+              </a:defRPr>
+            </a:lvl9pPr>
+          </a:lstStyle>
+          <a:p>
+            <a:r>
+              <a:rPr lang="en-US" altLang="zh-CN" dirty="0" err="1"/>
+              <a:t>Zwischen</a:t>
+            </a:r>
+            <a:r>
+              <a:rPr lang="de-DE" altLang="zh-CN" dirty="0" err="1"/>
+              <a:t>päsentation</a:t>
+            </a:r>
+            <a:endParaRPr lang="en-US" dirty="0"/>
+          </a:p>
+        </p:txBody>
+      </p:sp>
     </p:spTree>
+    <p:extLst>
+      <p:ext uri="{BB962C8B-B14F-4D97-AF65-F5344CB8AC3E}">
+        <p14:creationId xmlns:p14="http://schemas.microsoft.com/office/powerpoint/2010/main" val="188471552"/>
+      </p:ext>
+    </p:extLst>
   </p:cSld>
   <p:clrMapOvr>
     <a:masterClrMapping/>
@@ -14278,7 +14893,7 @@
           <a:p>
             <a:fld id="{D35072EC-9367-4D7B-8652-6A082F0A7E89}" type="datetime5">
               <a:rPr lang="zh-CN" altLang="en-US" smtClean="0"/>
-              <a:t>2026/6/26</a:t>
+              <a:t>2026/6/29</a:t>
             </a:fld>
             <a:endParaRPr lang="de-DE" dirty="0"/>
           </a:p>
@@ -14569,7 +15184,7 @@
           <a:p>
             <a:fld id="{D35072EC-9367-4D7B-8652-6A082F0A7E89}" type="datetime5">
               <a:rPr lang="zh-CN" altLang="en-US" smtClean="0"/>
-              <a:t>2026/6/26</a:t>
+              <a:t>2026/6/29</a:t>
             </a:fld>
             <a:endParaRPr lang="de-DE" dirty="0"/>
           </a:p>
@@ -14833,7 +15448,7 @@
           <a:p>
             <a:fld id="{D35072EC-9367-4D7B-8652-6A082F0A7E89}" type="datetime5">
               <a:rPr lang="zh-CN" altLang="en-US" smtClean="0"/>
-              <a:t>2026/6/26</a:t>
+              <a:t>2026/6/29</a:t>
             </a:fld>
             <a:endParaRPr lang="de-DE" dirty="0"/>
           </a:p>
@@ -15101,7 +15716,7 @@
           <a:p>
             <a:fld id="{D35072EC-9367-4D7B-8652-6A082F0A7E89}" type="datetime5">
               <a:rPr lang="zh-CN" altLang="en-US" smtClean="0"/>
-              <a:t>2026/6/26</a:t>
+              <a:t>2026/6/29</a:t>
             </a:fld>
             <a:endParaRPr lang="de-DE" dirty="0"/>
           </a:p>
@@ -15213,14 +15828,15 @@
         </p:nvPicPr>
         <p:blipFill>
           <a:blip r:embed="rId2"/>
+          <a:srcRect l="65965" t="5696"/>
           <a:stretch>
             <a:fillRect/>
           </a:stretch>
         </p:blipFill>
         <p:spPr>
           <a:xfrm>
-            <a:off x="383949" y="905256"/>
-            <a:ext cx="9710969" cy="4022344"/>
+            <a:off x="5502119" y="848762"/>
+            <a:ext cx="4611745" cy="5292773"/>
           </a:xfrm>
           <a:prstGeom prst="rect">
             <a:avLst/>
@@ -15266,7 +15882,7 @@
           <a:p>
             <a:fld id="{D35072EC-9367-4D7B-8652-6A082F0A7E89}" type="datetime5">
               <a:rPr lang="zh-CN" altLang="en-US" smtClean="0"/>
-              <a:t>2026/6/26</a:t>
+              <a:t>2026/6/29</a:t>
             </a:fld>
             <a:endParaRPr lang="de-DE" dirty="0"/>
           </a:p>
@@ -15592,6 +16208,37 @@
           </a:p>
         </p:txBody>
       </p:sp>
+      <p:pic>
+        <p:nvPicPr>
+          <p:cNvPr id="6" name="内容占位符 11">
+            <a:extLst>
+              <a:ext uri="{FF2B5EF4-FFF2-40B4-BE49-F238E27FC236}">
+                <a16:creationId xmlns:a16="http://schemas.microsoft.com/office/drawing/2014/main" id="{453C2E03-C09A-40EC-6079-2150110321B5}"/>
+              </a:ext>
+            </a:extLst>
+          </p:cNvPr>
+          <p:cNvPicPr>
+            <a:picLocks noChangeAspect="1"/>
+          </p:cNvPicPr>
+          <p:nvPr/>
+        </p:nvPicPr>
+        <p:blipFill>
+          <a:blip r:embed="rId2"/>
+          <a:srcRect t="5696" r="61649"/>
+          <a:stretch>
+            <a:fillRect/>
+          </a:stretch>
+        </p:blipFill>
+        <p:spPr>
+          <a:xfrm>
+            <a:off x="383949" y="848762"/>
+            <a:ext cx="5195404" cy="5291645"/>
+          </a:xfrm>
+          <a:prstGeom prst="rect">
+            <a:avLst/>
+          </a:prstGeom>
+        </p:spPr>
+      </p:pic>
     </p:spTree>
   </p:cSld>
   <p:clrMapOvr>
@@ -15605,7 +16252,13 @@
   <p:cSld>
     <p:spTree>
       <p:nvGrpSpPr>
-        <p:cNvPr id="1" name=""/>
+        <p:cNvPr id="1" name="">
+          <a:extLst>
+            <a:ext uri="{FF2B5EF4-FFF2-40B4-BE49-F238E27FC236}">
+              <a16:creationId xmlns:a16="http://schemas.microsoft.com/office/drawing/2014/main" id="{7AA178F7-547E-CE9E-2155-A794FA1801B2}"/>
+            </a:ext>
+          </a:extLst>
+        </p:cNvPr>
         <p:cNvGrpSpPr/>
         <p:nvPr/>
       </p:nvGrpSpPr>
@@ -15617,9 +16270,48 @@
           <a:chExt cx="0" cy="0"/>
         </a:xfrm>
       </p:grpSpPr>
-      <p:sp>
-        <p:nvSpPr>
-          <p:cNvPr id="5" name="标题 4"/>
+      <p:pic>
+        <p:nvPicPr>
+          <p:cNvPr id="12" name="内容占位符 11">
+            <a:extLst>
+              <a:ext uri="{FF2B5EF4-FFF2-40B4-BE49-F238E27FC236}">
+                <a16:creationId xmlns:a16="http://schemas.microsoft.com/office/drawing/2014/main" id="{17BD388D-F17A-1E8A-E26B-30C04DBA0F02}"/>
+              </a:ext>
+            </a:extLst>
+          </p:cNvPr>
+          <p:cNvPicPr>
+            <a:picLocks noGrp="1" noChangeAspect="1"/>
+          </p:cNvPicPr>
+          <p:nvPr>
+            <p:ph idx="1"/>
+          </p:nvPr>
+        </p:nvPicPr>
+        <p:blipFill>
+          <a:blip r:embed="rId2"/>
+          <a:srcRect t="5696" r="61649"/>
+          <a:stretch>
+            <a:fillRect/>
+          </a:stretch>
+        </p:blipFill>
+        <p:spPr>
+          <a:xfrm>
+            <a:off x="383949" y="1174792"/>
+            <a:ext cx="4381830" cy="4463000"/>
+          </a:xfrm>
+          <a:prstGeom prst="rect">
+            <a:avLst/>
+          </a:prstGeom>
+        </p:spPr>
+      </p:pic>
+      <p:sp>
+        <p:nvSpPr>
+          <p:cNvPr id="5" name="标题 4">
+            <a:extLst>
+              <a:ext uri="{FF2B5EF4-FFF2-40B4-BE49-F238E27FC236}">
+                <a16:creationId xmlns:a16="http://schemas.microsoft.com/office/drawing/2014/main" id="{3DCD0D88-786F-A507-9DBC-E82B7B5C3E72}"/>
+              </a:ext>
+            </a:extLst>
+          </p:cNvPr>
           <p:cNvSpPr>
             <a:spLocks noGrp="1"/>
           </p:cNvSpPr>
@@ -15633,167 +16325,21 @@
           <a:lstStyle/>
           <a:p>
             <a:r>
-              <a:rPr lang="en-US" altLang="zh-CN" dirty="0" err="1"/>
-              <a:t>Gliederung</a:t>
-            </a:r>
-            <a:endParaRPr lang="en-US" altLang="zh-CN" dirty="0"/>
-          </a:p>
-        </p:txBody>
-      </p:sp>
-      <p:sp>
-        <p:nvSpPr>
-          <p:cNvPr id="6" name="内容占位符 5"/>
-          <p:cNvSpPr>
-            <a:spLocks noGrp="1"/>
-          </p:cNvSpPr>
-          <p:nvPr>
-            <p:ph idx="1"/>
-          </p:nvPr>
-        </p:nvSpPr>
-        <p:spPr/>
-        <p:txBody>
-          <a:bodyPr/>
-          <a:lstStyle/>
-          <a:p>
-            <a:r>
-              <a:rPr lang="en-US" altLang="zh-CN" sz="4800" b="1" spc="50" dirty="0">
-                <a:ln w="0"/>
-                <a:solidFill>
-                  <a:srgbClr val="90BBE7"/>
-                </a:solidFill>
-                <a:effectLst>
-                  <a:innerShdw blurRad="63500" dist="50800" dir="13500000">
-                    <a:srgbClr val="000000">
-                      <a:alpha val="50000"/>
-                    </a:srgbClr>
-                  </a:innerShdw>
-                </a:effectLst>
-              </a:rPr>
-              <a:t>Motivation</a:t>
-            </a:r>
-          </a:p>
-          <a:p>
-            <a:r>
-              <a:rPr lang="en-US" altLang="zh-CN" sz="4800" b="1" spc="50" dirty="0" err="1">
-                <a:ln w="0"/>
-                <a:solidFill>
-                  <a:srgbClr val="90BBE7"/>
-                </a:solidFill>
-                <a:effectLst>
-                  <a:innerShdw blurRad="63500" dist="50800" dir="13500000">
-                    <a:srgbClr val="000000">
-                      <a:alpha val="50000"/>
-                    </a:srgbClr>
-                  </a:innerShdw>
-                </a:effectLst>
-              </a:rPr>
+              <a:rPr lang="en-US" altLang="zh-CN"/>
               <a:t>Zeitplan</a:t>
             </a:r>
-            <a:endParaRPr lang="en-US" altLang="zh-CN" sz="4800" b="1" spc="50" dirty="0">
-              <a:ln w="0"/>
-              <a:solidFill>
-                <a:srgbClr val="90BBE7"/>
-              </a:solidFill>
-              <a:effectLst>
-                <a:innerShdw blurRad="63500" dist="50800" dir="13500000">
-                  <a:srgbClr val="000000">
-                    <a:alpha val="50000"/>
-                  </a:srgbClr>
-                </a:innerShdw>
-              </a:effectLst>
-            </a:endParaRPr>
-          </a:p>
-          <a:p>
-            <a:r>
-              <a:rPr lang="en-US" altLang="zh-CN" sz="4800" b="1" spc="50" dirty="0">
-                <a:ln w="0"/>
-                <a:solidFill>
-                  <a:srgbClr val="275AAD"/>
-                </a:solidFill>
-                <a:effectLst>
-                  <a:innerShdw blurRad="63500" dist="50800" dir="13500000">
-                    <a:srgbClr val="000000">
-                      <a:alpha val="50000"/>
-                    </a:srgbClr>
-                  </a:innerShdw>
-                </a:effectLst>
-              </a:rPr>
-              <a:t>Methode</a:t>
-            </a:r>
-          </a:p>
-          <a:p>
-            <a:r>
-              <a:rPr lang="en-US" altLang="zh-CN" sz="4800" b="1" spc="50" dirty="0" err="1">
-                <a:ln w="0"/>
-                <a:solidFill>
-                  <a:srgbClr val="90BBE7"/>
-                </a:solidFill>
-                <a:effectLst>
-                  <a:innerShdw blurRad="63500" dist="50800" dir="13500000">
-                    <a:srgbClr val="000000">
-                      <a:alpha val="50000"/>
-                    </a:srgbClr>
-                  </a:innerShdw>
-                </a:effectLst>
-              </a:rPr>
-              <a:t>Aktuelle</a:t>
-            </a:r>
-            <a:r>
-              <a:rPr lang="en-US" altLang="zh-CN" sz="4800" b="1" spc="50" dirty="0">
-                <a:ln w="0"/>
-                <a:solidFill>
-                  <a:srgbClr val="90BBE7"/>
-                </a:solidFill>
-                <a:effectLst>
-                  <a:innerShdw blurRad="63500" dist="50800" dir="13500000">
-                    <a:srgbClr val="000000">
-                      <a:alpha val="50000"/>
-                    </a:srgbClr>
-                  </a:innerShdw>
-                </a:effectLst>
-              </a:rPr>
-              <a:t> Arbeit</a:t>
-            </a:r>
-          </a:p>
-          <a:p>
-            <a:r>
-              <a:rPr lang="en-US" altLang="zh-CN" sz="4800" b="1" spc="50" dirty="0" err="1">
-                <a:ln w="0"/>
-                <a:solidFill>
-                  <a:srgbClr val="90BBE7"/>
-                </a:solidFill>
-                <a:effectLst>
-                  <a:innerShdw blurRad="63500" dist="50800" dir="13500000">
-                    <a:srgbClr val="000000">
-                      <a:alpha val="50000"/>
-                    </a:srgbClr>
-                  </a:innerShdw>
-                </a:effectLst>
-              </a:rPr>
-              <a:t>Weitere</a:t>
-            </a:r>
-            <a:r>
-              <a:rPr lang="en-US" altLang="zh-CN" sz="4800" b="1" spc="50" dirty="0">
-                <a:ln w="0"/>
-                <a:solidFill>
-                  <a:srgbClr val="90BBE7"/>
-                </a:solidFill>
-                <a:effectLst>
-                  <a:innerShdw blurRad="63500" dist="50800" dir="13500000">
-                    <a:srgbClr val="000000">
-                      <a:alpha val="50000"/>
-                    </a:srgbClr>
-                  </a:innerShdw>
-                </a:effectLst>
-              </a:rPr>
-              <a:t> Arbeit</a:t>
-            </a:r>
-          </a:p>
-        </p:txBody>
-      </p:sp>
-      <p:sp>
-        <p:nvSpPr>
-          <p:cNvPr id="2" name="日期占位符 1"/>
+          </a:p>
+        </p:txBody>
+      </p:sp>
+      <p:sp>
+        <p:nvSpPr>
+          <p:cNvPr id="2" name="日期占位符 1">
+            <a:extLst>
+              <a:ext uri="{FF2B5EF4-FFF2-40B4-BE49-F238E27FC236}">
+                <a16:creationId xmlns:a16="http://schemas.microsoft.com/office/drawing/2014/main" id="{9FF90D35-FB92-3C00-CA86-97F3F1BE33B4}"/>
+              </a:ext>
+            </a:extLst>
+          </p:cNvPr>
           <p:cNvSpPr>
             <a:spLocks noGrp="1"/>
           </p:cNvSpPr>
@@ -15808,7 +16354,7 @@
           <a:p>
             <a:fld id="{D35072EC-9367-4D7B-8652-6A082F0A7E89}" type="datetime5">
               <a:rPr lang="zh-CN" altLang="en-US" smtClean="0"/>
-              <a:t>2026/6/26</a:t>
+              <a:t>2026/6/29</a:t>
             </a:fld>
             <a:endParaRPr lang="de-DE" dirty="0"/>
           </a:p>
@@ -15816,7 +16362,13 @@
       </p:sp>
       <p:sp>
         <p:nvSpPr>
-          <p:cNvPr id="3" name="页脚占位符 2"/>
+          <p:cNvPr id="3" name="页脚占位符 2">
+            <a:extLst>
+              <a:ext uri="{FF2B5EF4-FFF2-40B4-BE49-F238E27FC236}">
+                <a16:creationId xmlns:a16="http://schemas.microsoft.com/office/drawing/2014/main" id="{9B8A0CA9-C55B-41CD-01D0-435BECC860EF}"/>
+              </a:ext>
+            </a:extLst>
+          </p:cNvPr>
           <p:cNvSpPr>
             <a:spLocks noGrp="1"/>
           </p:cNvSpPr>
@@ -15839,7 +16391,13 @@
       </p:sp>
       <p:sp>
         <p:nvSpPr>
-          <p:cNvPr id="4" name="灯片编号占位符 3"/>
+          <p:cNvPr id="4" name="灯片编号占位符 3">
+            <a:extLst>
+              <a:ext uri="{FF2B5EF4-FFF2-40B4-BE49-F238E27FC236}">
+                <a16:creationId xmlns:a16="http://schemas.microsoft.com/office/drawing/2014/main" id="{66BF6321-8913-ABDD-8D32-7BC2D5FE902E}"/>
+              </a:ext>
+            </a:extLst>
+          </p:cNvPr>
           <p:cNvSpPr>
             <a:spLocks noGrp="1"/>
           </p:cNvSpPr>
@@ -15860,30 +16418,328 @@
           </a:p>
         </p:txBody>
       </p:sp>
-      <p:sp>
-        <p:nvSpPr>
-          <p:cNvPr id="8" name="文本框 7"/>
+      <p:cxnSp>
+        <p:nvCxnSpPr>
+          <p:cNvPr id="9" name="直接连接符 8">
+            <a:extLst>
+              <a:ext uri="{FF2B5EF4-FFF2-40B4-BE49-F238E27FC236}">
+                <a16:creationId xmlns:a16="http://schemas.microsoft.com/office/drawing/2014/main" id="{7B2C7B51-03D0-DDB4-94A4-1960494A30DA}"/>
+              </a:ext>
+            </a:extLst>
+          </p:cNvPr>
+          <p:cNvCxnSpPr/>
+          <p:nvPr/>
+        </p:nvCxnSpPr>
+        <p:spPr>
+          <a:xfrm>
+            <a:off x="8991599" y="1587426"/>
+            <a:ext cx="0" cy="3500229"/>
+          </a:xfrm>
+          <a:prstGeom prst="line">
+            <a:avLst/>
+          </a:prstGeom>
+          <a:ln w="25400">
+            <a:solidFill>
+              <a:srgbClr val="FF0000"/>
+            </a:solidFill>
+            <a:tailEnd type="none"/>
+          </a:ln>
+        </p:spPr>
+        <p:style>
+          <a:lnRef idx="1">
+            <a:schemeClr val="accent1"/>
+          </a:lnRef>
+          <a:fillRef idx="0">
+            <a:schemeClr val="accent1"/>
+          </a:fillRef>
+          <a:effectRef idx="0">
+            <a:schemeClr val="accent1"/>
+          </a:effectRef>
+          <a:fontRef idx="minor">
+            <a:schemeClr val="tx1"/>
+          </a:fontRef>
+        </p:style>
+      </p:cxnSp>
+      <p:cxnSp>
+        <p:nvCxnSpPr>
+          <p:cNvPr id="14" name="直接连接符 13">
+            <a:extLst>
+              <a:ext uri="{FF2B5EF4-FFF2-40B4-BE49-F238E27FC236}">
+                <a16:creationId xmlns:a16="http://schemas.microsoft.com/office/drawing/2014/main" id="{2049DC45-C5E5-C6CF-4DF0-337C13E0DDD9}"/>
+              </a:ext>
+            </a:extLst>
+          </p:cNvPr>
+          <p:cNvCxnSpPr/>
+          <p:nvPr/>
+        </p:nvCxnSpPr>
+        <p:spPr>
+          <a:xfrm>
+            <a:off x="9521372" y="1587426"/>
+            <a:ext cx="0" cy="3500229"/>
+          </a:xfrm>
+          <a:prstGeom prst="line">
+            <a:avLst/>
+          </a:prstGeom>
+          <a:ln w="25400">
+            <a:solidFill>
+              <a:srgbClr val="FF0000"/>
+            </a:solidFill>
+            <a:tailEnd type="none"/>
+          </a:ln>
+        </p:spPr>
+        <p:style>
+          <a:lnRef idx="1">
+            <a:schemeClr val="accent1"/>
+          </a:lnRef>
+          <a:fillRef idx="0">
+            <a:schemeClr val="accent1"/>
+          </a:fillRef>
+          <a:effectRef idx="0">
+            <a:schemeClr val="accent1"/>
+          </a:effectRef>
+          <a:fontRef idx="minor">
+            <a:schemeClr val="tx1"/>
+          </a:fontRef>
+        </p:style>
+      </p:cxnSp>
+      <p:sp>
+        <p:nvSpPr>
+          <p:cNvPr id="15" name="文本框 14">
+            <a:extLst>
+              <a:ext uri="{FF2B5EF4-FFF2-40B4-BE49-F238E27FC236}">
+                <a16:creationId xmlns:a16="http://schemas.microsoft.com/office/drawing/2014/main" id="{C8E80705-A837-5015-131B-59B530B8B9B8}"/>
+              </a:ext>
+            </a:extLst>
+          </p:cNvPr>
           <p:cNvSpPr txBox="1"/>
           <p:nvPr/>
         </p:nvSpPr>
         <p:spPr>
           <a:xfrm>
-            <a:off x="3555047" y="2859088"/>
-            <a:ext cx="5080000" cy="635000"/>
+            <a:off x="8783850" y="5087656"/>
+            <a:ext cx="415498" cy="369332"/>
           </a:xfrm>
           <a:prstGeom prst="rect">
             <a:avLst/>
           </a:prstGeom>
+          <a:noFill/>
         </p:spPr>
         <p:txBody>
-          <a:bodyPr/>
+          <a:bodyPr wrap="none" rtlCol="0">
+            <a:spAutoFit/>
+          </a:bodyPr>
           <a:lstStyle/>
           <a:p>
-            <a:endParaRPr sz="1600"/>
+            <a:r>
+              <a:rPr lang="zh-CN" altLang="en-US" dirty="0"/>
+              <a:t>①</a:t>
+            </a:r>
+          </a:p>
+        </p:txBody>
+      </p:sp>
+      <p:sp>
+        <p:nvSpPr>
+          <p:cNvPr id="16" name="文本框 15">
+            <a:extLst>
+              <a:ext uri="{FF2B5EF4-FFF2-40B4-BE49-F238E27FC236}">
+                <a16:creationId xmlns:a16="http://schemas.microsoft.com/office/drawing/2014/main" id="{3FDCD79B-7F56-4B19-ABEE-83BB4F8BAD88}"/>
+              </a:ext>
+            </a:extLst>
+          </p:cNvPr>
+          <p:cNvSpPr txBox="1"/>
+          <p:nvPr/>
+        </p:nvSpPr>
+        <p:spPr>
+          <a:xfrm>
+            <a:off x="9313623" y="5087656"/>
+            <a:ext cx="415498" cy="369332"/>
+          </a:xfrm>
+          <a:prstGeom prst="rect">
+            <a:avLst/>
+          </a:prstGeom>
+          <a:noFill/>
+        </p:spPr>
+        <p:txBody>
+          <a:bodyPr wrap="none" rtlCol="0">
+            <a:spAutoFit/>
+          </a:bodyPr>
+          <a:lstStyle/>
+          <a:p>
+            <a:r>
+              <a:rPr lang="zh-CN" altLang="en-US" dirty="0"/>
+              <a:t>②</a:t>
+            </a:r>
+          </a:p>
+        </p:txBody>
+      </p:sp>
+      <p:cxnSp>
+        <p:nvCxnSpPr>
+          <p:cNvPr id="17" name="直接连接符 16">
+            <a:extLst>
+              <a:ext uri="{FF2B5EF4-FFF2-40B4-BE49-F238E27FC236}">
+                <a16:creationId xmlns:a16="http://schemas.microsoft.com/office/drawing/2014/main" id="{349CC5CC-C1A3-B2C1-A706-A65FF70ADC4B}"/>
+              </a:ext>
+            </a:extLst>
+          </p:cNvPr>
+          <p:cNvCxnSpPr/>
+          <p:nvPr/>
+        </p:nvCxnSpPr>
+        <p:spPr>
+          <a:xfrm>
+            <a:off x="10036629" y="1587427"/>
+            <a:ext cx="0" cy="3500229"/>
+          </a:xfrm>
+          <a:prstGeom prst="line">
+            <a:avLst/>
+          </a:prstGeom>
+          <a:ln w="25400">
+            <a:solidFill>
+              <a:srgbClr val="FF0000"/>
+            </a:solidFill>
+            <a:tailEnd type="none"/>
+          </a:ln>
+        </p:spPr>
+        <p:style>
+          <a:lnRef idx="1">
+            <a:schemeClr val="accent1"/>
+          </a:lnRef>
+          <a:fillRef idx="0">
+            <a:schemeClr val="accent1"/>
+          </a:fillRef>
+          <a:effectRef idx="0">
+            <a:schemeClr val="accent1"/>
+          </a:effectRef>
+          <a:fontRef idx="minor">
+            <a:schemeClr val="tx1"/>
+          </a:fontRef>
+        </p:style>
+      </p:cxnSp>
+      <p:sp>
+        <p:nvSpPr>
+          <p:cNvPr id="18" name="文本框 17">
+            <a:extLst>
+              <a:ext uri="{FF2B5EF4-FFF2-40B4-BE49-F238E27FC236}">
+                <a16:creationId xmlns:a16="http://schemas.microsoft.com/office/drawing/2014/main" id="{4597FCAA-CCBF-3A7D-FA9D-425F157A02DA}"/>
+              </a:ext>
+            </a:extLst>
+          </p:cNvPr>
+          <p:cNvSpPr txBox="1"/>
+          <p:nvPr/>
+        </p:nvSpPr>
+        <p:spPr>
+          <a:xfrm>
+            <a:off x="9779000" y="5085907"/>
+            <a:ext cx="415498" cy="369332"/>
+          </a:xfrm>
+          <a:prstGeom prst="rect">
+            <a:avLst/>
+          </a:prstGeom>
+          <a:noFill/>
+        </p:spPr>
+        <p:txBody>
+          <a:bodyPr wrap="none" rtlCol="0">
+            <a:spAutoFit/>
+          </a:bodyPr>
+          <a:lstStyle/>
+          <a:p>
+            <a:r>
+              <a:rPr lang="zh-CN" altLang="en-US" dirty="0"/>
+              <a:t>③</a:t>
+            </a:r>
+          </a:p>
+        </p:txBody>
+      </p:sp>
+      <p:sp>
+        <p:nvSpPr>
+          <p:cNvPr id="19" name="文本框 18">
+            <a:extLst>
+              <a:ext uri="{FF2B5EF4-FFF2-40B4-BE49-F238E27FC236}">
+                <a16:creationId xmlns:a16="http://schemas.microsoft.com/office/drawing/2014/main" id="{B1C08EBE-85A7-891A-4B2F-DE61E389DB9C}"/>
+              </a:ext>
+            </a:extLst>
+          </p:cNvPr>
+          <p:cNvSpPr txBox="1"/>
+          <p:nvPr/>
+        </p:nvSpPr>
+        <p:spPr>
+          <a:xfrm>
+            <a:off x="383949" y="5085907"/>
+            <a:ext cx="3224024" cy="923330"/>
+          </a:xfrm>
+          <a:prstGeom prst="rect">
+            <a:avLst/>
+          </a:prstGeom>
+          <a:noFill/>
+        </p:spPr>
+        <p:txBody>
+          <a:bodyPr wrap="none" rtlCol="0">
+            <a:spAutoFit/>
+          </a:bodyPr>
+          <a:lstStyle/>
+          <a:p>
+            <a:r>
+              <a:rPr lang="zh-CN" altLang="en-US" dirty="0"/>
+              <a:t>①</a:t>
+            </a:r>
+            <a:r>
+              <a:rPr lang="en-US" altLang="zh-CN" dirty="0"/>
+              <a:t>:</a:t>
+            </a:r>
+            <a:r>
+              <a:rPr lang="en-US" altLang="zh-CN" dirty="0" err="1"/>
+              <a:t>komplette</a:t>
+            </a:r>
+            <a:r>
+              <a:rPr lang="en-US" altLang="zh-CN" dirty="0"/>
+              <a:t> Baseline</a:t>
+            </a:r>
+          </a:p>
+          <a:p>
+            <a:r>
+              <a:rPr lang="zh-CN" altLang="en-US" dirty="0"/>
+              <a:t>②</a:t>
+            </a:r>
+            <a:r>
+              <a:rPr lang="en-US" altLang="zh-CN" dirty="0"/>
+              <a:t>:</a:t>
+            </a:r>
+            <a:r>
+              <a:rPr lang="en-US" altLang="zh-CN" dirty="0" err="1"/>
+              <a:t>komplette</a:t>
+            </a:r>
+            <a:r>
+              <a:rPr lang="en-US" altLang="zh-CN" dirty="0"/>
+              <a:t> Transfer </a:t>
+            </a:r>
+            <a:r>
+              <a:rPr lang="en-US" altLang="zh-CN" dirty="0" err="1"/>
+              <a:t>Lerning</a:t>
+            </a:r>
+            <a:endParaRPr lang="en-US" altLang="zh-CN" dirty="0"/>
+          </a:p>
+          <a:p>
+            <a:r>
+              <a:rPr lang="zh-CN" altLang="en-US" dirty="0"/>
+              <a:t>③</a:t>
+            </a:r>
+            <a:r>
+              <a:rPr lang="en-US" altLang="zh-CN" dirty="0"/>
+              <a:t>:Alle Arbeit </a:t>
+            </a:r>
+            <a:r>
+              <a:rPr lang="en-US" altLang="zh-CN" dirty="0" err="1"/>
+              <a:t>komplett</a:t>
+            </a:r>
+            <a:endParaRPr lang="zh-CN" altLang="en-US" dirty="0"/>
           </a:p>
         </p:txBody>
       </p:sp>
     </p:spTree>
+    <p:extLst>
+      <p:ext uri="{BB962C8B-B14F-4D97-AF65-F5344CB8AC3E}">
+        <p14:creationId xmlns:p14="http://schemas.microsoft.com/office/powerpoint/2010/main" val="3965368589"/>
+      </p:ext>
+    </p:extLst>
   </p:cSld>
   <p:clrMapOvr>
     <a:masterClrMapping/>
@@ -15924,13 +16780,10 @@
           <a:lstStyle/>
           <a:p>
             <a:r>
-              <a:rPr lang="en-US" altLang="zh-CN" dirty="0"/>
-              <a:t>2RC Modell</a:t>
-            </a:r>
-            <a:r>
-              <a:rPr lang="en-US" altLang="zh-CN" baseline="30000" dirty="0"/>
-              <a:t>1</a:t>
-            </a:r>
+              <a:rPr lang="en-US" altLang="zh-CN" dirty="0" err="1"/>
+              <a:t>Gliederung</a:t>
+            </a:r>
+            <a:endParaRPr lang="en-US" altLang="zh-CN" dirty="0"/>
           </a:p>
         </p:txBody>
       </p:sp>
@@ -15949,123 +16802,139 @@
           <a:bodyPr/>
           <a:lstStyle/>
           <a:p>
-            <a:endParaRPr lang="en-US" altLang="zh-CN" dirty="0"/>
-          </a:p>
-          <a:p>
-            <a:endParaRPr lang="en-US" altLang="zh-CN" dirty="0"/>
-          </a:p>
-          <a:p>
-            <a:endParaRPr lang="en-US" altLang="zh-CN" dirty="0"/>
-          </a:p>
-          <a:p>
-            <a:endParaRPr lang="en-US" altLang="zh-CN" dirty="0"/>
-          </a:p>
-          <a:p>
-            <a:r>
-              <a:rPr lang="en-US" altLang="zh-CN" dirty="0"/>
-              <a:t>U1:Spannung von </a:t>
-            </a:r>
-            <a:r>
-              <a:rPr lang="en-US" altLang="zh-CN" dirty="0" err="1"/>
-              <a:t>Aktivierungsdepolarisation</a:t>
-            </a:r>
-            <a:endParaRPr lang="en-US" altLang="zh-CN" dirty="0"/>
-          </a:p>
-          <a:p>
-            <a:pPr lvl="1"/>
-            <a:r>
-              <a:rPr lang="en-US" altLang="zh-CN" dirty="0" err="1"/>
-              <a:t>Ladungstransfer</a:t>
-            </a:r>
-            <a:r>
-              <a:rPr lang="en-US" altLang="zh-CN" dirty="0"/>
-              <a:t> an </a:t>
-            </a:r>
-            <a:r>
-              <a:rPr lang="en-US" altLang="zh-CN" dirty="0" err="1"/>
-              <a:t>Elektrodenoberfl</a:t>
-            </a:r>
-            <a:r>
-              <a:rPr lang="de-DE" altLang="zh-CN" dirty="0" err="1"/>
-              <a:t>äche</a:t>
-            </a:r>
-            <a:endParaRPr lang="en-US" altLang="zh-CN" dirty="0"/>
-          </a:p>
-          <a:p>
-            <a:r>
-              <a:rPr lang="en-US" altLang="zh-CN" dirty="0"/>
-              <a:t>U2: </a:t>
-            </a:r>
-            <a:r>
-              <a:rPr lang="en-US" altLang="zh-CN" dirty="0" err="1"/>
-              <a:t>Spannung</a:t>
-            </a:r>
-            <a:r>
-              <a:rPr lang="en-US" altLang="zh-CN" dirty="0"/>
-              <a:t> von </a:t>
-            </a:r>
-            <a:r>
-              <a:rPr lang="en-US" altLang="zh-CN" dirty="0" err="1"/>
-              <a:t>Konzentrationsdepolarisation</a:t>
-            </a:r>
-            <a:endParaRPr lang="en-US" altLang="zh-CN" dirty="0"/>
-          </a:p>
-          <a:p>
-            <a:pPr lvl="1"/>
-            <a:r>
-              <a:rPr lang="en-US" altLang="zh-CN" dirty="0"/>
-              <a:t>Li-</a:t>
-            </a:r>
-            <a:r>
-              <a:rPr lang="en-US" altLang="zh-CN" dirty="0" err="1"/>
-              <a:t>Ionen</a:t>
-            </a:r>
-            <a:r>
-              <a:rPr lang="en-US" altLang="zh-CN" dirty="0"/>
-              <a:t>-Diffusion </a:t>
-            </a:r>
-            <a:r>
-              <a:rPr lang="en-US" altLang="zh-CN" dirty="0" err="1"/>
-              <a:t>im</a:t>
-            </a:r>
-            <a:r>
-              <a:rPr lang="en-US" altLang="zh-CN" dirty="0"/>
-              <a:t> </a:t>
-            </a:r>
-            <a:r>
-              <a:rPr lang="en-US" altLang="zh-CN" dirty="0" err="1"/>
-              <a:t>Aktivmatrial</a:t>
-            </a:r>
-            <a:endParaRPr lang="en-US" altLang="zh-CN" dirty="0"/>
-          </a:p>
-          <a:p>
-            <a:r>
-              <a:rPr lang="en-US" altLang="zh-CN" dirty="0"/>
-              <a:t>Ʈ1(</a:t>
-            </a:r>
-            <a:r>
-              <a:rPr lang="en-US" altLang="zh-CN" dirty="0" err="1"/>
-              <a:t>Aktivierung</a:t>
-            </a:r>
-            <a:r>
-              <a:rPr lang="en-US" altLang="zh-CN" dirty="0"/>
-              <a:t>)&lt;Ʈ2(</a:t>
-            </a:r>
-            <a:r>
-              <a:rPr lang="en-US" altLang="zh-CN" dirty="0" err="1"/>
-              <a:t>Konzentration</a:t>
-            </a:r>
-            <a:r>
-              <a:rPr lang="en-US" altLang="zh-CN" dirty="0"/>
-              <a:t>/ Diffusion)</a:t>
-            </a:r>
-            <a:endParaRPr lang="zh-CN" altLang="en-US" dirty="0"/>
-          </a:p>
-          <a:p>
-            <a:endParaRPr lang="zh-CN" altLang="en-US" dirty="0"/>
-          </a:p>
-          <a:p>
-            <a:endParaRPr lang="en-US" altLang="zh-CN" dirty="0"/>
+            <a:r>
+              <a:rPr lang="en-US" altLang="zh-CN" sz="4800" b="1" spc="50" dirty="0">
+                <a:ln w="0"/>
+                <a:solidFill>
+                  <a:srgbClr val="90BBE7"/>
+                </a:solidFill>
+                <a:effectLst>
+                  <a:innerShdw blurRad="63500" dist="50800" dir="13500000">
+                    <a:srgbClr val="000000">
+                      <a:alpha val="50000"/>
+                    </a:srgbClr>
+                  </a:innerShdw>
+                </a:effectLst>
+              </a:rPr>
+              <a:t>Motivation</a:t>
+            </a:r>
+          </a:p>
+          <a:p>
+            <a:r>
+              <a:rPr lang="en-US" altLang="zh-CN" sz="4800" b="1" spc="50" dirty="0" err="1">
+                <a:ln w="0"/>
+                <a:solidFill>
+                  <a:srgbClr val="90BBE7"/>
+                </a:solidFill>
+                <a:effectLst>
+                  <a:innerShdw blurRad="63500" dist="50800" dir="13500000">
+                    <a:srgbClr val="000000">
+                      <a:alpha val="50000"/>
+                    </a:srgbClr>
+                  </a:innerShdw>
+                </a:effectLst>
+              </a:rPr>
+              <a:t>Zeitplan</a:t>
+            </a:r>
+            <a:endParaRPr lang="en-US" altLang="zh-CN" sz="4800" b="1" spc="50" dirty="0">
+              <a:ln w="0"/>
+              <a:solidFill>
+                <a:srgbClr val="90BBE7"/>
+              </a:solidFill>
+              <a:effectLst>
+                <a:innerShdw blurRad="63500" dist="50800" dir="13500000">
+                  <a:srgbClr val="000000">
+                    <a:alpha val="50000"/>
+                  </a:srgbClr>
+                </a:innerShdw>
+              </a:effectLst>
+            </a:endParaRPr>
+          </a:p>
+          <a:p>
+            <a:r>
+              <a:rPr lang="en-US" altLang="zh-CN" sz="4800" b="1" spc="50" dirty="0">
+                <a:ln w="0"/>
+                <a:solidFill>
+                  <a:srgbClr val="275AAD"/>
+                </a:solidFill>
+                <a:effectLst>
+                  <a:innerShdw blurRad="63500" dist="50800" dir="13500000">
+                    <a:srgbClr val="000000">
+                      <a:alpha val="50000"/>
+                    </a:srgbClr>
+                  </a:innerShdw>
+                </a:effectLst>
+              </a:rPr>
+              <a:t>Methode</a:t>
+            </a:r>
+          </a:p>
+          <a:p>
+            <a:r>
+              <a:rPr lang="en-US" altLang="zh-CN" sz="4800" b="1" spc="50" dirty="0" err="1">
+                <a:ln w="0"/>
+                <a:solidFill>
+                  <a:srgbClr val="90BBE7"/>
+                </a:solidFill>
+                <a:effectLst>
+                  <a:innerShdw blurRad="63500" dist="50800" dir="13500000">
+                    <a:srgbClr val="000000">
+                      <a:alpha val="50000"/>
+                    </a:srgbClr>
+                  </a:innerShdw>
+                </a:effectLst>
+              </a:rPr>
+              <a:t>Aktuelle</a:t>
+            </a:r>
+            <a:r>
+              <a:rPr lang="en-US" altLang="zh-CN" sz="4800" b="1" spc="50" dirty="0">
+                <a:ln w="0"/>
+                <a:solidFill>
+                  <a:srgbClr val="90BBE7"/>
+                </a:solidFill>
+                <a:effectLst>
+                  <a:innerShdw blurRad="63500" dist="50800" dir="13500000">
+                    <a:srgbClr val="000000">
+                      <a:alpha val="50000"/>
+                    </a:srgbClr>
+                  </a:innerShdw>
+                </a:effectLst>
+              </a:rPr>
+              <a:t> Arbeit</a:t>
+            </a:r>
+          </a:p>
+          <a:p>
+            <a:r>
+              <a:rPr lang="en-US" altLang="zh-CN" sz="4800" b="1" spc="50" dirty="0" err="1">
+                <a:ln w="0"/>
+                <a:solidFill>
+                  <a:srgbClr val="90BBE7"/>
+                </a:solidFill>
+                <a:effectLst>
+                  <a:innerShdw blurRad="63500" dist="50800" dir="13500000">
+                    <a:srgbClr val="000000">
+                      <a:alpha val="50000"/>
+                    </a:srgbClr>
+                  </a:innerShdw>
+                </a:effectLst>
+              </a:rPr>
+              <a:t>Weitere</a:t>
+            </a:r>
+            <a:r>
+              <a:rPr lang="en-US" altLang="zh-CN" sz="4800" b="1" spc="50" dirty="0">
+                <a:ln w="0"/>
+                <a:solidFill>
+                  <a:srgbClr val="90BBE7"/>
+                </a:solidFill>
+                <a:effectLst>
+                  <a:innerShdw blurRad="63500" dist="50800" dir="13500000">
+                    <a:srgbClr val="000000">
+                      <a:alpha val="50000"/>
+                    </a:srgbClr>
+                  </a:innerShdw>
+                </a:effectLst>
+              </a:rPr>
+              <a:t> Arbeit</a:t>
+            </a:r>
           </a:p>
         </p:txBody>
       </p:sp>
@@ -16086,7 +16955,7 @@
           <a:p>
             <a:fld id="{D35072EC-9367-4D7B-8652-6A082F0A7E89}" type="datetime5">
               <a:rPr lang="zh-CN" altLang="en-US" smtClean="0"/>
-              <a:t>2026/6/26</a:t>
+              <a:t>2026/6/29</a:t>
             </a:fld>
             <a:endParaRPr lang="de-DE" dirty="0"/>
           </a:p>
@@ -16133,6 +17002,300 @@
             <a:fld id="{4D01E63C-D794-4429-8564-635E6253AC5C}" type="slidenum">
               <a:rPr lang="en-US" smtClean="0"/>
               <a:t>8</a:t>
+            </a:fld>
+            <a:endParaRPr lang="en-US" dirty="0"/>
+          </a:p>
+        </p:txBody>
+      </p:sp>
+      <p:sp>
+        <p:nvSpPr>
+          <p:cNvPr id="8" name="文本框 7"/>
+          <p:cNvSpPr txBox="1"/>
+          <p:nvPr/>
+        </p:nvSpPr>
+        <p:spPr>
+          <a:xfrm>
+            <a:off x="3555047" y="2859088"/>
+            <a:ext cx="5080000" cy="635000"/>
+          </a:xfrm>
+          <a:prstGeom prst="rect">
+            <a:avLst/>
+          </a:prstGeom>
+        </p:spPr>
+        <p:txBody>
+          <a:bodyPr/>
+          <a:lstStyle/>
+          <a:p>
+            <a:endParaRPr sz="1600"/>
+          </a:p>
+        </p:txBody>
+      </p:sp>
+    </p:spTree>
+  </p:cSld>
+  <p:clrMapOvr>
+    <a:masterClrMapping/>
+  </p:clrMapOvr>
+</p:sld>
+</file>
+
+<file path=ppt/slides/slide9.xml><?xml version="1.0" encoding="utf-8"?>
+<p:sld xmlns:a="http://schemas.openxmlformats.org/drawingml/2006/main" xmlns:r="http://schemas.openxmlformats.org/officeDocument/2006/relationships" xmlns:p="http://schemas.openxmlformats.org/presentationml/2006/main">
+  <p:cSld>
+    <p:spTree>
+      <p:nvGrpSpPr>
+        <p:cNvPr id="1" name=""/>
+        <p:cNvGrpSpPr/>
+        <p:nvPr/>
+      </p:nvGrpSpPr>
+      <p:grpSpPr>
+        <a:xfrm>
+          <a:off x="0" y="0"/>
+          <a:ext cx="0" cy="0"/>
+          <a:chOff x="0" y="0"/>
+          <a:chExt cx="0" cy="0"/>
+        </a:xfrm>
+      </p:grpSpPr>
+      <p:sp>
+        <p:nvSpPr>
+          <p:cNvPr id="5" name="标题 4"/>
+          <p:cNvSpPr>
+            <a:spLocks noGrp="1"/>
+          </p:cNvSpPr>
+          <p:nvPr>
+            <p:ph type="title"/>
+          </p:nvPr>
+        </p:nvSpPr>
+        <p:spPr/>
+        <p:txBody>
+          <a:bodyPr/>
+          <a:lstStyle/>
+          <a:p>
+            <a:r>
+              <a:rPr lang="en-US" altLang="zh-CN" dirty="0"/>
+              <a:t>2RC Modell</a:t>
+            </a:r>
+            <a:r>
+              <a:rPr lang="en-US" altLang="zh-CN" baseline="30000" dirty="0"/>
+              <a:t>1</a:t>
+            </a:r>
+          </a:p>
+        </p:txBody>
+      </p:sp>
+      <p:sp>
+        <p:nvSpPr>
+          <p:cNvPr id="6" name="内容占位符 5"/>
+          <p:cNvSpPr>
+            <a:spLocks noGrp="1"/>
+          </p:cNvSpPr>
+          <p:nvPr>
+            <p:ph idx="1"/>
+          </p:nvPr>
+        </p:nvSpPr>
+        <p:spPr/>
+        <p:txBody>
+          <a:bodyPr/>
+          <a:lstStyle/>
+          <a:p>
+            <a:endParaRPr lang="en-US" altLang="zh-CN" dirty="0"/>
+          </a:p>
+          <a:p>
+            <a:endParaRPr lang="en-US" altLang="zh-CN" dirty="0"/>
+          </a:p>
+          <a:p>
+            <a:endParaRPr lang="en-US" altLang="zh-CN" dirty="0"/>
+          </a:p>
+          <a:p>
+            <a:endParaRPr lang="en-US" altLang="zh-CN" dirty="0"/>
+          </a:p>
+          <a:p>
+            <a:r>
+              <a:rPr lang="en-US" altLang="zh-CN" dirty="0"/>
+              <a:t>U1:Spannung von </a:t>
+            </a:r>
+            <a:r>
+              <a:rPr lang="en-US" altLang="zh-CN" dirty="0" err="1"/>
+              <a:t>Aktivierungsdepolarisation</a:t>
+            </a:r>
+            <a:endParaRPr lang="en-US" altLang="zh-CN" dirty="0"/>
+          </a:p>
+          <a:p>
+            <a:pPr lvl="1"/>
+            <a:r>
+              <a:rPr lang="en-US" altLang="zh-CN" dirty="0" err="1"/>
+              <a:t>Ladungstransfer</a:t>
+            </a:r>
+            <a:r>
+              <a:rPr lang="en-US" altLang="zh-CN" dirty="0"/>
+              <a:t> an </a:t>
+            </a:r>
+            <a:r>
+              <a:rPr lang="en-US" altLang="zh-CN" dirty="0" err="1"/>
+              <a:t>Elektrodenoberfl</a:t>
+            </a:r>
+            <a:r>
+              <a:rPr lang="de-DE" altLang="zh-CN" dirty="0" err="1"/>
+              <a:t>äche</a:t>
+            </a:r>
+            <a:endParaRPr lang="en-US" altLang="zh-CN" dirty="0"/>
+          </a:p>
+          <a:p>
+            <a:r>
+              <a:rPr lang="en-US" altLang="zh-CN" dirty="0"/>
+              <a:t>U2: </a:t>
+            </a:r>
+            <a:r>
+              <a:rPr lang="en-US" altLang="zh-CN" dirty="0" err="1"/>
+              <a:t>Spannung</a:t>
+            </a:r>
+            <a:r>
+              <a:rPr lang="en-US" altLang="zh-CN" dirty="0"/>
+              <a:t> von </a:t>
+            </a:r>
+            <a:r>
+              <a:rPr lang="en-US" altLang="zh-CN" dirty="0" err="1"/>
+              <a:t>Konzentrationsdepolarisation</a:t>
+            </a:r>
+            <a:endParaRPr lang="en-US" altLang="zh-CN" dirty="0"/>
+          </a:p>
+          <a:p>
+            <a:pPr lvl="1"/>
+            <a:r>
+              <a:rPr lang="en-US" altLang="zh-CN" dirty="0"/>
+              <a:t>Li-</a:t>
+            </a:r>
+            <a:r>
+              <a:rPr lang="en-US" altLang="zh-CN" dirty="0" err="1"/>
+              <a:t>Ionen</a:t>
+            </a:r>
+            <a:r>
+              <a:rPr lang="en-US" altLang="zh-CN" dirty="0"/>
+              <a:t>-Diffusion </a:t>
+            </a:r>
+            <a:r>
+              <a:rPr lang="en-US" altLang="zh-CN" dirty="0" err="1"/>
+              <a:t>im</a:t>
+            </a:r>
+            <a:r>
+              <a:rPr lang="en-US" altLang="zh-CN" dirty="0"/>
+              <a:t> </a:t>
+            </a:r>
+            <a:r>
+              <a:rPr lang="en-US" altLang="zh-CN" dirty="0" err="1"/>
+              <a:t>Aktivmatrial</a:t>
+            </a:r>
+            <a:endParaRPr lang="en-US" altLang="zh-CN" dirty="0"/>
+          </a:p>
+          <a:p>
+            <a:r>
+              <a:rPr lang="en-US" altLang="zh-CN" dirty="0"/>
+              <a:t>Ʈ1(</a:t>
+            </a:r>
+            <a:r>
+              <a:rPr lang="en-US" altLang="zh-CN" dirty="0" err="1"/>
+              <a:t>Aktivierung</a:t>
+            </a:r>
+            <a:r>
+              <a:rPr lang="en-US" altLang="zh-CN" dirty="0"/>
+              <a:t>)&lt;Ʈ2(</a:t>
+            </a:r>
+            <a:r>
+              <a:rPr lang="en-US" altLang="zh-CN" dirty="0" err="1"/>
+              <a:t>Konzentration</a:t>
+            </a:r>
+            <a:r>
+              <a:rPr lang="en-US" altLang="zh-CN" dirty="0"/>
+              <a:t>/ Diffusion)</a:t>
+            </a:r>
+          </a:p>
+          <a:p>
+            <a:endParaRPr lang="en-US" altLang="zh-CN" dirty="0"/>
+          </a:p>
+          <a:p>
+            <a:endParaRPr lang="en-US" altLang="zh-CN" dirty="0"/>
+          </a:p>
+          <a:p>
+            <a:r>
+              <a:rPr lang="zh-CN" altLang="en-US" dirty="0"/>
+              <a:t>讲解</a:t>
+            </a:r>
+            <a:r>
+              <a:rPr lang="en-US" altLang="zh-CN" dirty="0"/>
+              <a:t>RC</a:t>
+            </a:r>
+            <a:endParaRPr lang="zh-CN" altLang="en-US" dirty="0"/>
+          </a:p>
+          <a:p>
+            <a:endParaRPr lang="zh-CN" altLang="en-US" dirty="0"/>
+          </a:p>
+          <a:p>
+            <a:endParaRPr lang="en-US" altLang="zh-CN" dirty="0"/>
+          </a:p>
+        </p:txBody>
+      </p:sp>
+      <p:sp>
+        <p:nvSpPr>
+          <p:cNvPr id="2" name="日期占位符 1"/>
+          <p:cNvSpPr>
+            <a:spLocks noGrp="1"/>
+          </p:cNvSpPr>
+          <p:nvPr>
+            <p:ph type="dt" sz="half" idx="10"/>
+          </p:nvPr>
+        </p:nvSpPr>
+        <p:spPr/>
+        <p:txBody>
+          <a:bodyPr/>
+          <a:lstStyle/>
+          <a:p>
+            <a:fld id="{D35072EC-9367-4D7B-8652-6A082F0A7E89}" type="datetime5">
+              <a:rPr lang="zh-CN" altLang="en-US" smtClean="0"/>
+              <a:t>2026/6/29</a:t>
+            </a:fld>
+            <a:endParaRPr lang="de-DE" dirty="0"/>
+          </a:p>
+        </p:txBody>
+      </p:sp>
+      <p:sp>
+        <p:nvSpPr>
+          <p:cNvPr id="3" name="页脚占位符 2"/>
+          <p:cNvSpPr>
+            <a:spLocks noGrp="1"/>
+          </p:cNvSpPr>
+          <p:nvPr>
+            <p:ph type="ftr" sz="quarter" idx="11"/>
+          </p:nvPr>
+        </p:nvSpPr>
+        <p:spPr/>
+        <p:txBody>
+          <a:bodyPr/>
+          <a:lstStyle/>
+          <a:p>
+            <a:r>
+              <a:rPr lang="en-US"/>
+              <a:t>Liang Huang</a:t>
+            </a:r>
+            <a:endParaRPr lang="en-US" dirty="0"/>
+          </a:p>
+        </p:txBody>
+      </p:sp>
+      <p:sp>
+        <p:nvSpPr>
+          <p:cNvPr id="4" name="灯片编号占位符 3"/>
+          <p:cNvSpPr>
+            <a:spLocks noGrp="1"/>
+          </p:cNvSpPr>
+          <p:nvPr>
+            <p:ph type="sldNum" sz="quarter" idx="12"/>
+          </p:nvPr>
+        </p:nvSpPr>
+        <p:spPr/>
+        <p:txBody>
+          <a:bodyPr/>
+          <a:lstStyle/>
+          <a:p>
+            <a:fld id="{4D01E63C-D794-4429-8564-635E6253AC5C}" type="slidenum">
+              <a:rPr lang="en-US" smtClean="0"/>
+              <a:t>9</a:t>
             </a:fld>
             <a:endParaRPr lang="en-US" dirty="0"/>
           </a:p>
@@ -16265,293 +17428,6 @@
         </a:graphic>
       </p:graphicFrame>
     </p:spTree>
-  </p:cSld>
-  <p:clrMapOvr>
-    <a:masterClrMapping/>
-  </p:clrMapOvr>
-</p:sld>
-</file>
-
-<file path=ppt/slides/slide9.xml><?xml version="1.0" encoding="utf-8"?>
-<p:sld xmlns:a="http://schemas.openxmlformats.org/drawingml/2006/main" xmlns:r="http://schemas.openxmlformats.org/officeDocument/2006/relationships" xmlns:p="http://schemas.openxmlformats.org/presentationml/2006/main">
-  <p:cSld>
-    <p:spTree>
-      <p:nvGrpSpPr>
-        <p:cNvPr id="1" name=""/>
-        <p:cNvGrpSpPr/>
-        <p:nvPr/>
-      </p:nvGrpSpPr>
-      <p:grpSpPr>
-        <a:xfrm>
-          <a:off x="0" y="0"/>
-          <a:ext cx="0" cy="0"/>
-          <a:chOff x="0" y="0"/>
-          <a:chExt cx="0" cy="0"/>
-        </a:xfrm>
-      </p:grpSpPr>
-      <p:sp>
-        <p:nvSpPr>
-          <p:cNvPr id="2" name="标题 1">
-            <a:extLst>
-              <a:ext uri="{FF2B5EF4-FFF2-40B4-BE49-F238E27FC236}">
-                <a16:creationId xmlns:a16="http://schemas.microsoft.com/office/drawing/2014/main" id="{113E0EDC-BA02-7F15-EB4B-7CFB27D93A05}"/>
-              </a:ext>
-            </a:extLst>
-          </p:cNvPr>
-          <p:cNvSpPr>
-            <a:spLocks noGrp="1"/>
-          </p:cNvSpPr>
-          <p:nvPr>
-            <p:ph type="title"/>
-          </p:nvPr>
-        </p:nvSpPr>
-        <p:spPr/>
-        <p:txBody>
-          <a:bodyPr/>
-          <a:lstStyle/>
-          <a:p>
-            <a:r>
-              <a:rPr lang="de-DE" altLang="zh-CN" dirty="0"/>
-              <a:t>Kapazitätsrückgewinnung während Ruhephasen</a:t>
-            </a:r>
-            <a:r>
-              <a:rPr lang="de-DE" altLang="zh-CN" baseline="30000" dirty="0"/>
-              <a:t>2</a:t>
-            </a:r>
-            <a:endParaRPr lang="zh-CN" altLang="en-US" baseline="30000" dirty="0"/>
-          </a:p>
-        </p:txBody>
-      </p:sp>
-      <p:sp>
-        <p:nvSpPr>
-          <p:cNvPr id="3" name="内容占位符 2">
-            <a:extLst>
-              <a:ext uri="{FF2B5EF4-FFF2-40B4-BE49-F238E27FC236}">
-                <a16:creationId xmlns:a16="http://schemas.microsoft.com/office/drawing/2014/main" id="{E1995594-8440-259F-25BC-C5ABFCDBBF29}"/>
-              </a:ext>
-            </a:extLst>
-          </p:cNvPr>
-          <p:cNvSpPr>
-            <a:spLocks noGrp="1"/>
-          </p:cNvSpPr>
-          <p:nvPr>
-            <p:ph idx="1"/>
-          </p:nvPr>
-        </p:nvSpPr>
-        <p:spPr/>
-        <p:txBody>
-          <a:bodyPr/>
-          <a:lstStyle/>
-          <a:p>
-            <a:r>
-              <a:rPr lang="de-DE" altLang="zh-CN" dirty="0"/>
-              <a:t>Lithium </a:t>
-            </a:r>
-            <a:r>
-              <a:rPr lang="de-DE" altLang="zh-CN" dirty="0" err="1"/>
-              <a:t>Plating</a:t>
-            </a:r>
-            <a:r>
-              <a:rPr lang="de-DE" altLang="zh-CN" dirty="0"/>
-              <a:t> als wahrscheinliche Ursache</a:t>
-            </a:r>
-          </a:p>
-          <a:p>
-            <a:r>
-              <a:rPr lang="de-DE" altLang="zh-CN" dirty="0"/>
-              <a:t>Ruhephase</a:t>
-            </a:r>
-            <a:r>
-              <a:rPr lang="en-US" altLang="zh-CN" dirty="0"/>
-              <a:t>: </a:t>
-            </a:r>
-            <a:r>
-              <a:rPr lang="en-US" altLang="zh-CN" dirty="0" err="1"/>
-              <a:t>partielle</a:t>
-            </a:r>
-            <a:r>
-              <a:rPr lang="en-US" altLang="zh-CN" dirty="0"/>
-              <a:t> </a:t>
-            </a:r>
-            <a:r>
-              <a:rPr lang="en-US" altLang="zh-CN" dirty="0" err="1"/>
-              <a:t>Reaktivierung</a:t>
-            </a:r>
-            <a:r>
-              <a:rPr lang="en-US" altLang="zh-CN" dirty="0"/>
-              <a:t> von </a:t>
-            </a:r>
-            <a:r>
-              <a:rPr lang="en-US" altLang="zh-CN" dirty="0" err="1"/>
-              <a:t>immobilisiertem</a:t>
-            </a:r>
-            <a:r>
-              <a:rPr lang="en-US" altLang="zh-CN" dirty="0"/>
-              <a:t> </a:t>
-            </a:r>
-            <a:r>
-              <a:rPr lang="en-US" altLang="zh-CN" dirty="0" err="1"/>
-              <a:t>Lithim</a:t>
-            </a:r>
-            <a:endParaRPr lang="en-US" altLang="zh-CN" dirty="0"/>
-          </a:p>
-          <a:p>
-            <a:r>
-              <a:rPr lang="en-US" altLang="zh-CN" dirty="0"/>
-              <a:t>2 Tage Ruhe: ca. 40%reversible </a:t>
-            </a:r>
-            <a:r>
-              <a:rPr lang="en-US" altLang="zh-CN" dirty="0" err="1"/>
-              <a:t>Verlust</a:t>
-            </a:r>
-            <a:r>
-              <a:rPr lang="en-US" altLang="zh-CN" dirty="0"/>
-              <a:t> </a:t>
-            </a:r>
-            <a:r>
-              <a:rPr lang="en-US" altLang="zh-CN" dirty="0" err="1"/>
-              <a:t>zu</a:t>
-            </a:r>
-            <a:r>
-              <a:rPr lang="de-DE" altLang="zh-CN" dirty="0"/>
-              <a:t>rückgewonnen</a:t>
-            </a:r>
-          </a:p>
-          <a:p>
-            <a:endParaRPr lang="zh-CN" altLang="en-US" dirty="0"/>
-          </a:p>
-        </p:txBody>
-      </p:sp>
-      <p:sp>
-        <p:nvSpPr>
-          <p:cNvPr id="4" name="日期占位符 3">
-            <a:extLst>
-              <a:ext uri="{FF2B5EF4-FFF2-40B4-BE49-F238E27FC236}">
-                <a16:creationId xmlns:a16="http://schemas.microsoft.com/office/drawing/2014/main" id="{BA7E3CD1-8D4E-8DCA-89D2-D1AA476CBD59}"/>
-              </a:ext>
-            </a:extLst>
-          </p:cNvPr>
-          <p:cNvSpPr>
-            <a:spLocks noGrp="1"/>
-          </p:cNvSpPr>
-          <p:nvPr>
-            <p:ph type="dt" sz="half" idx="10"/>
-          </p:nvPr>
-        </p:nvSpPr>
-        <p:spPr/>
-        <p:txBody>
-          <a:bodyPr/>
-          <a:lstStyle/>
-          <a:p>
-            <a:pPr algn="l"/>
-            <a:fld id="{F887C18F-21B2-48B8-9586-9343C0AE58EE}" type="datetime5">
-              <a:rPr lang="zh-CN" altLang="en-US" smtClean="0"/>
-              <a:t>2026/6/26</a:t>
-            </a:fld>
-            <a:endParaRPr lang="de-DE" dirty="0"/>
-          </a:p>
-        </p:txBody>
-      </p:sp>
-      <p:sp>
-        <p:nvSpPr>
-          <p:cNvPr id="5" name="页脚占位符 4">
-            <a:extLst>
-              <a:ext uri="{FF2B5EF4-FFF2-40B4-BE49-F238E27FC236}">
-                <a16:creationId xmlns:a16="http://schemas.microsoft.com/office/drawing/2014/main" id="{E8D55843-3BB7-39C7-91B5-213D9B310252}"/>
-              </a:ext>
-            </a:extLst>
-          </p:cNvPr>
-          <p:cNvSpPr>
-            <a:spLocks noGrp="1"/>
-          </p:cNvSpPr>
-          <p:nvPr>
-            <p:ph type="ftr" sz="quarter" idx="11"/>
-          </p:nvPr>
-        </p:nvSpPr>
-        <p:spPr/>
-        <p:txBody>
-          <a:bodyPr/>
-          <a:lstStyle/>
-          <a:p>
-            <a:r>
-              <a:rPr lang="en-US"/>
-              <a:t>Liang Huang</a:t>
-            </a:r>
-            <a:endParaRPr lang="en-US" dirty="0"/>
-          </a:p>
-        </p:txBody>
-      </p:sp>
-      <p:sp>
-        <p:nvSpPr>
-          <p:cNvPr id="6" name="灯片编号占位符 5">
-            <a:extLst>
-              <a:ext uri="{FF2B5EF4-FFF2-40B4-BE49-F238E27FC236}">
-                <a16:creationId xmlns:a16="http://schemas.microsoft.com/office/drawing/2014/main" id="{FB27361A-28EF-3455-7405-4288607EB100}"/>
-              </a:ext>
-            </a:extLst>
-          </p:cNvPr>
-          <p:cNvSpPr>
-            <a:spLocks noGrp="1"/>
-          </p:cNvSpPr>
-          <p:nvPr>
-            <p:ph type="sldNum" sz="quarter" idx="12"/>
-          </p:nvPr>
-        </p:nvSpPr>
-        <p:spPr/>
-        <p:txBody>
-          <a:bodyPr/>
-          <a:lstStyle/>
-          <a:p>
-            <a:fld id="{4D01E63C-D794-4429-8564-635E6253AC5C}" type="slidenum">
-              <a:rPr lang="en-US" smtClean="0"/>
-              <a:t>9</a:t>
-            </a:fld>
-            <a:endParaRPr lang="en-US" dirty="0"/>
-          </a:p>
-        </p:txBody>
-      </p:sp>
-      <p:pic>
-        <p:nvPicPr>
-          <p:cNvPr id="11" name="图片 10">
-            <a:extLst>
-              <a:ext uri="{FF2B5EF4-FFF2-40B4-BE49-F238E27FC236}">
-                <a16:creationId xmlns:a16="http://schemas.microsoft.com/office/drawing/2014/main" id="{BEE30925-EE32-5BBC-0468-069C914F3506}"/>
-              </a:ext>
-            </a:extLst>
-          </p:cNvPr>
-          <p:cNvPicPr>
-            <a:picLocks noChangeAspect="1"/>
-          </p:cNvPicPr>
-          <p:nvPr/>
-        </p:nvPicPr>
-        <p:blipFill>
-          <a:blip r:embed="rId2" cstate="print">
-            <a:extLst>
-              <a:ext uri="{28A0092B-C50C-407E-A947-70E740481C1C}">
-                <a14:useLocalDpi xmlns:a14="http://schemas.microsoft.com/office/drawing/2010/main" val="0"/>
-              </a:ext>
-            </a:extLst>
-          </a:blip>
-          <a:stretch>
-            <a:fillRect/>
-          </a:stretch>
-        </p:blipFill>
-        <p:spPr>
-          <a:xfrm>
-            <a:off x="383950" y="2693313"/>
-            <a:ext cx="5334000" cy="3429000"/>
-          </a:xfrm>
-          <a:prstGeom prst="rect">
-            <a:avLst/>
-          </a:prstGeom>
-        </p:spPr>
-      </p:pic>
-    </p:spTree>
-    <p:extLst>
-      <p:ext uri="{BB962C8B-B14F-4D97-AF65-F5344CB8AC3E}">
-        <p14:creationId xmlns:p14="http://schemas.microsoft.com/office/powerpoint/2010/main" val="510032915"/>
-      </p:ext>
-    </p:extLst>
   </p:cSld>
   <p:clrMapOvr>
     <a:masterClrMapping/>
